--- a/slides/intro-to-git-and-github.pptx
+++ b/slides/intro-to-git-and-github.pptx
@@ -11,6 +11,8 @@
     <p:sldId id="259" r:id="rId5"/>
     <p:sldId id="260" r:id="rId6"/>
     <p:sldId id="261" r:id="rId7"/>
+    <p:sldId id="262" r:id="rId8"/>
+    <p:sldId id="263" r:id="rId9"/>
   </p:sldIdLst>
   <p:sldSz cx="12192000" cy="6858000"/>
   <p:notesSz cx="6858000" cy="9144000"/>
@@ -4508,8 +4510,8 @@
         </p:nvSpPr>
         <p:spPr>
           <a:xfrm>
-            <a:off x="5631546" y="1567763"/>
-            <a:ext cx="5196112" cy="1200329"/>
+            <a:off x="5631546" y="376637"/>
+            <a:ext cx="5196112" cy="830997"/>
           </a:xfrm>
           <a:prstGeom prst="rect">
             <a:avLst/>
@@ -4527,17 +4529,17 @@
                 <a:latin typeface="Arial" panose="020B0604020202020204" pitchFamily="34" charset="0"/>
                 <a:cs typeface="Arial" panose="020B0604020202020204" pitchFamily="34" charset="0"/>
               </a:rPr>
-              <a:t>A repository (“repo”) is a folder on your computer that is under version control</a:t>
-            </a:r>
-          </a:p>
-        </p:txBody>
-      </p:sp>
-      <p:sp>
-        <p:nvSpPr>
-          <p:cNvPr id="23" name="TextBox 22">
+              <a:t>When you’re ready, create a snapshot of the current project state</a:t>
+            </a:r>
+          </a:p>
+        </p:txBody>
+      </p:sp>
+      <p:sp>
+        <p:nvSpPr>
+          <p:cNvPr id="3" name="TextBox 2">
             <a:extLst>
               <a:ext uri="{FF2B5EF4-FFF2-40B4-BE49-F238E27FC236}">
-                <a16:creationId xmlns:a16="http://schemas.microsoft.com/office/drawing/2014/main" id="{97D7698C-D0BD-E0CB-5FF9-2C4C41D1F7BD}"/>
+                <a16:creationId xmlns:a16="http://schemas.microsoft.com/office/drawing/2014/main" id="{764242C6-1D10-85B8-DE63-A1B3C1365FDE}"/>
               </a:ext>
             </a:extLst>
           </p:cNvPr>
@@ -4546,7 +4548,229 @@
         </p:nvSpPr>
         <p:spPr>
           <a:xfrm>
-            <a:off x="5631546" y="3195708"/>
+            <a:off x="6096000" y="3073500"/>
+            <a:ext cx="5196112" cy="830997"/>
+          </a:xfrm>
+          <a:prstGeom prst="rect">
+            <a:avLst/>
+          </a:prstGeom>
+          <a:noFill/>
+        </p:spPr>
+        <p:txBody>
+          <a:bodyPr wrap="square" rtlCol="0">
+            <a:spAutoFit/>
+          </a:bodyPr>
+          <a:lstStyle/>
+          <a:p>
+            <a:r>
+              <a:rPr lang="en-US" sz="2400" dirty="0">
+                <a:latin typeface="Arial" panose="020B0604020202020204" pitchFamily="34" charset="0"/>
+                <a:cs typeface="Arial" panose="020B0604020202020204" pitchFamily="34" charset="0"/>
+              </a:rPr>
+              <a:t>All files: </a:t>
+            </a:r>
+          </a:p>
+          <a:p>
+            <a:r>
+              <a:rPr lang="en-US" sz="2400" dirty="0">
+                <a:latin typeface="Courier New" panose="02070309020205020404" pitchFamily="49" charset="0"/>
+                <a:cs typeface="Courier New" panose="02070309020205020404" pitchFamily="49" charset="0"/>
+              </a:rPr>
+              <a:t>git add --all</a:t>
+            </a:r>
+          </a:p>
+        </p:txBody>
+      </p:sp>
+      <p:sp>
+        <p:nvSpPr>
+          <p:cNvPr id="4" name="TextBox 3">
+            <a:extLst>
+              <a:ext uri="{FF2B5EF4-FFF2-40B4-BE49-F238E27FC236}">
+                <a16:creationId xmlns:a16="http://schemas.microsoft.com/office/drawing/2014/main" id="{3E87E4D5-628E-4153-D48F-A751695F152C}"/>
+              </a:ext>
+            </a:extLst>
+          </p:cNvPr>
+          <p:cNvSpPr txBox="1"/>
+          <p:nvPr/>
+        </p:nvSpPr>
+        <p:spPr>
+          <a:xfrm>
+            <a:off x="6096000" y="2237874"/>
+            <a:ext cx="5926470" cy="830997"/>
+          </a:xfrm>
+          <a:prstGeom prst="rect">
+            <a:avLst/>
+          </a:prstGeom>
+          <a:noFill/>
+        </p:spPr>
+        <p:txBody>
+          <a:bodyPr wrap="square" rtlCol="0">
+            <a:spAutoFit/>
+          </a:bodyPr>
+          <a:lstStyle/>
+          <a:p>
+            <a:r>
+              <a:rPr lang="en-US" sz="2400" dirty="0">
+                <a:latin typeface="Arial" panose="020B0604020202020204" pitchFamily="34" charset="0"/>
+                <a:cs typeface="Arial" panose="020B0604020202020204" pitchFamily="34" charset="0"/>
+              </a:rPr>
+              <a:t>Single file: </a:t>
+            </a:r>
+          </a:p>
+          <a:p>
+            <a:r>
+              <a:rPr lang="en-US" sz="2400" dirty="0">
+                <a:latin typeface="Courier New" panose="02070309020205020404" pitchFamily="49" charset="0"/>
+                <a:cs typeface="Courier New" panose="02070309020205020404" pitchFamily="49" charset="0"/>
+              </a:rPr>
+              <a:t>git add source/hello.py</a:t>
+            </a:r>
+          </a:p>
+        </p:txBody>
+      </p:sp>
+      <p:sp>
+        <p:nvSpPr>
+          <p:cNvPr id="5" name="TextBox 4">
+            <a:extLst>
+              <a:ext uri="{FF2B5EF4-FFF2-40B4-BE49-F238E27FC236}">
+                <a16:creationId xmlns:a16="http://schemas.microsoft.com/office/drawing/2014/main" id="{C14ACE33-CDF9-628D-74C6-9B0758581A72}"/>
+              </a:ext>
+            </a:extLst>
+          </p:cNvPr>
+          <p:cNvSpPr txBox="1"/>
+          <p:nvPr/>
+        </p:nvSpPr>
+        <p:spPr>
+          <a:xfrm>
+            <a:off x="5631546" y="1295037"/>
+            <a:ext cx="5196112" cy="830997"/>
+          </a:xfrm>
+          <a:prstGeom prst="rect">
+            <a:avLst/>
+          </a:prstGeom>
+          <a:noFill/>
+        </p:spPr>
+        <p:txBody>
+          <a:bodyPr wrap="square" rtlCol="0">
+            <a:spAutoFit/>
+          </a:bodyPr>
+          <a:lstStyle/>
+          <a:p>
+            <a:r>
+              <a:rPr lang="en-US" sz="2400" b="1" dirty="0">
+                <a:latin typeface="Arial" panose="020B0604020202020204" pitchFamily="34" charset="0"/>
+                <a:cs typeface="Arial" panose="020B0604020202020204" pitchFamily="34" charset="0"/>
+              </a:rPr>
+              <a:t>Step 1</a:t>
+            </a:r>
+            <a:r>
+              <a:rPr lang="en-US" sz="2400" dirty="0">
+                <a:latin typeface="Arial" panose="020B0604020202020204" pitchFamily="34" charset="0"/>
+                <a:cs typeface="Arial" panose="020B0604020202020204" pitchFamily="34" charset="0"/>
+              </a:rPr>
+              <a:t>: select which files you want to  include in the snapshot</a:t>
+            </a:r>
+          </a:p>
+        </p:txBody>
+      </p:sp>
+      <p:sp>
+        <p:nvSpPr>
+          <p:cNvPr id="6" name="TextBox 5">
+            <a:extLst>
+              <a:ext uri="{FF2B5EF4-FFF2-40B4-BE49-F238E27FC236}">
+                <a16:creationId xmlns:a16="http://schemas.microsoft.com/office/drawing/2014/main" id="{8EEEC2A7-5658-5D87-2C09-11D2349D3078}"/>
+              </a:ext>
+            </a:extLst>
+          </p:cNvPr>
+          <p:cNvSpPr txBox="1"/>
+          <p:nvPr/>
+        </p:nvSpPr>
+        <p:spPr>
+          <a:xfrm>
+            <a:off x="5631546" y="4028938"/>
+            <a:ext cx="5196112" cy="461665"/>
+          </a:xfrm>
+          <a:prstGeom prst="rect">
+            <a:avLst/>
+          </a:prstGeom>
+          <a:noFill/>
+        </p:spPr>
+        <p:txBody>
+          <a:bodyPr wrap="square" rtlCol="0">
+            <a:spAutoFit/>
+          </a:bodyPr>
+          <a:lstStyle/>
+          <a:p>
+            <a:r>
+              <a:rPr lang="en-US" sz="2400" b="1" dirty="0">
+                <a:latin typeface="Arial" panose="020B0604020202020204" pitchFamily="34" charset="0"/>
+                <a:cs typeface="Arial" panose="020B0604020202020204" pitchFamily="34" charset="0"/>
+              </a:rPr>
+              <a:t>Step 2</a:t>
+            </a:r>
+            <a:r>
+              <a:rPr lang="en-US" sz="2400" dirty="0">
+                <a:latin typeface="Arial" panose="020B0604020202020204" pitchFamily="34" charset="0"/>
+                <a:cs typeface="Arial" panose="020B0604020202020204" pitchFamily="34" charset="0"/>
+              </a:rPr>
+              <a:t>: save the snapshot</a:t>
+            </a:r>
+          </a:p>
+        </p:txBody>
+      </p:sp>
+      <p:sp>
+        <p:nvSpPr>
+          <p:cNvPr id="7" name="TextBox 6">
+            <a:extLst>
+              <a:ext uri="{FF2B5EF4-FFF2-40B4-BE49-F238E27FC236}">
+                <a16:creationId xmlns:a16="http://schemas.microsoft.com/office/drawing/2014/main" id="{9EBCFECB-4285-F133-A1E2-211209A049A9}"/>
+              </a:ext>
+            </a:extLst>
+          </p:cNvPr>
+          <p:cNvSpPr txBox="1"/>
+          <p:nvPr/>
+        </p:nvSpPr>
+        <p:spPr>
+          <a:xfrm>
+            <a:off x="6096000" y="4490603"/>
+            <a:ext cx="5524134" cy="461665"/>
+          </a:xfrm>
+          <a:prstGeom prst="rect">
+            <a:avLst/>
+          </a:prstGeom>
+          <a:noFill/>
+        </p:spPr>
+        <p:txBody>
+          <a:bodyPr wrap="square" rtlCol="0">
+            <a:spAutoFit/>
+          </a:bodyPr>
+          <a:lstStyle/>
+          <a:p>
+            <a:r>
+              <a:rPr lang="en-US" sz="2400" dirty="0">
+                <a:latin typeface="Courier New" panose="02070309020205020404" pitchFamily="49" charset="0"/>
+                <a:cs typeface="Courier New" panose="02070309020205020404" pitchFamily="49" charset="0"/>
+              </a:rPr>
+              <a:t>git commit –m "I changed... "</a:t>
+            </a:r>
+          </a:p>
+        </p:txBody>
+      </p:sp>
+      <p:sp>
+        <p:nvSpPr>
+          <p:cNvPr id="8" name="TextBox 7">
+            <a:extLst>
+              <a:ext uri="{FF2B5EF4-FFF2-40B4-BE49-F238E27FC236}">
+                <a16:creationId xmlns:a16="http://schemas.microsoft.com/office/drawing/2014/main" id="{F071D818-AA8D-D7FE-1D8E-151E6D8F5436}"/>
+              </a:ext>
+            </a:extLst>
+          </p:cNvPr>
+          <p:cNvSpPr txBox="1"/>
+          <p:nvPr/>
+        </p:nvSpPr>
+        <p:spPr>
+          <a:xfrm>
+            <a:off x="6096000" y="4976404"/>
             <a:ext cx="5196112" cy="1569660"/>
           </a:xfrm>
           <a:prstGeom prst="rect">
@@ -4565,38 +4789,540 @@
                 <a:latin typeface="Arial" panose="020B0604020202020204" pitchFamily="34" charset="0"/>
                 <a:cs typeface="Arial" panose="020B0604020202020204" pitchFamily="34" charset="0"/>
               </a:rPr>
-              <a:t>Git adds a special </a:t>
-            </a:r>
+              <a:t>Your snapshot is saved locally and can be referred to by the commit hash. View with history with:</a:t>
+            </a:r>
+          </a:p>
+          <a:p>
             <a:r>
               <a:rPr lang="en-US" sz="2400" dirty="0">
                 <a:latin typeface="Courier New" panose="02070309020205020404" pitchFamily="49" charset="0"/>
                 <a:cs typeface="Courier New" panose="02070309020205020404" pitchFamily="49" charset="0"/>
               </a:rPr>
-              <a:t>.git/</a:t>
-            </a:r>
-            <a:r>
-              <a:rPr lang="en-US" sz="2400" dirty="0">
-                <a:latin typeface="Arial" panose="020B0604020202020204" pitchFamily="34" charset="0"/>
-                <a:cs typeface="Arial" panose="020B0604020202020204" pitchFamily="34" charset="0"/>
-              </a:rPr>
-              <a:t> folder that stores information about the repo and tracks changes. </a:t>
-            </a:r>
-            <a:r>
-              <a:rPr lang="en-US" sz="2400" b="1" dirty="0">
-                <a:latin typeface="Arial" panose="020B0604020202020204" pitchFamily="34" charset="0"/>
-                <a:cs typeface="Arial" panose="020B0604020202020204" pitchFamily="34" charset="0"/>
-              </a:rPr>
-              <a:t>Don’t mess with the contents of this folder!</a:t>
-            </a:r>
-          </a:p>
-        </p:txBody>
-      </p:sp>
-      <p:sp>
-        <p:nvSpPr>
-          <p:cNvPr id="24" name="TextBox 23">
+              <a:t>git log</a:t>
+            </a:r>
+          </a:p>
+        </p:txBody>
+      </p:sp>
+    </p:spTree>
+    <p:extLst>
+      <p:ext uri="{BB962C8B-B14F-4D97-AF65-F5344CB8AC3E}">
+        <p14:creationId xmlns:p14="http://schemas.microsoft.com/office/powerpoint/2010/main" val="2137251374"/>
+      </p:ext>
+    </p:extLst>
+  </p:cSld>
+  <p:clrMapOvr>
+    <a:masterClrMapping/>
+  </p:clrMapOvr>
+  <p:timing>
+    <p:tnLst>
+      <p:par>
+        <p:cTn id="1" dur="indefinite" restart="never" nodeType="tmRoot">
+          <p:childTnLst>
+            <p:seq concurrent="1" nextAc="seek">
+              <p:cTn id="2" dur="indefinite" nodeType="mainSeq">
+                <p:childTnLst>
+                  <p:par>
+                    <p:cTn id="3" fill="hold">
+                      <p:stCondLst>
+                        <p:cond delay="indefinite"/>
+                      </p:stCondLst>
+                      <p:childTnLst>
+                        <p:par>
+                          <p:cTn id="4" fill="hold">
+                            <p:stCondLst>
+                              <p:cond delay="0"/>
+                            </p:stCondLst>
+                            <p:childTnLst>
+                              <p:par>
+                                <p:cTn id="5" presetID="10" presetClass="entr" presetSubtype="0" fill="hold" grpId="0" nodeType="clickEffect">
+                                  <p:stCondLst>
+                                    <p:cond delay="0"/>
+                                  </p:stCondLst>
+                                  <p:childTnLst>
+                                    <p:set>
+                                      <p:cBhvr>
+                                        <p:cTn id="6" dur="1" fill="hold">
+                                          <p:stCondLst>
+                                            <p:cond delay="0"/>
+                                          </p:stCondLst>
+                                        </p:cTn>
+                                        <p:tgtEl>
+                                          <p:spTgt spid="22"/>
+                                        </p:tgtEl>
+                                        <p:attrNameLst>
+                                          <p:attrName>style.visibility</p:attrName>
+                                        </p:attrNameLst>
+                                      </p:cBhvr>
+                                      <p:to>
+                                        <p:strVal val="visible"/>
+                                      </p:to>
+                                    </p:set>
+                                    <p:animEffect transition="in" filter="fade">
+                                      <p:cBhvr>
+                                        <p:cTn id="7" dur="500"/>
+                                        <p:tgtEl>
+                                          <p:spTgt spid="22"/>
+                                        </p:tgtEl>
+                                      </p:cBhvr>
+                                    </p:animEffect>
+                                  </p:childTnLst>
+                                </p:cTn>
+                              </p:par>
+                            </p:childTnLst>
+                          </p:cTn>
+                        </p:par>
+                      </p:childTnLst>
+                    </p:cTn>
+                  </p:par>
+                  <p:par>
+                    <p:cTn id="8" fill="hold">
+                      <p:stCondLst>
+                        <p:cond delay="indefinite"/>
+                      </p:stCondLst>
+                      <p:childTnLst>
+                        <p:par>
+                          <p:cTn id="9" fill="hold">
+                            <p:stCondLst>
+                              <p:cond delay="0"/>
+                            </p:stCondLst>
+                            <p:childTnLst>
+                              <p:par>
+                                <p:cTn id="10" presetID="10" presetClass="entr" presetSubtype="0" fill="hold" grpId="0" nodeType="clickEffect">
+                                  <p:stCondLst>
+                                    <p:cond delay="0"/>
+                                  </p:stCondLst>
+                                  <p:childTnLst>
+                                    <p:set>
+                                      <p:cBhvr>
+                                        <p:cTn id="11" dur="1" fill="hold">
+                                          <p:stCondLst>
+                                            <p:cond delay="0"/>
+                                          </p:stCondLst>
+                                        </p:cTn>
+                                        <p:tgtEl>
+                                          <p:spTgt spid="5"/>
+                                        </p:tgtEl>
+                                        <p:attrNameLst>
+                                          <p:attrName>style.visibility</p:attrName>
+                                        </p:attrNameLst>
+                                      </p:cBhvr>
+                                      <p:to>
+                                        <p:strVal val="visible"/>
+                                      </p:to>
+                                    </p:set>
+                                    <p:animEffect transition="in" filter="fade">
+                                      <p:cBhvr>
+                                        <p:cTn id="12" dur="500"/>
+                                        <p:tgtEl>
+                                          <p:spTgt spid="5"/>
+                                        </p:tgtEl>
+                                      </p:cBhvr>
+                                    </p:animEffect>
+                                  </p:childTnLst>
+                                </p:cTn>
+                              </p:par>
+                            </p:childTnLst>
+                          </p:cTn>
+                        </p:par>
+                      </p:childTnLst>
+                    </p:cTn>
+                  </p:par>
+                  <p:par>
+                    <p:cTn id="13" fill="hold">
+                      <p:stCondLst>
+                        <p:cond delay="indefinite"/>
+                      </p:stCondLst>
+                      <p:childTnLst>
+                        <p:par>
+                          <p:cTn id="14" fill="hold">
+                            <p:stCondLst>
+                              <p:cond delay="0"/>
+                            </p:stCondLst>
+                            <p:childTnLst>
+                              <p:par>
+                                <p:cTn id="15" presetID="10" presetClass="entr" presetSubtype="0" fill="hold" grpId="0" nodeType="clickEffect">
+                                  <p:stCondLst>
+                                    <p:cond delay="0"/>
+                                  </p:stCondLst>
+                                  <p:childTnLst>
+                                    <p:set>
+                                      <p:cBhvr>
+                                        <p:cTn id="16" dur="1" fill="hold">
+                                          <p:stCondLst>
+                                            <p:cond delay="0"/>
+                                          </p:stCondLst>
+                                        </p:cTn>
+                                        <p:tgtEl>
+                                          <p:spTgt spid="4"/>
+                                        </p:tgtEl>
+                                        <p:attrNameLst>
+                                          <p:attrName>style.visibility</p:attrName>
+                                        </p:attrNameLst>
+                                      </p:cBhvr>
+                                      <p:to>
+                                        <p:strVal val="visible"/>
+                                      </p:to>
+                                    </p:set>
+                                    <p:animEffect transition="in" filter="fade">
+                                      <p:cBhvr>
+                                        <p:cTn id="17" dur="500"/>
+                                        <p:tgtEl>
+                                          <p:spTgt spid="4"/>
+                                        </p:tgtEl>
+                                      </p:cBhvr>
+                                    </p:animEffect>
+                                  </p:childTnLst>
+                                </p:cTn>
+                              </p:par>
+                            </p:childTnLst>
+                          </p:cTn>
+                        </p:par>
+                      </p:childTnLst>
+                    </p:cTn>
+                  </p:par>
+                  <p:par>
+                    <p:cTn id="18" fill="hold">
+                      <p:stCondLst>
+                        <p:cond delay="indefinite"/>
+                      </p:stCondLst>
+                      <p:childTnLst>
+                        <p:par>
+                          <p:cTn id="19" fill="hold">
+                            <p:stCondLst>
+                              <p:cond delay="0"/>
+                            </p:stCondLst>
+                            <p:childTnLst>
+                              <p:par>
+                                <p:cTn id="20" presetID="10" presetClass="entr" presetSubtype="0" fill="hold" grpId="0" nodeType="clickEffect">
+                                  <p:stCondLst>
+                                    <p:cond delay="0"/>
+                                  </p:stCondLst>
+                                  <p:childTnLst>
+                                    <p:set>
+                                      <p:cBhvr>
+                                        <p:cTn id="21" dur="1" fill="hold">
+                                          <p:stCondLst>
+                                            <p:cond delay="0"/>
+                                          </p:stCondLst>
+                                        </p:cTn>
+                                        <p:tgtEl>
+                                          <p:spTgt spid="3"/>
+                                        </p:tgtEl>
+                                        <p:attrNameLst>
+                                          <p:attrName>style.visibility</p:attrName>
+                                        </p:attrNameLst>
+                                      </p:cBhvr>
+                                      <p:to>
+                                        <p:strVal val="visible"/>
+                                      </p:to>
+                                    </p:set>
+                                    <p:animEffect transition="in" filter="fade">
+                                      <p:cBhvr>
+                                        <p:cTn id="22" dur="500"/>
+                                        <p:tgtEl>
+                                          <p:spTgt spid="3"/>
+                                        </p:tgtEl>
+                                      </p:cBhvr>
+                                    </p:animEffect>
+                                  </p:childTnLst>
+                                </p:cTn>
+                              </p:par>
+                            </p:childTnLst>
+                          </p:cTn>
+                        </p:par>
+                      </p:childTnLst>
+                    </p:cTn>
+                  </p:par>
+                  <p:par>
+                    <p:cTn id="23" fill="hold">
+                      <p:stCondLst>
+                        <p:cond delay="indefinite"/>
+                      </p:stCondLst>
+                      <p:childTnLst>
+                        <p:par>
+                          <p:cTn id="24" fill="hold">
+                            <p:stCondLst>
+                              <p:cond delay="0"/>
+                            </p:stCondLst>
+                            <p:childTnLst>
+                              <p:par>
+                                <p:cTn id="25" presetID="10" presetClass="entr" presetSubtype="0" fill="hold" grpId="0" nodeType="clickEffect">
+                                  <p:stCondLst>
+                                    <p:cond delay="0"/>
+                                  </p:stCondLst>
+                                  <p:childTnLst>
+                                    <p:set>
+                                      <p:cBhvr>
+                                        <p:cTn id="26" dur="1" fill="hold">
+                                          <p:stCondLst>
+                                            <p:cond delay="0"/>
+                                          </p:stCondLst>
+                                        </p:cTn>
+                                        <p:tgtEl>
+                                          <p:spTgt spid="6"/>
+                                        </p:tgtEl>
+                                        <p:attrNameLst>
+                                          <p:attrName>style.visibility</p:attrName>
+                                        </p:attrNameLst>
+                                      </p:cBhvr>
+                                      <p:to>
+                                        <p:strVal val="visible"/>
+                                      </p:to>
+                                    </p:set>
+                                    <p:animEffect transition="in" filter="fade">
+                                      <p:cBhvr>
+                                        <p:cTn id="27" dur="500"/>
+                                        <p:tgtEl>
+                                          <p:spTgt spid="6"/>
+                                        </p:tgtEl>
+                                      </p:cBhvr>
+                                    </p:animEffect>
+                                  </p:childTnLst>
+                                </p:cTn>
+                              </p:par>
+                            </p:childTnLst>
+                          </p:cTn>
+                        </p:par>
+                      </p:childTnLst>
+                    </p:cTn>
+                  </p:par>
+                  <p:par>
+                    <p:cTn id="28" fill="hold">
+                      <p:stCondLst>
+                        <p:cond delay="indefinite"/>
+                      </p:stCondLst>
+                      <p:childTnLst>
+                        <p:par>
+                          <p:cTn id="29" fill="hold">
+                            <p:stCondLst>
+                              <p:cond delay="0"/>
+                            </p:stCondLst>
+                            <p:childTnLst>
+                              <p:par>
+                                <p:cTn id="30" presetID="10" presetClass="entr" presetSubtype="0" fill="hold" grpId="0" nodeType="clickEffect">
+                                  <p:stCondLst>
+                                    <p:cond delay="0"/>
+                                  </p:stCondLst>
+                                  <p:childTnLst>
+                                    <p:set>
+                                      <p:cBhvr>
+                                        <p:cTn id="31" dur="1" fill="hold">
+                                          <p:stCondLst>
+                                            <p:cond delay="0"/>
+                                          </p:stCondLst>
+                                        </p:cTn>
+                                        <p:tgtEl>
+                                          <p:spTgt spid="7"/>
+                                        </p:tgtEl>
+                                        <p:attrNameLst>
+                                          <p:attrName>style.visibility</p:attrName>
+                                        </p:attrNameLst>
+                                      </p:cBhvr>
+                                      <p:to>
+                                        <p:strVal val="visible"/>
+                                      </p:to>
+                                    </p:set>
+                                    <p:animEffect transition="in" filter="fade">
+                                      <p:cBhvr>
+                                        <p:cTn id="32" dur="500"/>
+                                        <p:tgtEl>
+                                          <p:spTgt spid="7"/>
+                                        </p:tgtEl>
+                                      </p:cBhvr>
+                                    </p:animEffect>
+                                  </p:childTnLst>
+                                </p:cTn>
+                              </p:par>
+                            </p:childTnLst>
+                          </p:cTn>
+                        </p:par>
+                      </p:childTnLst>
+                    </p:cTn>
+                  </p:par>
+                  <p:par>
+                    <p:cTn id="33" fill="hold">
+                      <p:stCondLst>
+                        <p:cond delay="indefinite"/>
+                      </p:stCondLst>
+                      <p:childTnLst>
+                        <p:par>
+                          <p:cTn id="34" fill="hold">
+                            <p:stCondLst>
+                              <p:cond delay="0"/>
+                            </p:stCondLst>
+                            <p:childTnLst>
+                              <p:par>
+                                <p:cTn id="35" presetID="10" presetClass="entr" presetSubtype="0" fill="hold" grpId="0" nodeType="clickEffect">
+                                  <p:stCondLst>
+                                    <p:cond delay="0"/>
+                                  </p:stCondLst>
+                                  <p:childTnLst>
+                                    <p:set>
+                                      <p:cBhvr>
+                                        <p:cTn id="36" dur="1" fill="hold">
+                                          <p:stCondLst>
+                                            <p:cond delay="0"/>
+                                          </p:stCondLst>
+                                        </p:cTn>
+                                        <p:tgtEl>
+                                          <p:spTgt spid="8"/>
+                                        </p:tgtEl>
+                                        <p:attrNameLst>
+                                          <p:attrName>style.visibility</p:attrName>
+                                        </p:attrNameLst>
+                                      </p:cBhvr>
+                                      <p:to>
+                                        <p:strVal val="visible"/>
+                                      </p:to>
+                                    </p:set>
+                                    <p:animEffect transition="in" filter="fade">
+                                      <p:cBhvr>
+                                        <p:cTn id="37" dur="500"/>
+                                        <p:tgtEl>
+                                          <p:spTgt spid="8"/>
+                                        </p:tgtEl>
+                                      </p:cBhvr>
+                                    </p:animEffect>
+                                  </p:childTnLst>
+                                </p:cTn>
+                              </p:par>
+                            </p:childTnLst>
+                          </p:cTn>
+                        </p:par>
+                      </p:childTnLst>
+                    </p:cTn>
+                  </p:par>
+                </p:childTnLst>
+              </p:cTn>
+              <p:prevCondLst>
+                <p:cond evt="onPrev" delay="0">
+                  <p:tgtEl>
+                    <p:sldTgt/>
+                  </p:tgtEl>
+                </p:cond>
+              </p:prevCondLst>
+              <p:nextCondLst>
+                <p:cond evt="onNext" delay="0">
+                  <p:tgtEl>
+                    <p:sldTgt/>
+                  </p:tgtEl>
+                </p:cond>
+              </p:nextCondLst>
+            </p:seq>
+          </p:childTnLst>
+        </p:cTn>
+      </p:par>
+    </p:tnLst>
+    <p:bldLst>
+      <p:bldP spid="22" grpId="0"/>
+      <p:bldP spid="3" grpId="0"/>
+      <p:bldP spid="4" grpId="0"/>
+      <p:bldP spid="5" grpId="0"/>
+      <p:bldP spid="6" grpId="0"/>
+      <p:bldP spid="7" grpId="0"/>
+      <p:bldP spid="8" grpId="0"/>
+    </p:bldLst>
+  </p:timing>
+</p:sld>
+</file>
+
+<file path=ppt/slides/slide7.xml><?xml version="1.0" encoding="utf-8"?>
+<p:sld xmlns:a="http://schemas.openxmlformats.org/drawingml/2006/main" xmlns:r="http://schemas.openxmlformats.org/officeDocument/2006/relationships" xmlns:p="http://schemas.openxmlformats.org/presentationml/2006/main">
+  <p:cSld>
+    <p:spTree>
+      <p:nvGrpSpPr>
+        <p:cNvPr id="1" name="">
+          <a:extLst>
+            <a:ext uri="{FF2B5EF4-FFF2-40B4-BE49-F238E27FC236}">
+              <a16:creationId xmlns:a16="http://schemas.microsoft.com/office/drawing/2014/main" id="{98D259C2-A5D5-CECA-7A51-45C87670C8A8}"/>
+            </a:ext>
+          </a:extLst>
+        </p:cNvPr>
+        <p:cNvGrpSpPr/>
+        <p:nvPr/>
+      </p:nvGrpSpPr>
+      <p:grpSpPr>
+        <a:xfrm>
+          <a:off x="0" y="0"/>
+          <a:ext cx="0" cy="0"/>
+          <a:chOff x="0" y="0"/>
+          <a:chExt cx="0" cy="0"/>
+        </a:xfrm>
+      </p:grpSpPr>
+      <p:sp>
+        <p:nvSpPr>
+          <p:cNvPr id="2" name="Title 1">
             <a:extLst>
               <a:ext uri="{FF2B5EF4-FFF2-40B4-BE49-F238E27FC236}">
-                <a16:creationId xmlns:a16="http://schemas.microsoft.com/office/drawing/2014/main" id="{EE6B8C1A-B4B3-F8D9-9807-FCBEB2333198}"/>
+                <a16:creationId xmlns:a16="http://schemas.microsoft.com/office/drawing/2014/main" id="{AB688469-9DCD-31D1-4236-98FF878C8628}"/>
+              </a:ext>
+            </a:extLst>
+          </p:cNvPr>
+          <p:cNvSpPr>
+            <a:spLocks noGrp="1"/>
+          </p:cNvSpPr>
+          <p:nvPr>
+            <p:ph type="title"/>
+          </p:nvPr>
+        </p:nvSpPr>
+        <p:spPr/>
+        <p:txBody>
+          <a:bodyPr/>
+          <a:lstStyle/>
+          <a:p>
+            <a:r>
+              <a:rPr lang="en-US" dirty="0"/>
+              <a:t>Workflow</a:t>
+            </a:r>
+            <a:endParaRPr lang="en-US" dirty="0">
+              <a:latin typeface="Arial" panose="020B0604020202020204" pitchFamily="34" charset="0"/>
+              <a:cs typeface="Arial" panose="020B0604020202020204" pitchFamily="34" charset="0"/>
+            </a:endParaRPr>
+          </a:p>
+        </p:txBody>
+      </p:sp>
+      <p:pic>
+        <p:nvPicPr>
+          <p:cNvPr id="10" name="Picture 9">
+            <a:extLst>
+              <a:ext uri="{FF2B5EF4-FFF2-40B4-BE49-F238E27FC236}">
+                <a16:creationId xmlns:a16="http://schemas.microsoft.com/office/drawing/2014/main" id="{CAF250EC-4B73-4B3D-24E9-C3709F884E91}"/>
+              </a:ext>
+            </a:extLst>
+          </p:cNvPr>
+          <p:cNvPicPr>
+            <a:picLocks noChangeAspect="1"/>
+          </p:cNvPicPr>
+          <p:nvPr/>
+        </p:nvPicPr>
+        <p:blipFill>
+          <a:blip r:embed="rId2">
+            <a:extLst>
+              <a:ext uri="{28A0092B-C50C-407E-A947-70E740481C1C}">
+                <a14:useLocalDpi xmlns:a14="http://schemas.microsoft.com/office/drawing/2010/main" val="0"/>
+              </a:ext>
+            </a:extLst>
+          </a:blip>
+          <a:stretch>
+            <a:fillRect/>
+          </a:stretch>
+        </p:blipFill>
+        <p:spPr>
+          <a:xfrm>
+            <a:off x="1026886" y="1207634"/>
+            <a:ext cx="2935514" cy="2935514"/>
+          </a:xfrm>
+          <a:prstGeom prst="rect">
+            <a:avLst/>
+          </a:prstGeom>
+        </p:spPr>
+      </p:pic>
+      <p:sp>
+        <p:nvSpPr>
+          <p:cNvPr id="19" name="TextBox 18">
+            <a:extLst>
+              <a:ext uri="{FF2B5EF4-FFF2-40B4-BE49-F238E27FC236}">
+                <a16:creationId xmlns:a16="http://schemas.microsoft.com/office/drawing/2014/main" id="{41E83B10-1B39-851A-DE39-7F8A4EF4C579}"/>
               </a:ext>
             </a:extLst>
           </p:cNvPr>
@@ -4605,8 +5331,8 @@
         </p:nvSpPr>
         <p:spPr>
           <a:xfrm>
-            <a:off x="5631546" y="5140014"/>
-            <a:ext cx="5196112" cy="1200329"/>
+            <a:off x="1760688" y="3988410"/>
+            <a:ext cx="2390398" cy="1754326"/>
           </a:xfrm>
           <a:prstGeom prst="rect">
             <a:avLst/>
@@ -4614,40 +5340,164 @@
           <a:noFill/>
         </p:spPr>
         <p:txBody>
-          <a:bodyPr wrap="square" rtlCol="0">
+          <a:bodyPr wrap="none" rtlCol="0">
             <a:spAutoFit/>
           </a:bodyPr>
           <a:lstStyle/>
           <a:p>
             <a:r>
-              <a:rPr lang="en-US" sz="2400" dirty="0">
-                <a:latin typeface="Arial" panose="020B0604020202020204" pitchFamily="34" charset="0"/>
-                <a:cs typeface="Arial" panose="020B0604020202020204" pitchFamily="34" charset="0"/>
+              <a:rPr lang="en-US" dirty="0">
+                <a:latin typeface="Courier New" panose="02070309020205020404" pitchFamily="49" charset="0"/>
+                <a:cs typeface="Courier New" panose="02070309020205020404" pitchFamily="49" charset="0"/>
               </a:rPr>
-              <a:t>Add, modify, delete anything else in this directory (code files, CAD files, README, etc.)</a:t>
-            </a:r>
-          </a:p>
-        </p:txBody>
-      </p:sp>
+              <a:t>my-repo/</a:t>
+            </a:r>
+            <a:br>
+              <a:rPr lang="en-US" dirty="0">
+                <a:latin typeface="Courier New" panose="02070309020205020404" pitchFamily="49" charset="0"/>
+                <a:cs typeface="Courier New" panose="02070309020205020404" pitchFamily="49" charset="0"/>
+              </a:rPr>
+            </a:br>
+            <a:r>
+              <a:rPr lang="en-US" dirty="0">
+                <a:latin typeface="Courier New" panose="02070309020205020404" pitchFamily="49" charset="0"/>
+                <a:cs typeface="Courier New" panose="02070309020205020404" pitchFamily="49" charset="0"/>
+              </a:rPr>
+              <a:t>├── .git/</a:t>
+            </a:r>
+          </a:p>
+          <a:p>
+            <a:r>
+              <a:rPr lang="en-US" dirty="0">
+                <a:latin typeface="Courier New" panose="02070309020205020404" pitchFamily="49" charset="0"/>
+                <a:cs typeface="Courier New" panose="02070309020205020404" pitchFamily="49" charset="0"/>
+              </a:rPr>
+              <a:t>│   └── ...</a:t>
+            </a:r>
+          </a:p>
+          <a:p>
+            <a:r>
+              <a:rPr lang="en-US" dirty="0">
+                <a:latin typeface="Courier New" panose="02070309020205020404" pitchFamily="49" charset="0"/>
+                <a:cs typeface="Courier New" panose="02070309020205020404" pitchFamily="49" charset="0"/>
+              </a:rPr>
+              <a:t>├── README.md</a:t>
+            </a:r>
+            <a:br>
+              <a:rPr lang="en-US" dirty="0">
+                <a:latin typeface="Courier New" panose="02070309020205020404" pitchFamily="49" charset="0"/>
+                <a:cs typeface="Courier New" panose="02070309020205020404" pitchFamily="49" charset="0"/>
+              </a:rPr>
+            </a:br>
+            <a:r>
+              <a:rPr lang="en-US" dirty="0">
+                <a:latin typeface="Courier New" panose="02070309020205020404" pitchFamily="49" charset="0"/>
+                <a:cs typeface="Courier New" panose="02070309020205020404" pitchFamily="49" charset="0"/>
+              </a:rPr>
+              <a:t>└── source/</a:t>
+            </a:r>
+          </a:p>
+          <a:p>
+            <a:r>
+              <a:rPr lang="en-US" dirty="0">
+                <a:latin typeface="Courier New" panose="02070309020205020404" pitchFamily="49" charset="0"/>
+                <a:cs typeface="Courier New" panose="02070309020205020404" pitchFamily="49" charset="0"/>
+              </a:rPr>
+              <a:t>    └── hello.py</a:t>
+            </a:r>
+          </a:p>
+        </p:txBody>
+      </p:sp>
+      <p:pic>
+        <p:nvPicPr>
+          <p:cNvPr id="21" name="Picture 20">
+            <a:extLst>
+              <a:ext uri="{FF2B5EF4-FFF2-40B4-BE49-F238E27FC236}">
+                <a16:creationId xmlns:a16="http://schemas.microsoft.com/office/drawing/2014/main" id="{3ED3ED06-5743-3A35-3E9E-80B0C5DF5B52}"/>
+              </a:ext>
+            </a:extLst>
+          </p:cNvPr>
+          <p:cNvPicPr>
+            <a:picLocks noChangeAspect="1"/>
+          </p:cNvPicPr>
+          <p:nvPr/>
+        </p:nvPicPr>
+        <p:blipFill>
+          <a:blip r:embed="rId3">
+            <a:extLst>
+              <a:ext uri="{28A0092B-C50C-407E-A947-70E740481C1C}">
+                <a14:useLocalDpi xmlns:a14="http://schemas.microsoft.com/office/drawing/2010/main" val="0"/>
+              </a:ext>
+            </a:extLst>
+          </a:blip>
+          <a:stretch>
+            <a:fillRect/>
+          </a:stretch>
+        </p:blipFill>
+        <p:spPr>
+          <a:xfrm>
+            <a:off x="1056065" y="3790836"/>
+            <a:ext cx="704623" cy="704623"/>
+          </a:xfrm>
+          <a:prstGeom prst="rect">
+            <a:avLst/>
+          </a:prstGeom>
+        </p:spPr>
+      </p:pic>
+      <p:pic>
+        <p:nvPicPr>
+          <p:cNvPr id="11" name="Picture 10">
+            <a:extLst>
+              <a:ext uri="{FF2B5EF4-FFF2-40B4-BE49-F238E27FC236}">
+                <a16:creationId xmlns:a16="http://schemas.microsoft.com/office/drawing/2014/main" id="{C85FA331-4F6F-14EA-926A-938777C5ACDE}"/>
+              </a:ext>
+            </a:extLst>
+          </p:cNvPr>
+          <p:cNvPicPr>
+            <a:picLocks noChangeAspect="1"/>
+          </p:cNvPicPr>
+          <p:nvPr/>
+        </p:nvPicPr>
+        <p:blipFill>
+          <a:blip r:embed="rId4">
+            <a:extLst>
+              <a:ext uri="{28A0092B-C50C-407E-A947-70E740481C1C}">
+                <a14:useLocalDpi xmlns:a14="http://schemas.microsoft.com/office/drawing/2010/main" val="0"/>
+              </a:ext>
+            </a:extLst>
+          </a:blip>
+          <a:stretch>
+            <a:fillRect/>
+          </a:stretch>
+        </p:blipFill>
+        <p:spPr>
+          <a:xfrm>
+            <a:off x="5443268" y="1684553"/>
+            <a:ext cx="2106283" cy="2106283"/>
+          </a:xfrm>
+          <a:prstGeom prst="rect">
+            <a:avLst/>
+          </a:prstGeom>
+        </p:spPr>
+      </p:pic>
       <p:cxnSp>
         <p:nvCxnSpPr>
-          <p:cNvPr id="26" name="Straight Arrow Connector 25">
+          <p:cNvPr id="12" name="Straight Arrow Connector 11">
             <a:extLst>
               <a:ext uri="{FF2B5EF4-FFF2-40B4-BE49-F238E27FC236}">
-                <a16:creationId xmlns:a16="http://schemas.microsoft.com/office/drawing/2014/main" id="{1D0B7752-6FB9-38A0-E80B-E8BDADEEE1D0}"/>
+                <a16:creationId xmlns:a16="http://schemas.microsoft.com/office/drawing/2014/main" id="{01CDEEA4-1F80-0E08-2DD3-4FF9C6E2DD1D}"/>
               </a:ext>
             </a:extLst>
           </p:cNvPr>
           <p:cNvCxnSpPr>
             <a:cxnSpLocks/>
-            <a:stCxn id="22" idx="1"/>
           </p:cNvCxnSpPr>
           <p:nvPr/>
         </p:nvCxnSpPr>
         <p:spPr>
-          <a:xfrm flipH="1">
-            <a:off x="3063240" y="2167928"/>
-            <a:ext cx="2568306" cy="1828000"/>
+          <a:xfrm>
+            <a:off x="3683479" y="2639683"/>
+            <a:ext cx="1630393" cy="0"/>
           </a:xfrm>
           <a:prstGeom prst="straightConnector1">
             <a:avLst/>
@@ -4674,100 +5524,435 @@
           </a:fontRef>
         </p:style>
       </p:cxnSp>
-      <p:cxnSp>
-        <p:nvCxnSpPr>
-          <p:cNvPr id="28" name="Straight Arrow Connector 27">
+      <p:sp>
+        <p:nvSpPr>
+          <p:cNvPr id="16" name="TextBox 15">
             <a:extLst>
               <a:ext uri="{FF2B5EF4-FFF2-40B4-BE49-F238E27FC236}">
-                <a16:creationId xmlns:a16="http://schemas.microsoft.com/office/drawing/2014/main" id="{E60B3F2D-C20A-5B60-E67E-350D48D547FA}"/>
+                <a16:creationId xmlns:a16="http://schemas.microsoft.com/office/drawing/2014/main" id="{67CCD155-54B7-6DC3-A4C4-E471AEBD49E9}"/>
               </a:ext>
             </a:extLst>
           </p:cNvPr>
-          <p:cNvCxnSpPr>
-            <a:cxnSpLocks/>
-            <a:stCxn id="23" idx="1"/>
-          </p:cNvCxnSpPr>
+          <p:cNvSpPr txBox="1"/>
           <p:nvPr/>
-        </p:nvCxnSpPr>
+        </p:nvSpPr>
         <p:spPr>
-          <a:xfrm flipH="1">
-            <a:off x="3163824" y="3980538"/>
-            <a:ext cx="2467722" cy="454302"/>
+          <a:xfrm>
+            <a:off x="5631546" y="4495459"/>
+            <a:ext cx="5196112" cy="830997"/>
           </a:xfrm>
-          <a:prstGeom prst="straightConnector1">
+          <a:prstGeom prst="rect">
             <a:avLst/>
           </a:prstGeom>
-          <a:ln w="50800" cap="rnd">
-            <a:solidFill>
-              <a:schemeClr val="tx1"/>
-            </a:solidFill>
-            <a:tailEnd type="arrow"/>
-          </a:ln>
+          <a:noFill/>
         </p:spPr>
-        <p:style>
-          <a:lnRef idx="1">
-            <a:schemeClr val="accent1"/>
-          </a:lnRef>
-          <a:fillRef idx="0">
-            <a:schemeClr val="accent1"/>
-          </a:fillRef>
-          <a:effectRef idx="0">
-            <a:schemeClr val="accent1"/>
-          </a:effectRef>
-          <a:fontRef idx="minor">
-            <a:schemeClr val="tx1"/>
-          </a:fontRef>
-        </p:style>
-      </p:cxnSp>
-      <p:cxnSp>
-        <p:nvCxnSpPr>
-          <p:cNvPr id="31" name="Straight Arrow Connector 30">
+        <p:txBody>
+          <a:bodyPr wrap="square" rtlCol="0">
+            <a:spAutoFit/>
+          </a:bodyPr>
+          <a:lstStyle/>
+          <a:p>
+            <a:r>
+              <a:rPr lang="en-US" sz="2400" dirty="0">
+                <a:latin typeface="Arial" panose="020B0604020202020204" pitchFamily="34" charset="0"/>
+                <a:cs typeface="Arial" panose="020B0604020202020204" pitchFamily="34" charset="0"/>
+              </a:rPr>
+              <a:t>Push your changes to GitHub:</a:t>
+            </a:r>
+          </a:p>
+          <a:p>
+            <a:r>
+              <a:rPr lang="en-US" sz="2400" dirty="0">
+                <a:latin typeface="Courier New" panose="02070309020205020404" pitchFamily="49" charset="0"/>
+                <a:cs typeface="Courier New" panose="02070309020205020404" pitchFamily="49" charset="0"/>
+              </a:rPr>
+              <a:t>git push</a:t>
+            </a:r>
+          </a:p>
+        </p:txBody>
+      </p:sp>
+      <p:sp>
+        <p:nvSpPr>
+          <p:cNvPr id="17" name="TextBox 16">
             <a:extLst>
               <a:ext uri="{FF2B5EF4-FFF2-40B4-BE49-F238E27FC236}">
-                <a16:creationId xmlns:a16="http://schemas.microsoft.com/office/drawing/2014/main" id="{316AD176-0E81-EAE0-9025-8FB72FF2460F}"/>
+                <a16:creationId xmlns:a16="http://schemas.microsoft.com/office/drawing/2014/main" id="{A3DB8531-3EAD-9350-DA80-A0B8FA694529}"/>
               </a:ext>
             </a:extLst>
           </p:cNvPr>
-          <p:cNvCxnSpPr>
-            <a:cxnSpLocks/>
-            <a:stCxn id="24" idx="1"/>
-          </p:cNvCxnSpPr>
+          <p:cNvSpPr txBox="1"/>
           <p:nvPr/>
-        </p:nvCxnSpPr>
+        </p:nvSpPr>
         <p:spPr>
-          <a:xfrm flipH="1" flipV="1">
-            <a:off x="4251670" y="5219670"/>
-            <a:ext cx="1379876" cy="520509"/>
+          <a:xfrm>
+            <a:off x="5626031" y="1350502"/>
+            <a:ext cx="1740756" cy="461665"/>
           </a:xfrm>
-          <a:prstGeom prst="straightConnector1">
+          <a:prstGeom prst="rect">
             <a:avLst/>
           </a:prstGeom>
-          <a:ln w="50800" cap="rnd">
-            <a:solidFill>
-              <a:schemeClr val="tx1"/>
-            </a:solidFill>
-            <a:tailEnd type="arrow"/>
-          </a:ln>
+          <a:noFill/>
         </p:spPr>
-        <p:style>
-          <a:lnRef idx="1">
-            <a:schemeClr val="accent1"/>
-          </a:lnRef>
-          <a:fillRef idx="0">
-            <a:schemeClr val="accent1"/>
-          </a:fillRef>
-          <a:effectRef idx="0">
-            <a:schemeClr val="accent1"/>
-          </a:effectRef>
-          <a:fontRef idx="minor">
-            <a:schemeClr val="tx1"/>
-          </a:fontRef>
-        </p:style>
-      </p:cxnSp>
+        <p:txBody>
+          <a:bodyPr wrap="square" rtlCol="0">
+            <a:spAutoFit/>
+          </a:bodyPr>
+          <a:lstStyle/>
+          <a:p>
+            <a:pPr algn="ctr"/>
+            <a:r>
+              <a:rPr lang="en-US" sz="2400" dirty="0">
+                <a:latin typeface="Arial" panose="020B0604020202020204" pitchFamily="34" charset="0"/>
+                <a:cs typeface="Arial" panose="020B0604020202020204" pitchFamily="34" charset="0"/>
+              </a:rPr>
+              <a:t>GitHub</a:t>
+            </a:r>
+            <a:endParaRPr lang="en-US" sz="2400" dirty="0">
+              <a:latin typeface="Courier New" panose="02070309020205020404" pitchFamily="49" charset="0"/>
+              <a:cs typeface="Courier New" panose="02070309020205020404" pitchFamily="49" charset="0"/>
+            </a:endParaRPr>
+          </a:p>
+        </p:txBody>
+      </p:sp>
     </p:spTree>
     <p:extLst>
       <p:ext uri="{BB962C8B-B14F-4D97-AF65-F5344CB8AC3E}">
-        <p14:creationId xmlns:p14="http://schemas.microsoft.com/office/powerpoint/2010/main" val="2137251374"/>
+        <p14:creationId xmlns:p14="http://schemas.microsoft.com/office/powerpoint/2010/main" val="147498671"/>
+      </p:ext>
+    </p:extLst>
+  </p:cSld>
+  <p:clrMapOvr>
+    <a:masterClrMapping/>
+  </p:clrMapOvr>
+  <p:timing>
+    <p:tnLst>
+      <p:par>
+        <p:cTn id="1" dur="indefinite" restart="never" nodeType="tmRoot">
+          <p:childTnLst>
+            <p:seq concurrent="1" nextAc="seek">
+              <p:cTn id="2" dur="indefinite" nodeType="mainSeq">
+                <p:childTnLst>
+                  <p:par>
+                    <p:cTn id="3" fill="hold">
+                      <p:stCondLst>
+                        <p:cond delay="indefinite"/>
+                      </p:stCondLst>
+                      <p:childTnLst>
+                        <p:par>
+                          <p:cTn id="4" fill="hold">
+                            <p:stCondLst>
+                              <p:cond delay="0"/>
+                            </p:stCondLst>
+                            <p:childTnLst>
+                              <p:par>
+                                <p:cTn id="5" presetID="10" presetClass="entr" presetSubtype="0" fill="hold" grpId="0" nodeType="clickEffect">
+                                  <p:stCondLst>
+                                    <p:cond delay="0"/>
+                                  </p:stCondLst>
+                                  <p:childTnLst>
+                                    <p:set>
+                                      <p:cBhvr>
+                                        <p:cTn id="6" dur="1" fill="hold">
+                                          <p:stCondLst>
+                                            <p:cond delay="0"/>
+                                          </p:stCondLst>
+                                        </p:cTn>
+                                        <p:tgtEl>
+                                          <p:spTgt spid="16"/>
+                                        </p:tgtEl>
+                                        <p:attrNameLst>
+                                          <p:attrName>style.visibility</p:attrName>
+                                        </p:attrNameLst>
+                                      </p:cBhvr>
+                                      <p:to>
+                                        <p:strVal val="visible"/>
+                                      </p:to>
+                                    </p:set>
+                                    <p:animEffect transition="in" filter="fade">
+                                      <p:cBhvr>
+                                        <p:cTn id="7" dur="500"/>
+                                        <p:tgtEl>
+                                          <p:spTgt spid="16"/>
+                                        </p:tgtEl>
+                                      </p:cBhvr>
+                                    </p:animEffect>
+                                  </p:childTnLst>
+                                </p:cTn>
+                              </p:par>
+                            </p:childTnLst>
+                          </p:cTn>
+                        </p:par>
+                      </p:childTnLst>
+                    </p:cTn>
+                  </p:par>
+                  <p:par>
+                    <p:cTn id="8" fill="hold">
+                      <p:stCondLst>
+                        <p:cond delay="indefinite"/>
+                      </p:stCondLst>
+                      <p:childTnLst>
+                        <p:par>
+                          <p:cTn id="9" fill="hold">
+                            <p:stCondLst>
+                              <p:cond delay="0"/>
+                            </p:stCondLst>
+                            <p:childTnLst>
+                              <p:par>
+                                <p:cTn id="10" presetID="10" presetClass="entr" presetSubtype="0" fill="hold" nodeType="clickEffect">
+                                  <p:stCondLst>
+                                    <p:cond delay="0"/>
+                                  </p:stCondLst>
+                                  <p:childTnLst>
+                                    <p:set>
+                                      <p:cBhvr>
+                                        <p:cTn id="11" dur="1" fill="hold">
+                                          <p:stCondLst>
+                                            <p:cond delay="0"/>
+                                          </p:stCondLst>
+                                        </p:cTn>
+                                        <p:tgtEl>
+                                          <p:spTgt spid="12"/>
+                                        </p:tgtEl>
+                                        <p:attrNameLst>
+                                          <p:attrName>style.visibility</p:attrName>
+                                        </p:attrNameLst>
+                                      </p:cBhvr>
+                                      <p:to>
+                                        <p:strVal val="visible"/>
+                                      </p:to>
+                                    </p:set>
+                                    <p:animEffect transition="in" filter="fade">
+                                      <p:cBhvr>
+                                        <p:cTn id="12" dur="500"/>
+                                        <p:tgtEl>
+                                          <p:spTgt spid="12"/>
+                                        </p:tgtEl>
+                                      </p:cBhvr>
+                                    </p:animEffect>
+                                  </p:childTnLst>
+                                </p:cTn>
+                              </p:par>
+                              <p:par>
+                                <p:cTn id="13" presetID="10" presetClass="entr" presetSubtype="0" fill="hold" nodeType="withEffect">
+                                  <p:stCondLst>
+                                    <p:cond delay="0"/>
+                                  </p:stCondLst>
+                                  <p:childTnLst>
+                                    <p:set>
+                                      <p:cBhvr>
+                                        <p:cTn id="14" dur="1" fill="hold">
+                                          <p:stCondLst>
+                                            <p:cond delay="0"/>
+                                          </p:stCondLst>
+                                        </p:cTn>
+                                        <p:tgtEl>
+                                          <p:spTgt spid="11"/>
+                                        </p:tgtEl>
+                                        <p:attrNameLst>
+                                          <p:attrName>style.visibility</p:attrName>
+                                        </p:attrNameLst>
+                                      </p:cBhvr>
+                                      <p:to>
+                                        <p:strVal val="visible"/>
+                                      </p:to>
+                                    </p:set>
+                                    <p:animEffect transition="in" filter="fade">
+                                      <p:cBhvr>
+                                        <p:cTn id="15" dur="500"/>
+                                        <p:tgtEl>
+                                          <p:spTgt spid="11"/>
+                                        </p:tgtEl>
+                                      </p:cBhvr>
+                                    </p:animEffect>
+                                  </p:childTnLst>
+                                </p:cTn>
+                              </p:par>
+                            </p:childTnLst>
+                          </p:cTn>
+                        </p:par>
+                        <p:par>
+                          <p:cTn id="16" fill="hold">
+                            <p:stCondLst>
+                              <p:cond delay="500"/>
+                            </p:stCondLst>
+                            <p:childTnLst>
+                              <p:par>
+                                <p:cTn id="17" presetID="10" presetClass="entr" presetSubtype="0" fill="hold" grpId="0" nodeType="afterEffect">
+                                  <p:stCondLst>
+                                    <p:cond delay="0"/>
+                                  </p:stCondLst>
+                                  <p:childTnLst>
+                                    <p:set>
+                                      <p:cBhvr>
+                                        <p:cTn id="18" dur="1" fill="hold">
+                                          <p:stCondLst>
+                                            <p:cond delay="0"/>
+                                          </p:stCondLst>
+                                        </p:cTn>
+                                        <p:tgtEl>
+                                          <p:spTgt spid="17"/>
+                                        </p:tgtEl>
+                                        <p:attrNameLst>
+                                          <p:attrName>style.visibility</p:attrName>
+                                        </p:attrNameLst>
+                                      </p:cBhvr>
+                                      <p:to>
+                                        <p:strVal val="visible"/>
+                                      </p:to>
+                                    </p:set>
+                                    <p:animEffect transition="in" filter="fade">
+                                      <p:cBhvr>
+                                        <p:cTn id="19" dur="500"/>
+                                        <p:tgtEl>
+                                          <p:spTgt spid="17"/>
+                                        </p:tgtEl>
+                                      </p:cBhvr>
+                                    </p:animEffect>
+                                  </p:childTnLst>
+                                </p:cTn>
+                              </p:par>
+                            </p:childTnLst>
+                          </p:cTn>
+                        </p:par>
+                      </p:childTnLst>
+                    </p:cTn>
+                  </p:par>
+                </p:childTnLst>
+              </p:cTn>
+              <p:prevCondLst>
+                <p:cond evt="onPrev" delay="0">
+                  <p:tgtEl>
+                    <p:sldTgt/>
+                  </p:tgtEl>
+                </p:cond>
+              </p:prevCondLst>
+              <p:nextCondLst>
+                <p:cond evt="onNext" delay="0">
+                  <p:tgtEl>
+                    <p:sldTgt/>
+                  </p:tgtEl>
+                </p:cond>
+              </p:nextCondLst>
+            </p:seq>
+          </p:childTnLst>
+        </p:cTn>
+      </p:par>
+    </p:tnLst>
+    <p:bldLst>
+      <p:bldP spid="16" grpId="0"/>
+      <p:bldP spid="17" grpId="0"/>
+    </p:bldLst>
+  </p:timing>
+</p:sld>
+</file>
+
+<file path=ppt/slides/slide8.xml><?xml version="1.0" encoding="utf-8"?>
+<p:sld xmlns:a="http://schemas.openxmlformats.org/drawingml/2006/main" xmlns:r="http://schemas.openxmlformats.org/officeDocument/2006/relationships" xmlns:p="http://schemas.openxmlformats.org/presentationml/2006/main">
+  <p:cSld>
+    <p:spTree>
+      <p:nvGrpSpPr>
+        <p:cNvPr id="1" name="">
+          <a:extLst>
+            <a:ext uri="{FF2B5EF4-FFF2-40B4-BE49-F238E27FC236}">
+              <a16:creationId xmlns:a16="http://schemas.microsoft.com/office/drawing/2014/main" id="{311B5474-AB50-4D0E-7C42-CE3A12F5613F}"/>
+            </a:ext>
+          </a:extLst>
+        </p:cNvPr>
+        <p:cNvGrpSpPr/>
+        <p:nvPr/>
+      </p:nvGrpSpPr>
+      <p:grpSpPr>
+        <a:xfrm>
+          <a:off x="0" y="0"/>
+          <a:ext cx="0" cy="0"/>
+          <a:chOff x="0" y="0"/>
+          <a:chExt cx="0" cy="0"/>
+        </a:xfrm>
+      </p:grpSpPr>
+      <p:sp>
+        <p:nvSpPr>
+          <p:cNvPr id="2" name="Title 1">
+            <a:extLst>
+              <a:ext uri="{FF2B5EF4-FFF2-40B4-BE49-F238E27FC236}">
+                <a16:creationId xmlns:a16="http://schemas.microsoft.com/office/drawing/2014/main" id="{378DEFDB-C075-F815-57FC-395BEB29BE85}"/>
+              </a:ext>
+            </a:extLst>
+          </p:cNvPr>
+          <p:cNvSpPr>
+            <a:spLocks noGrp="1"/>
+          </p:cNvSpPr>
+          <p:nvPr>
+            <p:ph type="title"/>
+          </p:nvPr>
+        </p:nvSpPr>
+        <p:spPr/>
+        <p:txBody>
+          <a:bodyPr/>
+          <a:lstStyle/>
+          <a:p>
+            <a:r>
+              <a:rPr lang="en-US" dirty="0"/>
+              <a:t>Hands-on Exercises</a:t>
+            </a:r>
+            <a:endParaRPr lang="en-US" dirty="0">
+              <a:latin typeface="Arial" panose="020B0604020202020204" pitchFamily="34" charset="0"/>
+              <a:cs typeface="Arial" panose="020B0604020202020204" pitchFamily="34" charset="0"/>
+            </a:endParaRPr>
+          </a:p>
+        </p:txBody>
+      </p:sp>
+      <p:sp>
+        <p:nvSpPr>
+          <p:cNvPr id="4" name="TextBox 3">
+            <a:extLst>
+              <a:ext uri="{FF2B5EF4-FFF2-40B4-BE49-F238E27FC236}">
+                <a16:creationId xmlns:a16="http://schemas.microsoft.com/office/drawing/2014/main" id="{F33FE6CD-8E5D-2480-D454-DCDADC7D0A1F}"/>
+              </a:ext>
+            </a:extLst>
+          </p:cNvPr>
+          <p:cNvSpPr txBox="1"/>
+          <p:nvPr/>
+        </p:nvSpPr>
+        <p:spPr>
+          <a:xfrm>
+            <a:off x="424132" y="2890391"/>
+            <a:ext cx="11343735" cy="1077218"/>
+          </a:xfrm>
+          <a:prstGeom prst="rect">
+            <a:avLst/>
+          </a:prstGeom>
+          <a:noFill/>
+        </p:spPr>
+        <p:txBody>
+          <a:bodyPr wrap="square">
+            <a:spAutoFit/>
+          </a:bodyPr>
+          <a:lstStyle/>
+          <a:p>
+            <a:r>
+              <a:rPr lang="en-US" sz="3200" dirty="0">
+                <a:latin typeface="Arial" panose="020B0604020202020204" pitchFamily="34" charset="0"/>
+                <a:cs typeface="Arial" panose="020B0604020202020204" pitchFamily="34" charset="0"/>
+              </a:rPr>
+              <a:t>Follow the README instructions here: </a:t>
+            </a:r>
+            <a:r>
+              <a:rPr lang="en-US" sz="3200" dirty="0">
+                <a:solidFill>
+                  <a:schemeClr val="tx2"/>
+                </a:solidFill>
+                <a:latin typeface="Arial" panose="020B0604020202020204" pitchFamily="34" charset="0"/>
+                <a:cs typeface="Arial" panose="020B0604020202020204" pitchFamily="34" charset="0"/>
+              </a:rPr>
+              <a:t>github.com/ShawnHymel/workshop-intro-to-git-and-github</a:t>
+            </a:r>
+          </a:p>
+        </p:txBody>
+      </p:sp>
+    </p:spTree>
+    <p:extLst>
+      <p:ext uri="{BB962C8B-B14F-4D97-AF65-F5344CB8AC3E}">
+        <p14:creationId xmlns:p14="http://schemas.microsoft.com/office/powerpoint/2010/main" val="1426332667"/>
       </p:ext>
     </p:extLst>
   </p:cSld>

--- a/slides/intro-to-git-and-github.pptx
+++ b/slides/intro-to-git-and-github.pptx
@@ -13,6 +13,14 @@
     <p:sldId id="261" r:id="rId7"/>
     <p:sldId id="262" r:id="rId8"/>
     <p:sldId id="263" r:id="rId9"/>
+    <p:sldId id="264" r:id="rId10"/>
+    <p:sldId id="266" r:id="rId11"/>
+    <p:sldId id="265" r:id="rId12"/>
+    <p:sldId id="267" r:id="rId13"/>
+    <p:sldId id="269" r:id="rId14"/>
+    <p:sldId id="271" r:id="rId15"/>
+    <p:sldId id="270" r:id="rId16"/>
+    <p:sldId id="268" r:id="rId17"/>
   </p:sldIdLst>
   <p:sldSz cx="12192000" cy="6858000"/>
   <p:notesSz cx="6858000" cy="9144000"/>
@@ -111,6 +119,11 @@
       </a:defRPr>
     </a:lvl9pPr>
   </p:defaultTextStyle>
+  <p:extLst>
+    <p:ext uri="{EFAFB233-063F-42B5-8137-9DF3F51BA10A}">
+      <p15:sldGuideLst xmlns:p15="http://schemas.microsoft.com/office/powerpoint/2012/main"/>
+    </p:ext>
+  </p:extLst>
 </p:presentation>
 </file>
 
@@ -303,6 +316,18 @@
   <p:clrMapOvr>
     <a:masterClrMapping/>
   </p:clrMapOvr>
+  <mc:AlternateContent xmlns:mc="http://schemas.openxmlformats.org/markup-compatibility/2006">
+    <mc:Choice xmlns:p14="http://schemas.microsoft.com/office/powerpoint/2010/main" Requires="p14">
+      <p:transition spd="med" p14:dur="700">
+        <p:fade/>
+      </p:transition>
+    </mc:Choice>
+    <mc:Fallback>
+      <p:transition spd="med">
+        <p:fade/>
+      </p:transition>
+    </mc:Fallback>
+  </mc:AlternateContent>
 </p:sldLayout>
 </file>
 
@@ -473,6 +498,18 @@
   <p:clrMapOvr>
     <a:masterClrMapping/>
   </p:clrMapOvr>
+  <mc:AlternateContent xmlns:mc="http://schemas.openxmlformats.org/markup-compatibility/2006">
+    <mc:Choice xmlns:p14="http://schemas.microsoft.com/office/powerpoint/2010/main" Requires="p14">
+      <p:transition spd="med" p14:dur="700">
+        <p:fade/>
+      </p:transition>
+    </mc:Choice>
+    <mc:Fallback>
+      <p:transition spd="med">
+        <p:fade/>
+      </p:transition>
+    </mc:Fallback>
+  </mc:AlternateContent>
 </p:sldLayout>
 </file>
 
@@ -653,6 +690,18 @@
   <p:clrMapOvr>
     <a:masterClrMapping/>
   </p:clrMapOvr>
+  <mc:AlternateContent xmlns:mc="http://schemas.openxmlformats.org/markup-compatibility/2006">
+    <mc:Choice xmlns:p14="http://schemas.microsoft.com/office/powerpoint/2010/main" Requires="p14">
+      <p:transition spd="med" p14:dur="700">
+        <p:fade/>
+      </p:transition>
+    </mc:Choice>
+    <mc:Fallback>
+      <p:transition spd="med">
+        <p:fade/>
+      </p:transition>
+    </mc:Fallback>
+  </mc:AlternateContent>
 </p:sldLayout>
 </file>
 
@@ -823,6 +872,18 @@
   <p:clrMapOvr>
     <a:masterClrMapping/>
   </p:clrMapOvr>
+  <mc:AlternateContent xmlns:mc="http://schemas.openxmlformats.org/markup-compatibility/2006">
+    <mc:Choice xmlns:p14="http://schemas.microsoft.com/office/powerpoint/2010/main" Requires="p14">
+      <p:transition spd="med" p14:dur="700">
+        <p:fade/>
+      </p:transition>
+    </mc:Choice>
+    <mc:Fallback>
+      <p:transition spd="med">
+        <p:fade/>
+      </p:transition>
+    </mc:Fallback>
+  </mc:AlternateContent>
 </p:sldLayout>
 </file>
 
@@ -1069,6 +1130,18 @@
   <p:clrMapOvr>
     <a:masterClrMapping/>
   </p:clrMapOvr>
+  <mc:AlternateContent xmlns:mc="http://schemas.openxmlformats.org/markup-compatibility/2006">
+    <mc:Choice xmlns:p14="http://schemas.microsoft.com/office/powerpoint/2010/main" Requires="p14">
+      <p:transition spd="med" p14:dur="700">
+        <p:fade/>
+      </p:transition>
+    </mc:Choice>
+    <mc:Fallback>
+      <p:transition spd="med">
+        <p:fade/>
+      </p:transition>
+    </mc:Fallback>
+  </mc:AlternateContent>
 </p:sldLayout>
 </file>
 
@@ -1301,6 +1374,18 @@
   <p:clrMapOvr>
     <a:masterClrMapping/>
   </p:clrMapOvr>
+  <mc:AlternateContent xmlns:mc="http://schemas.openxmlformats.org/markup-compatibility/2006">
+    <mc:Choice xmlns:p14="http://schemas.microsoft.com/office/powerpoint/2010/main" Requires="p14">
+      <p:transition spd="med" p14:dur="700">
+        <p:fade/>
+      </p:transition>
+    </mc:Choice>
+    <mc:Fallback>
+      <p:transition spd="med">
+        <p:fade/>
+      </p:transition>
+    </mc:Fallback>
+  </mc:AlternateContent>
 </p:sldLayout>
 </file>
 
@@ -1668,6 +1753,18 @@
   <p:clrMapOvr>
     <a:masterClrMapping/>
   </p:clrMapOvr>
+  <mc:AlternateContent xmlns:mc="http://schemas.openxmlformats.org/markup-compatibility/2006">
+    <mc:Choice xmlns:p14="http://schemas.microsoft.com/office/powerpoint/2010/main" Requires="p14">
+      <p:transition spd="med" p14:dur="700">
+        <p:fade/>
+      </p:transition>
+    </mc:Choice>
+    <mc:Fallback>
+      <p:transition spd="med">
+        <p:fade/>
+      </p:transition>
+    </mc:Fallback>
+  </mc:AlternateContent>
 </p:sldLayout>
 </file>
 
@@ -1786,6 +1883,18 @@
   <p:clrMapOvr>
     <a:masterClrMapping/>
   </p:clrMapOvr>
+  <mc:AlternateContent xmlns:mc="http://schemas.openxmlformats.org/markup-compatibility/2006">
+    <mc:Choice xmlns:p14="http://schemas.microsoft.com/office/powerpoint/2010/main" Requires="p14">
+      <p:transition spd="med" p14:dur="700">
+        <p:fade/>
+      </p:transition>
+    </mc:Choice>
+    <mc:Fallback>
+      <p:transition spd="med">
+        <p:fade/>
+      </p:transition>
+    </mc:Fallback>
+  </mc:AlternateContent>
 </p:sldLayout>
 </file>
 
@@ -1881,6 +1990,18 @@
   <p:clrMapOvr>
     <a:masterClrMapping/>
   </p:clrMapOvr>
+  <mc:AlternateContent xmlns:mc="http://schemas.openxmlformats.org/markup-compatibility/2006">
+    <mc:Choice xmlns:p14="http://schemas.microsoft.com/office/powerpoint/2010/main" Requires="p14">
+      <p:transition spd="med" p14:dur="700">
+        <p:fade/>
+      </p:transition>
+    </mc:Choice>
+    <mc:Fallback>
+      <p:transition spd="med">
+        <p:fade/>
+      </p:transition>
+    </mc:Fallback>
+  </mc:AlternateContent>
 </p:sldLayout>
 </file>
 
@@ -2158,6 +2279,18 @@
   <p:clrMapOvr>
     <a:masterClrMapping/>
   </p:clrMapOvr>
+  <mc:AlternateContent xmlns:mc="http://schemas.openxmlformats.org/markup-compatibility/2006">
+    <mc:Choice xmlns:p14="http://schemas.microsoft.com/office/powerpoint/2010/main" Requires="p14">
+      <p:transition spd="med" p14:dur="700">
+        <p:fade/>
+      </p:transition>
+    </mc:Choice>
+    <mc:Fallback>
+      <p:transition spd="med">
+        <p:fade/>
+      </p:transition>
+    </mc:Fallback>
+  </mc:AlternateContent>
 </p:sldLayout>
 </file>
 
@@ -2415,6 +2548,18 @@
   <p:clrMapOvr>
     <a:masterClrMapping/>
   </p:clrMapOvr>
+  <mc:AlternateContent xmlns:mc="http://schemas.openxmlformats.org/markup-compatibility/2006">
+    <mc:Choice xmlns:p14="http://schemas.microsoft.com/office/powerpoint/2010/main" Requires="p14">
+      <p:transition spd="med" p14:dur="700">
+        <p:fade/>
+      </p:transition>
+    </mc:Choice>
+    <mc:Fallback>
+      <p:transition spd="med">
+        <p:fade/>
+      </p:transition>
+    </mc:Fallback>
+  </mc:AlternateContent>
 </p:sldLayout>
 </file>
 
@@ -2690,6 +2835,18 @@
     <p:sldLayoutId id="2147483694" r:id="rId10"/>
     <p:sldLayoutId id="2147483695" r:id="rId11"/>
   </p:sldLayoutIdLst>
+  <mc:AlternateContent xmlns:mc="http://schemas.openxmlformats.org/markup-compatibility/2006">
+    <mc:Choice xmlns:p14="http://schemas.microsoft.com/office/powerpoint/2010/main" Requires="p14">
+      <p:transition spd="med" p14:dur="700">
+        <p:fade/>
+      </p:transition>
+    </mc:Choice>
+    <mc:Fallback>
+      <p:transition spd="med">
+        <p:fade/>
+      </p:transition>
+    </mc:Fallback>
+  </mc:AlternateContent>
   <p:txStyles>
     <p:titleStyle>
       <a:lvl1pPr algn="l" defTabSz="914400" rtl="0" eaLnBrk="1" latinLnBrk="0" hangingPunct="1">
@@ -3063,6 +3220,3898 @@
   <p:clrMapOvr>
     <a:masterClrMapping/>
   </p:clrMapOvr>
+  <mc:AlternateContent xmlns:mc="http://schemas.openxmlformats.org/markup-compatibility/2006">
+    <mc:Choice xmlns:p14="http://schemas.microsoft.com/office/powerpoint/2010/main" Requires="p14">
+      <p:transition spd="med" p14:dur="700">
+        <p:fade/>
+      </p:transition>
+    </mc:Choice>
+    <mc:Fallback>
+      <p:transition spd="med">
+        <p:fade/>
+      </p:transition>
+    </mc:Fallback>
+  </mc:AlternateContent>
+</p:sld>
+</file>
+
+<file path=ppt/slides/slide10.xml><?xml version="1.0" encoding="utf-8"?>
+<p:sld xmlns:a="http://schemas.openxmlformats.org/drawingml/2006/main" xmlns:r="http://schemas.openxmlformats.org/officeDocument/2006/relationships" xmlns:p="http://schemas.openxmlformats.org/presentationml/2006/main">
+  <p:cSld>
+    <p:spTree>
+      <p:nvGrpSpPr>
+        <p:cNvPr id="1" name="">
+          <a:extLst>
+            <a:ext uri="{FF2B5EF4-FFF2-40B4-BE49-F238E27FC236}">
+              <a16:creationId xmlns:a16="http://schemas.microsoft.com/office/drawing/2014/main" id="{B1EE672A-83E9-8ED7-C247-E271C55EDAB0}"/>
+            </a:ext>
+          </a:extLst>
+        </p:cNvPr>
+        <p:cNvGrpSpPr/>
+        <p:nvPr/>
+      </p:nvGrpSpPr>
+      <p:grpSpPr>
+        <a:xfrm>
+          <a:off x="0" y="0"/>
+          <a:ext cx="0" cy="0"/>
+          <a:chOff x="0" y="0"/>
+          <a:chExt cx="0" cy="0"/>
+        </a:xfrm>
+      </p:grpSpPr>
+      <p:sp>
+        <p:nvSpPr>
+          <p:cNvPr id="2" name="Title 1">
+            <a:extLst>
+              <a:ext uri="{FF2B5EF4-FFF2-40B4-BE49-F238E27FC236}">
+                <a16:creationId xmlns:a16="http://schemas.microsoft.com/office/drawing/2014/main" id="{3798175F-5CA1-487C-FD06-6AAC26AF2F8A}"/>
+              </a:ext>
+            </a:extLst>
+          </p:cNvPr>
+          <p:cNvSpPr>
+            <a:spLocks noGrp="1"/>
+          </p:cNvSpPr>
+          <p:nvPr>
+            <p:ph type="title"/>
+          </p:nvPr>
+        </p:nvSpPr>
+        <p:spPr/>
+        <p:txBody>
+          <a:bodyPr/>
+          <a:lstStyle/>
+          <a:p>
+            <a:r>
+              <a:rPr lang="en-US" dirty="0"/>
+              <a:t>Revert</a:t>
+            </a:r>
+            <a:endParaRPr lang="en-US" dirty="0">
+              <a:latin typeface="Arial" panose="020B0604020202020204" pitchFamily="34" charset="0"/>
+              <a:cs typeface="Arial" panose="020B0604020202020204" pitchFamily="34" charset="0"/>
+            </a:endParaRPr>
+          </a:p>
+        </p:txBody>
+      </p:sp>
+      <p:cxnSp>
+        <p:nvCxnSpPr>
+          <p:cNvPr id="5" name="Straight Arrow Connector 4">
+            <a:extLst>
+              <a:ext uri="{FF2B5EF4-FFF2-40B4-BE49-F238E27FC236}">
+                <a16:creationId xmlns:a16="http://schemas.microsoft.com/office/drawing/2014/main" id="{03D592C5-3600-4059-4FC6-6B42702B66AC}"/>
+              </a:ext>
+            </a:extLst>
+          </p:cNvPr>
+          <p:cNvCxnSpPr>
+            <a:cxnSpLocks/>
+          </p:cNvCxnSpPr>
+          <p:nvPr/>
+        </p:nvCxnSpPr>
+        <p:spPr>
+          <a:xfrm flipH="1">
+            <a:off x="3804020" y="3799159"/>
+            <a:ext cx="4899660" cy="0"/>
+          </a:xfrm>
+          <a:prstGeom prst="straightConnector1">
+            <a:avLst/>
+          </a:prstGeom>
+          <a:ln w="50800" cap="rnd">
+            <a:solidFill>
+              <a:schemeClr val="tx1"/>
+            </a:solidFill>
+            <a:tailEnd type="none"/>
+          </a:ln>
+        </p:spPr>
+        <p:style>
+          <a:lnRef idx="1">
+            <a:schemeClr val="accent1"/>
+          </a:lnRef>
+          <a:fillRef idx="0">
+            <a:schemeClr val="accent1"/>
+          </a:fillRef>
+          <a:effectRef idx="0">
+            <a:schemeClr val="accent1"/>
+          </a:effectRef>
+          <a:fontRef idx="minor">
+            <a:schemeClr val="tx1"/>
+          </a:fontRef>
+        </p:style>
+      </p:cxnSp>
+      <p:sp>
+        <p:nvSpPr>
+          <p:cNvPr id="7" name="Oval 6">
+            <a:extLst>
+              <a:ext uri="{FF2B5EF4-FFF2-40B4-BE49-F238E27FC236}">
+                <a16:creationId xmlns:a16="http://schemas.microsoft.com/office/drawing/2014/main" id="{A82D02ED-8859-C497-AA88-929B0A29C929}"/>
+              </a:ext>
+            </a:extLst>
+          </p:cNvPr>
+          <p:cNvSpPr/>
+          <p:nvPr/>
+        </p:nvSpPr>
+        <p:spPr>
+          <a:xfrm>
+            <a:off x="3628013" y="3670067"/>
+            <a:ext cx="258183" cy="258183"/>
+          </a:xfrm>
+          <a:prstGeom prst="ellipse">
+            <a:avLst/>
+          </a:prstGeom>
+          <a:solidFill>
+            <a:schemeClr val="tx1"/>
+          </a:solidFill>
+          <a:ln>
+            <a:noFill/>
+          </a:ln>
+        </p:spPr>
+        <p:style>
+          <a:lnRef idx="2">
+            <a:schemeClr val="accent1">
+              <a:shade val="15000"/>
+            </a:schemeClr>
+          </a:lnRef>
+          <a:fillRef idx="1">
+            <a:schemeClr val="accent1"/>
+          </a:fillRef>
+          <a:effectRef idx="0">
+            <a:schemeClr val="accent1"/>
+          </a:effectRef>
+          <a:fontRef idx="minor">
+            <a:schemeClr val="lt1"/>
+          </a:fontRef>
+        </p:style>
+        <p:txBody>
+          <a:bodyPr rtlCol="0" anchor="ctr"/>
+          <a:lstStyle/>
+          <a:p>
+            <a:pPr algn="ctr"/>
+            <a:endParaRPr lang="en-US"/>
+          </a:p>
+        </p:txBody>
+      </p:sp>
+      <p:sp>
+        <p:nvSpPr>
+          <p:cNvPr id="8" name="Oval 7">
+            <a:extLst>
+              <a:ext uri="{FF2B5EF4-FFF2-40B4-BE49-F238E27FC236}">
+                <a16:creationId xmlns:a16="http://schemas.microsoft.com/office/drawing/2014/main" id="{897D264D-CD04-9BE2-A124-0B4B25A9E819}"/>
+              </a:ext>
+            </a:extLst>
+          </p:cNvPr>
+          <p:cNvSpPr/>
+          <p:nvPr/>
+        </p:nvSpPr>
+        <p:spPr>
+          <a:xfrm>
+            <a:off x="5268853" y="3670067"/>
+            <a:ext cx="258183" cy="258183"/>
+          </a:xfrm>
+          <a:prstGeom prst="ellipse">
+            <a:avLst/>
+          </a:prstGeom>
+          <a:solidFill>
+            <a:schemeClr val="tx1"/>
+          </a:solidFill>
+          <a:ln>
+            <a:noFill/>
+          </a:ln>
+        </p:spPr>
+        <p:style>
+          <a:lnRef idx="2">
+            <a:schemeClr val="accent1">
+              <a:shade val="15000"/>
+            </a:schemeClr>
+          </a:lnRef>
+          <a:fillRef idx="1">
+            <a:schemeClr val="accent1"/>
+          </a:fillRef>
+          <a:effectRef idx="0">
+            <a:schemeClr val="accent1"/>
+          </a:effectRef>
+          <a:fontRef idx="minor">
+            <a:schemeClr val="lt1"/>
+          </a:fontRef>
+        </p:style>
+        <p:txBody>
+          <a:bodyPr rtlCol="0" anchor="ctr"/>
+          <a:lstStyle/>
+          <a:p>
+            <a:pPr algn="ctr"/>
+            <a:endParaRPr lang="en-US"/>
+          </a:p>
+        </p:txBody>
+      </p:sp>
+      <p:sp>
+        <p:nvSpPr>
+          <p:cNvPr id="9" name="Oval 8">
+            <a:extLst>
+              <a:ext uri="{FF2B5EF4-FFF2-40B4-BE49-F238E27FC236}">
+                <a16:creationId xmlns:a16="http://schemas.microsoft.com/office/drawing/2014/main" id="{F1D07C3B-BF5B-49EF-5DF2-6A1B7B9D91DD}"/>
+              </a:ext>
+            </a:extLst>
+          </p:cNvPr>
+          <p:cNvSpPr/>
+          <p:nvPr/>
+        </p:nvSpPr>
+        <p:spPr>
+          <a:xfrm>
+            <a:off x="6909693" y="3670067"/>
+            <a:ext cx="258183" cy="258183"/>
+          </a:xfrm>
+          <a:prstGeom prst="ellipse">
+            <a:avLst/>
+          </a:prstGeom>
+          <a:solidFill>
+            <a:schemeClr val="tx1"/>
+          </a:solidFill>
+          <a:ln>
+            <a:noFill/>
+          </a:ln>
+        </p:spPr>
+        <p:style>
+          <a:lnRef idx="2">
+            <a:schemeClr val="accent1">
+              <a:shade val="15000"/>
+            </a:schemeClr>
+          </a:lnRef>
+          <a:fillRef idx="1">
+            <a:schemeClr val="accent1"/>
+          </a:fillRef>
+          <a:effectRef idx="0">
+            <a:schemeClr val="accent1"/>
+          </a:effectRef>
+          <a:fontRef idx="minor">
+            <a:schemeClr val="lt1"/>
+          </a:fontRef>
+        </p:style>
+        <p:txBody>
+          <a:bodyPr rtlCol="0" anchor="ctr"/>
+          <a:lstStyle/>
+          <a:p>
+            <a:pPr algn="ctr"/>
+            <a:endParaRPr lang="en-US"/>
+          </a:p>
+        </p:txBody>
+      </p:sp>
+      <p:sp>
+        <p:nvSpPr>
+          <p:cNvPr id="10" name="Oval 9">
+            <a:extLst>
+              <a:ext uri="{FF2B5EF4-FFF2-40B4-BE49-F238E27FC236}">
+                <a16:creationId xmlns:a16="http://schemas.microsoft.com/office/drawing/2014/main" id="{E837F9C9-1C08-0853-4416-7C3C505A7D90}"/>
+              </a:ext>
+            </a:extLst>
+          </p:cNvPr>
+          <p:cNvSpPr/>
+          <p:nvPr/>
+        </p:nvSpPr>
+        <p:spPr>
+          <a:xfrm>
+            <a:off x="8550533" y="3670067"/>
+            <a:ext cx="258183" cy="258183"/>
+          </a:xfrm>
+          <a:prstGeom prst="ellipse">
+            <a:avLst/>
+          </a:prstGeom>
+          <a:solidFill>
+            <a:schemeClr val="tx1"/>
+          </a:solidFill>
+          <a:ln>
+            <a:noFill/>
+          </a:ln>
+        </p:spPr>
+        <p:style>
+          <a:lnRef idx="2">
+            <a:schemeClr val="accent1">
+              <a:shade val="15000"/>
+            </a:schemeClr>
+          </a:lnRef>
+          <a:fillRef idx="1">
+            <a:schemeClr val="accent1"/>
+          </a:fillRef>
+          <a:effectRef idx="0">
+            <a:schemeClr val="accent1"/>
+          </a:effectRef>
+          <a:fontRef idx="minor">
+            <a:schemeClr val="lt1"/>
+          </a:fontRef>
+        </p:style>
+        <p:txBody>
+          <a:bodyPr rtlCol="0" anchor="ctr"/>
+          <a:lstStyle/>
+          <a:p>
+            <a:pPr algn="ctr"/>
+            <a:endParaRPr lang="en-US"/>
+          </a:p>
+        </p:txBody>
+      </p:sp>
+      <p:sp>
+        <p:nvSpPr>
+          <p:cNvPr id="13" name="TextBox 12">
+            <a:extLst>
+              <a:ext uri="{FF2B5EF4-FFF2-40B4-BE49-F238E27FC236}">
+                <a16:creationId xmlns:a16="http://schemas.microsoft.com/office/drawing/2014/main" id="{7D7A812F-0B91-6CF1-3E21-3C0B33C42BB1}"/>
+              </a:ext>
+            </a:extLst>
+          </p:cNvPr>
+          <p:cNvSpPr txBox="1"/>
+          <p:nvPr/>
+        </p:nvSpPr>
+        <p:spPr>
+          <a:xfrm>
+            <a:off x="2930517" y="4057342"/>
+            <a:ext cx="1653174" cy="461665"/>
+          </a:xfrm>
+          <a:prstGeom prst="rect">
+            <a:avLst/>
+          </a:prstGeom>
+          <a:noFill/>
+        </p:spPr>
+        <p:txBody>
+          <a:bodyPr wrap="square" rtlCol="0">
+            <a:spAutoFit/>
+          </a:bodyPr>
+          <a:lstStyle/>
+          <a:p>
+            <a:pPr algn="ctr"/>
+            <a:r>
+              <a:rPr lang="en-US" sz="2400" dirty="0">
+                <a:latin typeface="Arial" panose="020B0604020202020204" pitchFamily="34" charset="0"/>
+                <a:cs typeface="Arial" panose="020B0604020202020204" pitchFamily="34" charset="0"/>
+              </a:rPr>
+              <a:t>Commit 1</a:t>
+            </a:r>
+          </a:p>
+        </p:txBody>
+      </p:sp>
+      <p:sp>
+        <p:nvSpPr>
+          <p:cNvPr id="14" name="TextBox 13">
+            <a:extLst>
+              <a:ext uri="{FF2B5EF4-FFF2-40B4-BE49-F238E27FC236}">
+                <a16:creationId xmlns:a16="http://schemas.microsoft.com/office/drawing/2014/main" id="{DD0D5B8C-2012-D795-D717-897F148EEA63}"/>
+              </a:ext>
+            </a:extLst>
+          </p:cNvPr>
+          <p:cNvSpPr txBox="1"/>
+          <p:nvPr/>
+        </p:nvSpPr>
+        <p:spPr>
+          <a:xfrm>
+            <a:off x="4571357" y="4057341"/>
+            <a:ext cx="1653174" cy="461665"/>
+          </a:xfrm>
+          <a:prstGeom prst="rect">
+            <a:avLst/>
+          </a:prstGeom>
+          <a:noFill/>
+        </p:spPr>
+        <p:txBody>
+          <a:bodyPr wrap="square" rtlCol="0">
+            <a:spAutoFit/>
+          </a:bodyPr>
+          <a:lstStyle/>
+          <a:p>
+            <a:pPr algn="ctr"/>
+            <a:r>
+              <a:rPr lang="en-US" sz="2400" dirty="0">
+                <a:latin typeface="Arial" panose="020B0604020202020204" pitchFamily="34" charset="0"/>
+                <a:cs typeface="Arial" panose="020B0604020202020204" pitchFamily="34" charset="0"/>
+              </a:rPr>
+              <a:t>Commit 2</a:t>
+            </a:r>
+          </a:p>
+        </p:txBody>
+      </p:sp>
+      <p:sp>
+        <p:nvSpPr>
+          <p:cNvPr id="15" name="TextBox 14">
+            <a:extLst>
+              <a:ext uri="{FF2B5EF4-FFF2-40B4-BE49-F238E27FC236}">
+                <a16:creationId xmlns:a16="http://schemas.microsoft.com/office/drawing/2014/main" id="{A8F25F94-041F-0162-7508-30E4A738AECC}"/>
+              </a:ext>
+            </a:extLst>
+          </p:cNvPr>
+          <p:cNvSpPr txBox="1"/>
+          <p:nvPr/>
+        </p:nvSpPr>
+        <p:spPr>
+          <a:xfrm>
+            <a:off x="6212197" y="4057340"/>
+            <a:ext cx="1653174" cy="461665"/>
+          </a:xfrm>
+          <a:prstGeom prst="rect">
+            <a:avLst/>
+          </a:prstGeom>
+          <a:noFill/>
+        </p:spPr>
+        <p:txBody>
+          <a:bodyPr wrap="square" rtlCol="0">
+            <a:spAutoFit/>
+          </a:bodyPr>
+          <a:lstStyle/>
+          <a:p>
+            <a:pPr algn="ctr"/>
+            <a:r>
+              <a:rPr lang="en-US" sz="2400" dirty="0">
+                <a:latin typeface="Arial" panose="020B0604020202020204" pitchFamily="34" charset="0"/>
+                <a:cs typeface="Arial" panose="020B0604020202020204" pitchFamily="34" charset="0"/>
+              </a:rPr>
+              <a:t>Commit 3</a:t>
+            </a:r>
+          </a:p>
+        </p:txBody>
+      </p:sp>
+      <p:sp>
+        <p:nvSpPr>
+          <p:cNvPr id="16" name="TextBox 15">
+            <a:extLst>
+              <a:ext uri="{FF2B5EF4-FFF2-40B4-BE49-F238E27FC236}">
+                <a16:creationId xmlns:a16="http://schemas.microsoft.com/office/drawing/2014/main" id="{48E72FDB-ABDE-93BB-FCAA-E17BCF70EEF5}"/>
+              </a:ext>
+            </a:extLst>
+          </p:cNvPr>
+          <p:cNvSpPr txBox="1"/>
+          <p:nvPr/>
+        </p:nvSpPr>
+        <p:spPr>
+          <a:xfrm>
+            <a:off x="7853037" y="4057340"/>
+            <a:ext cx="1653174" cy="461665"/>
+          </a:xfrm>
+          <a:prstGeom prst="rect">
+            <a:avLst/>
+          </a:prstGeom>
+          <a:noFill/>
+        </p:spPr>
+        <p:txBody>
+          <a:bodyPr wrap="square" rtlCol="0">
+            <a:spAutoFit/>
+          </a:bodyPr>
+          <a:lstStyle/>
+          <a:p>
+            <a:pPr algn="ctr"/>
+            <a:r>
+              <a:rPr lang="en-US" sz="2400" dirty="0">
+                <a:latin typeface="Arial" panose="020B0604020202020204" pitchFamily="34" charset="0"/>
+                <a:cs typeface="Arial" panose="020B0604020202020204" pitchFamily="34" charset="0"/>
+              </a:rPr>
+              <a:t>Commit 4</a:t>
+            </a:r>
+          </a:p>
+        </p:txBody>
+      </p:sp>
+      <p:sp>
+        <p:nvSpPr>
+          <p:cNvPr id="17" name="TextBox 16">
+            <a:extLst>
+              <a:ext uri="{FF2B5EF4-FFF2-40B4-BE49-F238E27FC236}">
+                <a16:creationId xmlns:a16="http://schemas.microsoft.com/office/drawing/2014/main" id="{33D564F8-DAEB-3A46-9BB9-39751928AD15}"/>
+              </a:ext>
+            </a:extLst>
+          </p:cNvPr>
+          <p:cNvSpPr txBox="1"/>
+          <p:nvPr/>
+        </p:nvSpPr>
+        <p:spPr>
+          <a:xfrm>
+            <a:off x="7195048" y="4546352"/>
+            <a:ext cx="3017263" cy="461665"/>
+          </a:xfrm>
+          <a:prstGeom prst="rect">
+            <a:avLst/>
+          </a:prstGeom>
+          <a:noFill/>
+        </p:spPr>
+        <p:txBody>
+          <a:bodyPr wrap="square" rtlCol="0">
+            <a:spAutoFit/>
+          </a:bodyPr>
+          <a:lstStyle/>
+          <a:p>
+            <a:pPr algn="ctr"/>
+            <a:r>
+              <a:rPr lang="en-US" sz="2400" dirty="0">
+                <a:solidFill>
+                  <a:schemeClr val="tx2"/>
+                </a:solidFill>
+                <a:latin typeface="Arial" panose="020B0604020202020204" pitchFamily="34" charset="0"/>
+                <a:cs typeface="Arial" panose="020B0604020202020204" pitchFamily="34" charset="0"/>
+              </a:rPr>
+              <a:t>Made a mistake!</a:t>
+            </a:r>
+          </a:p>
+        </p:txBody>
+      </p:sp>
+      <p:sp>
+        <p:nvSpPr>
+          <p:cNvPr id="18" name="Freeform: Shape 17">
+            <a:extLst>
+              <a:ext uri="{FF2B5EF4-FFF2-40B4-BE49-F238E27FC236}">
+                <a16:creationId xmlns:a16="http://schemas.microsoft.com/office/drawing/2014/main" id="{FAC208D8-E0F2-DEB3-EA34-1E9CAC3AED46}"/>
+              </a:ext>
+            </a:extLst>
+          </p:cNvPr>
+          <p:cNvSpPr/>
+          <p:nvPr/>
+        </p:nvSpPr>
+        <p:spPr>
+          <a:xfrm>
+            <a:off x="7253340" y="3074528"/>
+            <a:ext cx="1339850" cy="416783"/>
+          </a:xfrm>
+          <a:custGeom>
+            <a:avLst/>
+            <a:gdLst>
+              <a:gd name="csX0" fmla="*/ 1320800 w 1320800"/>
+              <a:gd name="csY0" fmla="*/ 366036 h 416836"/>
+              <a:gd name="csX1" fmla="*/ 690880 w 1320800"/>
+              <a:gd name="csY1" fmla="*/ 276 h 416836"/>
+              <a:gd name="csX2" fmla="*/ 0 w 1320800"/>
+              <a:gd name="csY2" fmla="*/ 416836 h 416836"/>
+              <a:gd name="csX0" fmla="*/ 1339850 w 1339850"/>
+              <a:gd name="csY0" fmla="*/ 413608 h 416783"/>
+              <a:gd name="csX1" fmla="*/ 690880 w 1339850"/>
+              <a:gd name="csY1" fmla="*/ 223 h 416783"/>
+              <a:gd name="csX2" fmla="*/ 0 w 1339850"/>
+              <a:gd name="csY2" fmla="*/ 416783 h 416783"/>
+            </a:gdLst>
+            <a:ahLst/>
+            <a:cxnLst>
+              <a:cxn ang="0">
+                <a:pos x="csX0" y="csY0"/>
+              </a:cxn>
+              <a:cxn ang="0">
+                <a:pos x="csX1" y="csY1"/>
+              </a:cxn>
+              <a:cxn ang="0">
+                <a:pos x="csX2" y="csY2"/>
+              </a:cxn>
+            </a:cxnLst>
+            <a:rect l="l" t="t" r="r" b="b"/>
+            <a:pathLst>
+              <a:path w="1339850" h="416783">
+                <a:moveTo>
+                  <a:pt x="1339850" y="413608"/>
+                </a:moveTo>
+                <a:cubicBezTo>
+                  <a:pt x="1134956" y="226494"/>
+                  <a:pt x="911013" y="-8244"/>
+                  <a:pt x="690880" y="223"/>
+                </a:cubicBezTo>
+                <a:cubicBezTo>
+                  <a:pt x="470747" y="8690"/>
+                  <a:pt x="235373" y="212736"/>
+                  <a:pt x="0" y="416783"/>
+                </a:cubicBezTo>
+              </a:path>
+            </a:pathLst>
+          </a:custGeom>
+          <a:noFill/>
+          <a:ln w="38100">
+            <a:solidFill>
+              <a:schemeClr val="tx2"/>
+            </a:solidFill>
+            <a:tailEnd type="arrow"/>
+          </a:ln>
+        </p:spPr>
+        <p:style>
+          <a:lnRef idx="2">
+            <a:schemeClr val="accent1">
+              <a:shade val="15000"/>
+            </a:schemeClr>
+          </a:lnRef>
+          <a:fillRef idx="1">
+            <a:schemeClr val="accent1"/>
+          </a:fillRef>
+          <a:effectRef idx="0">
+            <a:schemeClr val="accent1"/>
+          </a:effectRef>
+          <a:fontRef idx="minor">
+            <a:schemeClr val="lt1"/>
+          </a:fontRef>
+        </p:style>
+        <p:txBody>
+          <a:bodyPr rtlCol="0" anchor="ctr"/>
+          <a:lstStyle/>
+          <a:p>
+            <a:pPr algn="ctr"/>
+            <a:endParaRPr lang="en-US"/>
+          </a:p>
+        </p:txBody>
+      </p:sp>
+      <p:sp>
+        <p:nvSpPr>
+          <p:cNvPr id="19" name="TextBox 18">
+            <a:extLst>
+              <a:ext uri="{FF2B5EF4-FFF2-40B4-BE49-F238E27FC236}">
+                <a16:creationId xmlns:a16="http://schemas.microsoft.com/office/drawing/2014/main" id="{1401CEBF-1929-D564-90FC-88C1761159A6}"/>
+              </a:ext>
+            </a:extLst>
+          </p:cNvPr>
+          <p:cNvSpPr txBox="1"/>
+          <p:nvPr/>
+        </p:nvSpPr>
+        <p:spPr>
+          <a:xfrm>
+            <a:off x="6414633" y="2089607"/>
+            <a:ext cx="3017263" cy="830997"/>
+          </a:xfrm>
+          <a:prstGeom prst="rect">
+            <a:avLst/>
+          </a:prstGeom>
+          <a:noFill/>
+        </p:spPr>
+        <p:txBody>
+          <a:bodyPr wrap="square" rtlCol="0">
+            <a:spAutoFit/>
+          </a:bodyPr>
+          <a:lstStyle/>
+          <a:p>
+            <a:pPr algn="ctr"/>
+            <a:r>
+              <a:rPr lang="en-US" sz="2400" dirty="0">
+                <a:solidFill>
+                  <a:schemeClr val="tx2"/>
+                </a:solidFill>
+                <a:latin typeface="Arial" panose="020B0604020202020204" pitchFamily="34" charset="0"/>
+                <a:cs typeface="Arial" panose="020B0604020202020204" pitchFamily="34" charset="0"/>
+              </a:rPr>
+              <a:t>Revert: undo changes in a commit</a:t>
+            </a:r>
+          </a:p>
+        </p:txBody>
+      </p:sp>
+      <p:sp>
+        <p:nvSpPr>
+          <p:cNvPr id="21" name="Cross 20">
+            <a:extLst>
+              <a:ext uri="{FF2B5EF4-FFF2-40B4-BE49-F238E27FC236}">
+                <a16:creationId xmlns:a16="http://schemas.microsoft.com/office/drawing/2014/main" id="{103DB7D7-B21D-5332-28EE-601AB399E2F7}"/>
+              </a:ext>
+            </a:extLst>
+          </p:cNvPr>
+          <p:cNvSpPr/>
+          <p:nvPr/>
+        </p:nvSpPr>
+        <p:spPr>
+          <a:xfrm rot="2700000">
+            <a:off x="8349206" y="3468741"/>
+            <a:ext cx="660833" cy="660833"/>
+          </a:xfrm>
+          <a:prstGeom prst="plus">
+            <a:avLst>
+              <a:gd name="adj" fmla="val 43249"/>
+            </a:avLst>
+          </a:prstGeom>
+          <a:solidFill>
+            <a:schemeClr val="bg2"/>
+          </a:solidFill>
+          <a:ln>
+            <a:noFill/>
+          </a:ln>
+        </p:spPr>
+        <p:style>
+          <a:lnRef idx="2">
+            <a:schemeClr val="accent1">
+              <a:shade val="15000"/>
+            </a:schemeClr>
+          </a:lnRef>
+          <a:fillRef idx="1">
+            <a:schemeClr val="accent1"/>
+          </a:fillRef>
+          <a:effectRef idx="0">
+            <a:schemeClr val="accent1"/>
+          </a:effectRef>
+          <a:fontRef idx="minor">
+            <a:schemeClr val="lt1"/>
+          </a:fontRef>
+        </p:style>
+        <p:txBody>
+          <a:bodyPr rtlCol="0" anchor="ctr"/>
+          <a:lstStyle/>
+          <a:p>
+            <a:pPr algn="ctr"/>
+            <a:endParaRPr lang="en-US"/>
+          </a:p>
+        </p:txBody>
+      </p:sp>
+    </p:spTree>
+    <p:extLst>
+      <p:ext uri="{BB962C8B-B14F-4D97-AF65-F5344CB8AC3E}">
+        <p14:creationId xmlns:p14="http://schemas.microsoft.com/office/powerpoint/2010/main" val="2640289257"/>
+      </p:ext>
+    </p:extLst>
+  </p:cSld>
+  <p:clrMapOvr>
+    <a:masterClrMapping/>
+  </p:clrMapOvr>
+  <mc:AlternateContent xmlns:mc="http://schemas.openxmlformats.org/markup-compatibility/2006">
+    <mc:Choice xmlns:p14="http://schemas.microsoft.com/office/powerpoint/2010/main" Requires="p14">
+      <p:transition spd="med" p14:dur="700">
+        <p:fade/>
+      </p:transition>
+    </mc:Choice>
+    <mc:Fallback>
+      <p:transition spd="med">
+        <p:fade/>
+      </p:transition>
+    </mc:Fallback>
+  </mc:AlternateContent>
+  <p:timing>
+    <p:tnLst>
+      <p:par>
+        <p:cTn id="1" dur="indefinite" restart="never" nodeType="tmRoot">
+          <p:childTnLst>
+            <p:seq concurrent="1" nextAc="seek">
+              <p:cTn id="2" dur="indefinite" nodeType="mainSeq">
+                <p:childTnLst>
+                  <p:par>
+                    <p:cTn id="3" fill="hold">
+                      <p:stCondLst>
+                        <p:cond delay="indefinite"/>
+                      </p:stCondLst>
+                      <p:childTnLst>
+                        <p:par>
+                          <p:cTn id="4" fill="hold">
+                            <p:stCondLst>
+                              <p:cond delay="0"/>
+                            </p:stCondLst>
+                            <p:childTnLst>
+                              <p:par>
+                                <p:cTn id="5" presetID="10" presetClass="entr" presetSubtype="0" fill="hold" grpId="0" nodeType="clickEffect">
+                                  <p:stCondLst>
+                                    <p:cond delay="0"/>
+                                  </p:stCondLst>
+                                  <p:childTnLst>
+                                    <p:set>
+                                      <p:cBhvr>
+                                        <p:cTn id="6" dur="1" fill="hold">
+                                          <p:stCondLst>
+                                            <p:cond delay="0"/>
+                                          </p:stCondLst>
+                                        </p:cTn>
+                                        <p:tgtEl>
+                                          <p:spTgt spid="17"/>
+                                        </p:tgtEl>
+                                        <p:attrNameLst>
+                                          <p:attrName>style.visibility</p:attrName>
+                                        </p:attrNameLst>
+                                      </p:cBhvr>
+                                      <p:to>
+                                        <p:strVal val="visible"/>
+                                      </p:to>
+                                    </p:set>
+                                    <p:animEffect transition="in" filter="fade">
+                                      <p:cBhvr>
+                                        <p:cTn id="7" dur="500"/>
+                                        <p:tgtEl>
+                                          <p:spTgt spid="17"/>
+                                        </p:tgtEl>
+                                      </p:cBhvr>
+                                    </p:animEffect>
+                                  </p:childTnLst>
+                                </p:cTn>
+                              </p:par>
+                            </p:childTnLst>
+                          </p:cTn>
+                        </p:par>
+                      </p:childTnLst>
+                    </p:cTn>
+                  </p:par>
+                  <p:par>
+                    <p:cTn id="8" fill="hold">
+                      <p:stCondLst>
+                        <p:cond delay="indefinite"/>
+                      </p:stCondLst>
+                      <p:childTnLst>
+                        <p:par>
+                          <p:cTn id="9" fill="hold">
+                            <p:stCondLst>
+                              <p:cond delay="0"/>
+                            </p:stCondLst>
+                            <p:childTnLst>
+                              <p:par>
+                                <p:cTn id="10" presetID="10" presetClass="entr" presetSubtype="0" fill="hold" grpId="0" nodeType="clickEffect">
+                                  <p:stCondLst>
+                                    <p:cond delay="0"/>
+                                  </p:stCondLst>
+                                  <p:childTnLst>
+                                    <p:set>
+                                      <p:cBhvr>
+                                        <p:cTn id="11" dur="1" fill="hold">
+                                          <p:stCondLst>
+                                            <p:cond delay="0"/>
+                                          </p:stCondLst>
+                                        </p:cTn>
+                                        <p:tgtEl>
+                                          <p:spTgt spid="21"/>
+                                        </p:tgtEl>
+                                        <p:attrNameLst>
+                                          <p:attrName>style.visibility</p:attrName>
+                                        </p:attrNameLst>
+                                      </p:cBhvr>
+                                      <p:to>
+                                        <p:strVal val="visible"/>
+                                      </p:to>
+                                    </p:set>
+                                    <p:animEffect transition="in" filter="fade">
+                                      <p:cBhvr>
+                                        <p:cTn id="12" dur="500"/>
+                                        <p:tgtEl>
+                                          <p:spTgt spid="21"/>
+                                        </p:tgtEl>
+                                      </p:cBhvr>
+                                    </p:animEffect>
+                                  </p:childTnLst>
+                                </p:cTn>
+                              </p:par>
+                            </p:childTnLst>
+                          </p:cTn>
+                        </p:par>
+                        <p:par>
+                          <p:cTn id="13" fill="hold">
+                            <p:stCondLst>
+                              <p:cond delay="500"/>
+                            </p:stCondLst>
+                            <p:childTnLst>
+                              <p:par>
+                                <p:cTn id="14" presetID="22" presetClass="entr" presetSubtype="2" fill="hold" grpId="0" nodeType="afterEffect">
+                                  <p:stCondLst>
+                                    <p:cond delay="0"/>
+                                  </p:stCondLst>
+                                  <p:childTnLst>
+                                    <p:set>
+                                      <p:cBhvr>
+                                        <p:cTn id="15" dur="1" fill="hold">
+                                          <p:stCondLst>
+                                            <p:cond delay="0"/>
+                                          </p:stCondLst>
+                                        </p:cTn>
+                                        <p:tgtEl>
+                                          <p:spTgt spid="18"/>
+                                        </p:tgtEl>
+                                        <p:attrNameLst>
+                                          <p:attrName>style.visibility</p:attrName>
+                                        </p:attrNameLst>
+                                      </p:cBhvr>
+                                      <p:to>
+                                        <p:strVal val="visible"/>
+                                      </p:to>
+                                    </p:set>
+                                    <p:animEffect transition="in" filter="wipe(right)">
+                                      <p:cBhvr>
+                                        <p:cTn id="16" dur="500"/>
+                                        <p:tgtEl>
+                                          <p:spTgt spid="18"/>
+                                        </p:tgtEl>
+                                      </p:cBhvr>
+                                    </p:animEffect>
+                                  </p:childTnLst>
+                                </p:cTn>
+                              </p:par>
+                              <p:par>
+                                <p:cTn id="17" presetID="10" presetClass="entr" presetSubtype="0" fill="hold" grpId="0" nodeType="withEffect">
+                                  <p:stCondLst>
+                                    <p:cond delay="0"/>
+                                  </p:stCondLst>
+                                  <p:childTnLst>
+                                    <p:set>
+                                      <p:cBhvr>
+                                        <p:cTn id="18" dur="1" fill="hold">
+                                          <p:stCondLst>
+                                            <p:cond delay="0"/>
+                                          </p:stCondLst>
+                                        </p:cTn>
+                                        <p:tgtEl>
+                                          <p:spTgt spid="19"/>
+                                        </p:tgtEl>
+                                        <p:attrNameLst>
+                                          <p:attrName>style.visibility</p:attrName>
+                                        </p:attrNameLst>
+                                      </p:cBhvr>
+                                      <p:to>
+                                        <p:strVal val="visible"/>
+                                      </p:to>
+                                    </p:set>
+                                    <p:animEffect transition="in" filter="fade">
+                                      <p:cBhvr>
+                                        <p:cTn id="19" dur="500"/>
+                                        <p:tgtEl>
+                                          <p:spTgt spid="19"/>
+                                        </p:tgtEl>
+                                      </p:cBhvr>
+                                    </p:animEffect>
+                                  </p:childTnLst>
+                                </p:cTn>
+                              </p:par>
+                            </p:childTnLst>
+                          </p:cTn>
+                        </p:par>
+                      </p:childTnLst>
+                    </p:cTn>
+                  </p:par>
+                </p:childTnLst>
+              </p:cTn>
+              <p:prevCondLst>
+                <p:cond evt="onPrev" delay="0">
+                  <p:tgtEl>
+                    <p:sldTgt/>
+                  </p:tgtEl>
+                </p:cond>
+              </p:prevCondLst>
+              <p:nextCondLst>
+                <p:cond evt="onNext" delay="0">
+                  <p:tgtEl>
+                    <p:sldTgt/>
+                  </p:tgtEl>
+                </p:cond>
+              </p:nextCondLst>
+            </p:seq>
+          </p:childTnLst>
+        </p:cTn>
+      </p:par>
+    </p:tnLst>
+    <p:bldLst>
+      <p:bldP spid="17" grpId="0"/>
+      <p:bldP spid="18" grpId="0" animBg="1"/>
+      <p:bldP spid="19" grpId="0"/>
+      <p:bldP spid="21" grpId="0" animBg="1"/>
+    </p:bldLst>
+  </p:timing>
+</p:sld>
+</file>
+
+<file path=ppt/slides/slide11.xml><?xml version="1.0" encoding="utf-8"?>
+<p:sld xmlns:a="http://schemas.openxmlformats.org/drawingml/2006/main" xmlns:r="http://schemas.openxmlformats.org/officeDocument/2006/relationships" xmlns:p="http://schemas.openxmlformats.org/presentationml/2006/main">
+  <p:cSld>
+    <p:spTree>
+      <p:nvGrpSpPr>
+        <p:cNvPr id="1" name="">
+          <a:extLst>
+            <a:ext uri="{FF2B5EF4-FFF2-40B4-BE49-F238E27FC236}">
+              <a16:creationId xmlns:a16="http://schemas.microsoft.com/office/drawing/2014/main" id="{282746CD-7553-21CE-986B-C3425F39EC3C}"/>
+            </a:ext>
+          </a:extLst>
+        </p:cNvPr>
+        <p:cNvGrpSpPr/>
+        <p:nvPr/>
+      </p:nvGrpSpPr>
+      <p:grpSpPr>
+        <a:xfrm>
+          <a:off x="0" y="0"/>
+          <a:ext cx="0" cy="0"/>
+          <a:chOff x="0" y="0"/>
+          <a:chExt cx="0" cy="0"/>
+        </a:xfrm>
+      </p:grpSpPr>
+      <p:sp>
+        <p:nvSpPr>
+          <p:cNvPr id="2" name="Title 1">
+            <a:extLst>
+              <a:ext uri="{FF2B5EF4-FFF2-40B4-BE49-F238E27FC236}">
+                <a16:creationId xmlns:a16="http://schemas.microsoft.com/office/drawing/2014/main" id="{0E28A1C0-6283-CD4C-39C4-93646E3AACD0}"/>
+              </a:ext>
+            </a:extLst>
+          </p:cNvPr>
+          <p:cNvSpPr>
+            <a:spLocks noGrp="1"/>
+          </p:cNvSpPr>
+          <p:nvPr>
+            <p:ph type="title"/>
+          </p:nvPr>
+        </p:nvSpPr>
+        <p:spPr/>
+        <p:txBody>
+          <a:bodyPr/>
+          <a:lstStyle/>
+          <a:p>
+            <a:r>
+              <a:rPr lang="en-US" dirty="0"/>
+              <a:t>Hands-on Exercises</a:t>
+            </a:r>
+            <a:endParaRPr lang="en-US" dirty="0">
+              <a:latin typeface="Arial" panose="020B0604020202020204" pitchFamily="34" charset="0"/>
+              <a:cs typeface="Arial" panose="020B0604020202020204" pitchFamily="34" charset="0"/>
+            </a:endParaRPr>
+          </a:p>
+        </p:txBody>
+      </p:sp>
+      <p:sp>
+        <p:nvSpPr>
+          <p:cNvPr id="4" name="TextBox 3">
+            <a:extLst>
+              <a:ext uri="{FF2B5EF4-FFF2-40B4-BE49-F238E27FC236}">
+                <a16:creationId xmlns:a16="http://schemas.microsoft.com/office/drawing/2014/main" id="{53F81371-9B44-5EAB-8E4B-4DFFF032BBBC}"/>
+              </a:ext>
+            </a:extLst>
+          </p:cNvPr>
+          <p:cNvSpPr txBox="1"/>
+          <p:nvPr/>
+        </p:nvSpPr>
+        <p:spPr>
+          <a:xfrm>
+            <a:off x="424132" y="2890391"/>
+            <a:ext cx="11343735" cy="1077218"/>
+          </a:xfrm>
+          <a:prstGeom prst="rect">
+            <a:avLst/>
+          </a:prstGeom>
+          <a:noFill/>
+        </p:spPr>
+        <p:txBody>
+          <a:bodyPr wrap="square">
+            <a:spAutoFit/>
+          </a:bodyPr>
+          <a:lstStyle/>
+          <a:p>
+            <a:r>
+              <a:rPr lang="en-US" sz="3200" dirty="0">
+                <a:latin typeface="Arial" panose="020B0604020202020204" pitchFamily="34" charset="0"/>
+                <a:cs typeface="Arial" panose="020B0604020202020204" pitchFamily="34" charset="0"/>
+              </a:rPr>
+              <a:t>Follow the README instructions here: </a:t>
+            </a:r>
+            <a:r>
+              <a:rPr lang="en-US" sz="3200" dirty="0">
+                <a:solidFill>
+                  <a:schemeClr val="tx2"/>
+                </a:solidFill>
+                <a:latin typeface="Arial" panose="020B0604020202020204" pitchFamily="34" charset="0"/>
+                <a:cs typeface="Arial" panose="020B0604020202020204" pitchFamily="34" charset="0"/>
+              </a:rPr>
+              <a:t>github.com/ShawnHymel/workshop-intro-to-git-and-github</a:t>
+            </a:r>
+          </a:p>
+        </p:txBody>
+      </p:sp>
+      <p:sp>
+        <p:nvSpPr>
+          <p:cNvPr id="3" name="TextBox 2">
+            <a:extLst>
+              <a:ext uri="{FF2B5EF4-FFF2-40B4-BE49-F238E27FC236}">
+                <a16:creationId xmlns:a16="http://schemas.microsoft.com/office/drawing/2014/main" id="{09725817-9382-1152-5CF1-629D605A12E4}"/>
+              </a:ext>
+            </a:extLst>
+          </p:cNvPr>
+          <p:cNvSpPr txBox="1"/>
+          <p:nvPr/>
+        </p:nvSpPr>
+        <p:spPr>
+          <a:xfrm>
+            <a:off x="424132" y="4628703"/>
+            <a:ext cx="11343735" cy="1077218"/>
+          </a:xfrm>
+          <a:prstGeom prst="rect">
+            <a:avLst/>
+          </a:prstGeom>
+          <a:noFill/>
+        </p:spPr>
+        <p:txBody>
+          <a:bodyPr wrap="square">
+            <a:spAutoFit/>
+          </a:bodyPr>
+          <a:lstStyle/>
+          <a:p>
+            <a:r>
+              <a:rPr lang="en-US" sz="3200" dirty="0">
+                <a:latin typeface="Arial" panose="020B0604020202020204" pitchFamily="34" charset="0"/>
+                <a:cs typeface="Arial" panose="020B0604020202020204" pitchFamily="34" charset="0"/>
+              </a:rPr>
+              <a:t>Do:</a:t>
+            </a:r>
+            <a:endParaRPr lang="en-US" sz="3200" dirty="0">
+              <a:solidFill>
+                <a:schemeClr val="tx2"/>
+              </a:solidFill>
+              <a:latin typeface="Arial" panose="020B0604020202020204" pitchFamily="34" charset="0"/>
+              <a:cs typeface="Arial" panose="020B0604020202020204" pitchFamily="34" charset="0"/>
+            </a:endParaRPr>
+          </a:p>
+          <a:p>
+            <a:pPr marL="457200" indent="-457200">
+              <a:buFont typeface="Arial" panose="020B0604020202020204" pitchFamily="34" charset="0"/>
+              <a:buChar char="•"/>
+            </a:pPr>
+            <a:r>
+              <a:rPr lang="en-US" sz="3200" dirty="0">
+                <a:solidFill>
+                  <a:schemeClr val="tx2"/>
+                </a:solidFill>
+                <a:latin typeface="Arial" panose="020B0604020202020204" pitchFamily="34" charset="0"/>
+                <a:cs typeface="Arial" panose="020B0604020202020204" pitchFamily="34" charset="0"/>
+              </a:rPr>
+              <a:t>Hands-on exercise 2</a:t>
+            </a:r>
+          </a:p>
+        </p:txBody>
+      </p:sp>
+    </p:spTree>
+    <p:extLst>
+      <p:ext uri="{BB962C8B-B14F-4D97-AF65-F5344CB8AC3E}">
+        <p14:creationId xmlns:p14="http://schemas.microsoft.com/office/powerpoint/2010/main" val="1858794561"/>
+      </p:ext>
+    </p:extLst>
+  </p:cSld>
+  <p:clrMapOvr>
+    <a:masterClrMapping/>
+  </p:clrMapOvr>
+  <mc:AlternateContent xmlns:mc="http://schemas.openxmlformats.org/markup-compatibility/2006">
+    <mc:Choice xmlns:p14="http://schemas.microsoft.com/office/powerpoint/2010/main" Requires="p14">
+      <p:transition spd="med" p14:dur="700">
+        <p:fade/>
+      </p:transition>
+    </mc:Choice>
+    <mc:Fallback>
+      <p:transition spd="med">
+        <p:fade/>
+      </p:transition>
+    </mc:Fallback>
+  </mc:AlternateContent>
+</p:sld>
+</file>
+
+<file path=ppt/slides/slide12.xml><?xml version="1.0" encoding="utf-8"?>
+<p:sld xmlns:a="http://schemas.openxmlformats.org/drawingml/2006/main" xmlns:r="http://schemas.openxmlformats.org/officeDocument/2006/relationships" xmlns:p="http://schemas.openxmlformats.org/presentationml/2006/main">
+  <p:cSld>
+    <p:spTree>
+      <p:nvGrpSpPr>
+        <p:cNvPr id="1" name="">
+          <a:extLst>
+            <a:ext uri="{FF2B5EF4-FFF2-40B4-BE49-F238E27FC236}">
+              <a16:creationId xmlns:a16="http://schemas.microsoft.com/office/drawing/2014/main" id="{741A0743-B6B2-3888-BC26-2043CE1857AF}"/>
+            </a:ext>
+          </a:extLst>
+        </p:cNvPr>
+        <p:cNvGrpSpPr/>
+        <p:nvPr/>
+      </p:nvGrpSpPr>
+      <p:grpSpPr>
+        <a:xfrm>
+          <a:off x="0" y="0"/>
+          <a:ext cx="0" cy="0"/>
+          <a:chOff x="0" y="0"/>
+          <a:chExt cx="0" cy="0"/>
+        </a:xfrm>
+      </p:grpSpPr>
+      <p:sp>
+        <p:nvSpPr>
+          <p:cNvPr id="5" name="Title 4">
+            <a:extLst>
+              <a:ext uri="{FF2B5EF4-FFF2-40B4-BE49-F238E27FC236}">
+                <a16:creationId xmlns:a16="http://schemas.microsoft.com/office/drawing/2014/main" id="{33E217E0-F7F5-6D5D-CC3E-BBF994EF4DCD}"/>
+              </a:ext>
+            </a:extLst>
+          </p:cNvPr>
+          <p:cNvSpPr>
+            <a:spLocks noGrp="1"/>
+          </p:cNvSpPr>
+          <p:nvPr>
+            <p:ph type="title"/>
+          </p:nvPr>
+        </p:nvSpPr>
+        <p:spPr/>
+        <p:txBody>
+          <a:bodyPr/>
+          <a:lstStyle/>
+          <a:p>
+            <a:r>
+              <a:rPr lang="en-US" dirty="0"/>
+              <a:t>Part 3</a:t>
+            </a:r>
+          </a:p>
+        </p:txBody>
+      </p:sp>
+      <p:sp>
+        <p:nvSpPr>
+          <p:cNvPr id="6" name="Text Placeholder 5">
+            <a:extLst>
+              <a:ext uri="{FF2B5EF4-FFF2-40B4-BE49-F238E27FC236}">
+                <a16:creationId xmlns:a16="http://schemas.microsoft.com/office/drawing/2014/main" id="{62B06F69-309B-F7C5-B103-91BDDD98DE02}"/>
+              </a:ext>
+            </a:extLst>
+          </p:cNvPr>
+          <p:cNvSpPr>
+            <a:spLocks noGrp="1"/>
+          </p:cNvSpPr>
+          <p:nvPr>
+            <p:ph type="body" idx="1"/>
+          </p:nvPr>
+        </p:nvSpPr>
+        <p:spPr/>
+        <p:txBody>
+          <a:bodyPr/>
+          <a:lstStyle/>
+          <a:p>
+            <a:r>
+              <a:rPr lang="en-US" dirty="0">
+                <a:solidFill>
+                  <a:schemeClr val="tx2"/>
+                </a:solidFill>
+              </a:rPr>
+              <a:t>Branching and Merging</a:t>
+            </a:r>
+          </a:p>
+        </p:txBody>
+      </p:sp>
+    </p:spTree>
+    <p:extLst>
+      <p:ext uri="{BB962C8B-B14F-4D97-AF65-F5344CB8AC3E}">
+        <p14:creationId xmlns:p14="http://schemas.microsoft.com/office/powerpoint/2010/main" val="879114130"/>
+      </p:ext>
+    </p:extLst>
+  </p:cSld>
+  <p:clrMapOvr>
+    <a:masterClrMapping/>
+  </p:clrMapOvr>
+  <mc:AlternateContent xmlns:mc="http://schemas.openxmlformats.org/markup-compatibility/2006">
+    <mc:Choice xmlns:p14="http://schemas.microsoft.com/office/powerpoint/2010/main" Requires="p14">
+      <p:transition spd="med" p14:dur="700">
+        <p:fade/>
+      </p:transition>
+    </mc:Choice>
+    <mc:Fallback>
+      <p:transition spd="med">
+        <p:fade/>
+      </p:transition>
+    </mc:Fallback>
+  </mc:AlternateContent>
+</p:sld>
+</file>
+
+<file path=ppt/slides/slide13.xml><?xml version="1.0" encoding="utf-8"?>
+<p:sld xmlns:a="http://schemas.openxmlformats.org/drawingml/2006/main" xmlns:r="http://schemas.openxmlformats.org/officeDocument/2006/relationships" xmlns:p="http://schemas.openxmlformats.org/presentationml/2006/main">
+  <p:cSld>
+    <p:spTree>
+      <p:nvGrpSpPr>
+        <p:cNvPr id="1" name="">
+          <a:extLst>
+            <a:ext uri="{FF2B5EF4-FFF2-40B4-BE49-F238E27FC236}">
+              <a16:creationId xmlns:a16="http://schemas.microsoft.com/office/drawing/2014/main" id="{163CBF84-6388-125C-C1F5-4B4C6456DCEC}"/>
+            </a:ext>
+          </a:extLst>
+        </p:cNvPr>
+        <p:cNvGrpSpPr/>
+        <p:nvPr/>
+      </p:nvGrpSpPr>
+      <p:grpSpPr>
+        <a:xfrm>
+          <a:off x="0" y="0"/>
+          <a:ext cx="0" cy="0"/>
+          <a:chOff x="0" y="0"/>
+          <a:chExt cx="0" cy="0"/>
+        </a:xfrm>
+      </p:grpSpPr>
+      <p:sp>
+        <p:nvSpPr>
+          <p:cNvPr id="2" name="Title 1">
+            <a:extLst>
+              <a:ext uri="{FF2B5EF4-FFF2-40B4-BE49-F238E27FC236}">
+                <a16:creationId xmlns:a16="http://schemas.microsoft.com/office/drawing/2014/main" id="{6E1FD5AF-B9B7-0D31-273B-79D6FBD0D7C6}"/>
+              </a:ext>
+            </a:extLst>
+          </p:cNvPr>
+          <p:cNvSpPr>
+            <a:spLocks noGrp="1"/>
+          </p:cNvSpPr>
+          <p:nvPr>
+            <p:ph type="title"/>
+          </p:nvPr>
+        </p:nvSpPr>
+        <p:spPr/>
+        <p:txBody>
+          <a:bodyPr/>
+          <a:lstStyle/>
+          <a:p>
+            <a:r>
+              <a:rPr lang="en-US" dirty="0"/>
+              <a:t>Branch</a:t>
+            </a:r>
+            <a:endParaRPr lang="en-US" dirty="0">
+              <a:latin typeface="Arial" panose="020B0604020202020204" pitchFamily="34" charset="0"/>
+              <a:cs typeface="Arial" panose="020B0604020202020204" pitchFamily="34" charset="0"/>
+            </a:endParaRPr>
+          </a:p>
+        </p:txBody>
+      </p:sp>
+      <p:cxnSp>
+        <p:nvCxnSpPr>
+          <p:cNvPr id="5" name="Straight Arrow Connector 4">
+            <a:extLst>
+              <a:ext uri="{FF2B5EF4-FFF2-40B4-BE49-F238E27FC236}">
+                <a16:creationId xmlns:a16="http://schemas.microsoft.com/office/drawing/2014/main" id="{CDAAAB2D-1508-EDAF-33DE-1014F5F4DDBD}"/>
+              </a:ext>
+            </a:extLst>
+          </p:cNvPr>
+          <p:cNvCxnSpPr>
+            <a:cxnSpLocks/>
+          </p:cNvCxnSpPr>
+          <p:nvPr/>
+        </p:nvCxnSpPr>
+        <p:spPr>
+          <a:xfrm flipH="1">
+            <a:off x="3320502" y="3799159"/>
+            <a:ext cx="5550995" cy="0"/>
+          </a:xfrm>
+          <a:prstGeom prst="straightConnector1">
+            <a:avLst/>
+          </a:prstGeom>
+          <a:ln w="50800" cap="rnd">
+            <a:solidFill>
+              <a:schemeClr val="tx1"/>
+            </a:solidFill>
+            <a:tailEnd type="none"/>
+          </a:ln>
+        </p:spPr>
+        <p:style>
+          <a:lnRef idx="1">
+            <a:schemeClr val="accent1"/>
+          </a:lnRef>
+          <a:fillRef idx="0">
+            <a:schemeClr val="accent1"/>
+          </a:fillRef>
+          <a:effectRef idx="0">
+            <a:schemeClr val="accent1"/>
+          </a:effectRef>
+          <a:fontRef idx="minor">
+            <a:schemeClr val="tx1"/>
+          </a:fontRef>
+        </p:style>
+      </p:cxnSp>
+      <p:sp>
+        <p:nvSpPr>
+          <p:cNvPr id="7" name="Oval 6">
+            <a:extLst>
+              <a:ext uri="{FF2B5EF4-FFF2-40B4-BE49-F238E27FC236}">
+                <a16:creationId xmlns:a16="http://schemas.microsoft.com/office/drawing/2014/main" id="{18838224-38B7-93EF-69C5-9A078B2BE4EB}"/>
+              </a:ext>
+            </a:extLst>
+          </p:cNvPr>
+          <p:cNvSpPr/>
+          <p:nvPr/>
+        </p:nvSpPr>
+        <p:spPr>
+          <a:xfrm>
+            <a:off x="3144495" y="3670067"/>
+            <a:ext cx="258183" cy="258183"/>
+          </a:xfrm>
+          <a:prstGeom prst="ellipse">
+            <a:avLst/>
+          </a:prstGeom>
+          <a:solidFill>
+            <a:schemeClr val="tx1"/>
+          </a:solidFill>
+          <a:ln>
+            <a:noFill/>
+          </a:ln>
+        </p:spPr>
+        <p:style>
+          <a:lnRef idx="2">
+            <a:schemeClr val="accent1">
+              <a:shade val="15000"/>
+            </a:schemeClr>
+          </a:lnRef>
+          <a:fillRef idx="1">
+            <a:schemeClr val="accent1"/>
+          </a:fillRef>
+          <a:effectRef idx="0">
+            <a:schemeClr val="accent1"/>
+          </a:effectRef>
+          <a:fontRef idx="minor">
+            <a:schemeClr val="lt1"/>
+          </a:fontRef>
+        </p:style>
+        <p:txBody>
+          <a:bodyPr rtlCol="0" anchor="ctr"/>
+          <a:lstStyle/>
+          <a:p>
+            <a:pPr algn="ctr"/>
+            <a:endParaRPr lang="en-US"/>
+          </a:p>
+        </p:txBody>
+      </p:sp>
+      <p:sp>
+        <p:nvSpPr>
+          <p:cNvPr id="13" name="TextBox 12">
+            <a:extLst>
+              <a:ext uri="{FF2B5EF4-FFF2-40B4-BE49-F238E27FC236}">
+                <a16:creationId xmlns:a16="http://schemas.microsoft.com/office/drawing/2014/main" id="{B383C81E-34F1-C828-86BC-76453E23F5DE}"/>
+              </a:ext>
+            </a:extLst>
+          </p:cNvPr>
+          <p:cNvSpPr txBox="1"/>
+          <p:nvPr/>
+        </p:nvSpPr>
+        <p:spPr>
+          <a:xfrm>
+            <a:off x="2446999" y="4057342"/>
+            <a:ext cx="1653174" cy="461665"/>
+          </a:xfrm>
+          <a:prstGeom prst="rect">
+            <a:avLst/>
+          </a:prstGeom>
+          <a:noFill/>
+        </p:spPr>
+        <p:txBody>
+          <a:bodyPr wrap="square" rtlCol="0">
+            <a:spAutoFit/>
+          </a:bodyPr>
+          <a:lstStyle/>
+          <a:p>
+            <a:pPr algn="ctr"/>
+            <a:r>
+              <a:rPr lang="en-US" sz="2400" dirty="0">
+                <a:latin typeface="Arial" panose="020B0604020202020204" pitchFamily="34" charset="0"/>
+                <a:cs typeface="Arial" panose="020B0604020202020204" pitchFamily="34" charset="0"/>
+              </a:rPr>
+              <a:t>Commit 3</a:t>
+            </a:r>
+          </a:p>
+        </p:txBody>
+      </p:sp>
+      <p:sp>
+        <p:nvSpPr>
+          <p:cNvPr id="3" name="TextBox 2">
+            <a:extLst>
+              <a:ext uri="{FF2B5EF4-FFF2-40B4-BE49-F238E27FC236}">
+                <a16:creationId xmlns:a16="http://schemas.microsoft.com/office/drawing/2014/main" id="{C3C92758-8EF8-0605-58C0-284D49FA2DF0}"/>
+              </a:ext>
+            </a:extLst>
+          </p:cNvPr>
+          <p:cNvSpPr txBox="1"/>
+          <p:nvPr/>
+        </p:nvSpPr>
+        <p:spPr>
+          <a:xfrm>
+            <a:off x="953748" y="3568325"/>
+            <a:ext cx="1653174" cy="461665"/>
+          </a:xfrm>
+          <a:prstGeom prst="rect">
+            <a:avLst/>
+          </a:prstGeom>
+          <a:noFill/>
+        </p:spPr>
+        <p:txBody>
+          <a:bodyPr wrap="square" rtlCol="0">
+            <a:spAutoFit/>
+          </a:bodyPr>
+          <a:lstStyle/>
+          <a:p>
+            <a:pPr algn="r"/>
+            <a:r>
+              <a:rPr lang="en-US" sz="2400" dirty="0">
+                <a:latin typeface="Arial" panose="020B0604020202020204" pitchFamily="34" charset="0"/>
+                <a:cs typeface="Arial" panose="020B0604020202020204" pitchFamily="34" charset="0"/>
+              </a:rPr>
+              <a:t>main</a:t>
+            </a:r>
+          </a:p>
+        </p:txBody>
+      </p:sp>
+      <p:sp>
+        <p:nvSpPr>
+          <p:cNvPr id="4" name="TextBox 3">
+            <a:extLst>
+              <a:ext uri="{FF2B5EF4-FFF2-40B4-BE49-F238E27FC236}">
+                <a16:creationId xmlns:a16="http://schemas.microsoft.com/office/drawing/2014/main" id="{BC5820CF-E699-5DEE-44EF-A28E901C2D05}"/>
+              </a:ext>
+            </a:extLst>
+          </p:cNvPr>
+          <p:cNvSpPr txBox="1"/>
+          <p:nvPr/>
+        </p:nvSpPr>
+        <p:spPr>
+          <a:xfrm>
+            <a:off x="354681" y="3040106"/>
+            <a:ext cx="2252241" cy="461665"/>
+          </a:xfrm>
+          <a:prstGeom prst="rect">
+            <a:avLst/>
+          </a:prstGeom>
+          <a:noFill/>
+        </p:spPr>
+        <p:txBody>
+          <a:bodyPr wrap="square" rtlCol="0">
+            <a:spAutoFit/>
+          </a:bodyPr>
+          <a:lstStyle/>
+          <a:p>
+            <a:pPr algn="r"/>
+            <a:r>
+              <a:rPr lang="en-US" sz="2400" dirty="0">
+                <a:solidFill>
+                  <a:schemeClr val="tx2"/>
+                </a:solidFill>
+                <a:latin typeface="Arial" panose="020B0604020202020204" pitchFamily="34" charset="0"/>
+                <a:cs typeface="Arial" panose="020B0604020202020204" pitchFamily="34" charset="0"/>
+              </a:rPr>
+              <a:t>Branch name:</a:t>
+            </a:r>
+          </a:p>
+        </p:txBody>
+      </p:sp>
+      <p:sp>
+        <p:nvSpPr>
+          <p:cNvPr id="6" name="TextBox 5">
+            <a:extLst>
+              <a:ext uri="{FF2B5EF4-FFF2-40B4-BE49-F238E27FC236}">
+                <a16:creationId xmlns:a16="http://schemas.microsoft.com/office/drawing/2014/main" id="{FA735243-C642-C755-B9D8-17818992F9A0}"/>
+              </a:ext>
+            </a:extLst>
+          </p:cNvPr>
+          <p:cNvSpPr txBox="1"/>
+          <p:nvPr/>
+        </p:nvSpPr>
+        <p:spPr>
+          <a:xfrm>
+            <a:off x="440930" y="4954999"/>
+            <a:ext cx="2165992" cy="461665"/>
+          </a:xfrm>
+          <a:prstGeom prst="rect">
+            <a:avLst/>
+          </a:prstGeom>
+          <a:noFill/>
+        </p:spPr>
+        <p:txBody>
+          <a:bodyPr wrap="square" rtlCol="0">
+            <a:spAutoFit/>
+          </a:bodyPr>
+          <a:lstStyle/>
+          <a:p>
+            <a:pPr algn="r"/>
+            <a:r>
+              <a:rPr lang="en-US" sz="2400" dirty="0">
+                <a:latin typeface="Arial" panose="020B0604020202020204" pitchFamily="34" charset="0"/>
+                <a:cs typeface="Arial" panose="020B0604020202020204" pitchFamily="34" charset="0"/>
+              </a:rPr>
+              <a:t> new-feature</a:t>
+            </a:r>
+          </a:p>
+        </p:txBody>
+      </p:sp>
+      <p:cxnSp>
+        <p:nvCxnSpPr>
+          <p:cNvPr id="20" name="Straight Arrow Connector 19">
+            <a:extLst>
+              <a:ext uri="{FF2B5EF4-FFF2-40B4-BE49-F238E27FC236}">
+                <a16:creationId xmlns:a16="http://schemas.microsoft.com/office/drawing/2014/main" id="{0D0A62B3-F49D-3617-F4D6-7313F4C4D75A}"/>
+              </a:ext>
+            </a:extLst>
+          </p:cNvPr>
+          <p:cNvCxnSpPr>
+            <a:cxnSpLocks/>
+          </p:cNvCxnSpPr>
+          <p:nvPr/>
+        </p:nvCxnSpPr>
+        <p:spPr>
+          <a:xfrm flipH="1">
+            <a:off x="4732135" y="5185832"/>
+            <a:ext cx="3091817" cy="0"/>
+          </a:xfrm>
+          <a:prstGeom prst="straightConnector1">
+            <a:avLst/>
+          </a:prstGeom>
+          <a:ln w="50800" cap="rnd">
+            <a:solidFill>
+              <a:schemeClr val="tx1"/>
+            </a:solidFill>
+            <a:tailEnd type="none"/>
+          </a:ln>
+        </p:spPr>
+        <p:style>
+          <a:lnRef idx="1">
+            <a:schemeClr val="accent1"/>
+          </a:lnRef>
+          <a:fillRef idx="0">
+            <a:schemeClr val="accent1"/>
+          </a:fillRef>
+          <a:effectRef idx="0">
+            <a:schemeClr val="accent1"/>
+          </a:effectRef>
+          <a:fontRef idx="minor">
+            <a:schemeClr val="tx1"/>
+          </a:fontRef>
+        </p:style>
+      </p:cxnSp>
+      <p:cxnSp>
+        <p:nvCxnSpPr>
+          <p:cNvPr id="23" name="Straight Arrow Connector 22">
+            <a:extLst>
+              <a:ext uri="{FF2B5EF4-FFF2-40B4-BE49-F238E27FC236}">
+                <a16:creationId xmlns:a16="http://schemas.microsoft.com/office/drawing/2014/main" id="{58765CE1-9E9D-0A67-E373-4F8ED6099A77}"/>
+              </a:ext>
+            </a:extLst>
+          </p:cNvPr>
+          <p:cNvCxnSpPr>
+            <a:cxnSpLocks/>
+          </p:cNvCxnSpPr>
+          <p:nvPr/>
+        </p:nvCxnSpPr>
+        <p:spPr>
+          <a:xfrm flipH="1" flipV="1">
+            <a:off x="4109138" y="3799157"/>
+            <a:ext cx="622997" cy="1386674"/>
+          </a:xfrm>
+          <a:prstGeom prst="straightConnector1">
+            <a:avLst/>
+          </a:prstGeom>
+          <a:ln w="50800" cap="rnd">
+            <a:solidFill>
+              <a:schemeClr val="tx1"/>
+            </a:solidFill>
+            <a:tailEnd type="none"/>
+          </a:ln>
+        </p:spPr>
+        <p:style>
+          <a:lnRef idx="1">
+            <a:schemeClr val="accent1"/>
+          </a:lnRef>
+          <a:fillRef idx="0">
+            <a:schemeClr val="accent1"/>
+          </a:fillRef>
+          <a:effectRef idx="0">
+            <a:schemeClr val="accent1"/>
+          </a:effectRef>
+          <a:fontRef idx="minor">
+            <a:schemeClr val="tx1"/>
+          </a:fontRef>
+        </p:style>
+      </p:cxnSp>
+      <p:sp>
+        <p:nvSpPr>
+          <p:cNvPr id="27" name="Oval 26">
+            <a:extLst>
+              <a:ext uri="{FF2B5EF4-FFF2-40B4-BE49-F238E27FC236}">
+                <a16:creationId xmlns:a16="http://schemas.microsoft.com/office/drawing/2014/main" id="{F6C7C941-1417-6220-39E8-40B4D1BCF77D}"/>
+              </a:ext>
+            </a:extLst>
+          </p:cNvPr>
+          <p:cNvSpPr/>
+          <p:nvPr/>
+        </p:nvSpPr>
+        <p:spPr>
+          <a:xfrm>
+            <a:off x="5355132" y="5056739"/>
+            <a:ext cx="258183" cy="258183"/>
+          </a:xfrm>
+          <a:prstGeom prst="ellipse">
+            <a:avLst/>
+          </a:prstGeom>
+          <a:solidFill>
+            <a:schemeClr val="tx1"/>
+          </a:solidFill>
+          <a:ln>
+            <a:noFill/>
+          </a:ln>
+        </p:spPr>
+        <p:style>
+          <a:lnRef idx="2">
+            <a:schemeClr val="accent1">
+              <a:shade val="15000"/>
+            </a:schemeClr>
+          </a:lnRef>
+          <a:fillRef idx="1">
+            <a:schemeClr val="accent1"/>
+          </a:fillRef>
+          <a:effectRef idx="0">
+            <a:schemeClr val="accent1"/>
+          </a:effectRef>
+          <a:fontRef idx="minor">
+            <a:schemeClr val="lt1"/>
+          </a:fontRef>
+        </p:style>
+        <p:txBody>
+          <a:bodyPr rtlCol="0" anchor="ctr"/>
+          <a:lstStyle/>
+          <a:p>
+            <a:pPr algn="ctr"/>
+            <a:endParaRPr lang="en-US"/>
+          </a:p>
+        </p:txBody>
+      </p:sp>
+      <p:sp>
+        <p:nvSpPr>
+          <p:cNvPr id="28" name="TextBox 27">
+            <a:extLst>
+              <a:ext uri="{FF2B5EF4-FFF2-40B4-BE49-F238E27FC236}">
+                <a16:creationId xmlns:a16="http://schemas.microsoft.com/office/drawing/2014/main" id="{16ADBC29-B567-FDDD-ED74-EA2E647CF361}"/>
+              </a:ext>
+            </a:extLst>
+          </p:cNvPr>
+          <p:cNvSpPr txBox="1"/>
+          <p:nvPr/>
+        </p:nvSpPr>
+        <p:spPr>
+          <a:xfrm>
+            <a:off x="4657636" y="5445966"/>
+            <a:ext cx="1653174" cy="461665"/>
+          </a:xfrm>
+          <a:prstGeom prst="rect">
+            <a:avLst/>
+          </a:prstGeom>
+          <a:noFill/>
+        </p:spPr>
+        <p:txBody>
+          <a:bodyPr wrap="square" rtlCol="0">
+            <a:spAutoFit/>
+          </a:bodyPr>
+          <a:lstStyle/>
+          <a:p>
+            <a:pPr algn="ctr"/>
+            <a:r>
+              <a:rPr lang="en-US" sz="2400" dirty="0">
+                <a:latin typeface="Arial" panose="020B0604020202020204" pitchFamily="34" charset="0"/>
+                <a:cs typeface="Arial" panose="020B0604020202020204" pitchFamily="34" charset="0"/>
+              </a:rPr>
+              <a:t>Commit 4</a:t>
+            </a:r>
+          </a:p>
+        </p:txBody>
+      </p:sp>
+      <p:sp>
+        <p:nvSpPr>
+          <p:cNvPr id="29" name="Oval 28">
+            <a:extLst>
+              <a:ext uri="{FF2B5EF4-FFF2-40B4-BE49-F238E27FC236}">
+                <a16:creationId xmlns:a16="http://schemas.microsoft.com/office/drawing/2014/main" id="{44495B69-8AD0-3E0F-6C77-5784430F5108}"/>
+              </a:ext>
+            </a:extLst>
+          </p:cNvPr>
+          <p:cNvSpPr/>
+          <p:nvPr/>
+        </p:nvSpPr>
+        <p:spPr>
+          <a:xfrm>
+            <a:off x="6942772" y="5056738"/>
+            <a:ext cx="258183" cy="258183"/>
+          </a:xfrm>
+          <a:prstGeom prst="ellipse">
+            <a:avLst/>
+          </a:prstGeom>
+          <a:solidFill>
+            <a:schemeClr val="tx1"/>
+          </a:solidFill>
+          <a:ln>
+            <a:noFill/>
+          </a:ln>
+        </p:spPr>
+        <p:style>
+          <a:lnRef idx="2">
+            <a:schemeClr val="accent1">
+              <a:shade val="15000"/>
+            </a:schemeClr>
+          </a:lnRef>
+          <a:fillRef idx="1">
+            <a:schemeClr val="accent1"/>
+          </a:fillRef>
+          <a:effectRef idx="0">
+            <a:schemeClr val="accent1"/>
+          </a:effectRef>
+          <a:fontRef idx="minor">
+            <a:schemeClr val="lt1"/>
+          </a:fontRef>
+        </p:style>
+        <p:txBody>
+          <a:bodyPr rtlCol="0" anchor="ctr"/>
+          <a:lstStyle/>
+          <a:p>
+            <a:pPr algn="ctr"/>
+            <a:endParaRPr lang="en-US"/>
+          </a:p>
+        </p:txBody>
+      </p:sp>
+      <p:sp>
+        <p:nvSpPr>
+          <p:cNvPr id="30" name="TextBox 29">
+            <a:extLst>
+              <a:ext uri="{FF2B5EF4-FFF2-40B4-BE49-F238E27FC236}">
+                <a16:creationId xmlns:a16="http://schemas.microsoft.com/office/drawing/2014/main" id="{A3E82457-76F1-C9D2-7E06-93FB4CCCDCB7}"/>
+              </a:ext>
+            </a:extLst>
+          </p:cNvPr>
+          <p:cNvSpPr txBox="1"/>
+          <p:nvPr/>
+        </p:nvSpPr>
+        <p:spPr>
+          <a:xfrm>
+            <a:off x="6310810" y="5445966"/>
+            <a:ext cx="1653174" cy="461665"/>
+          </a:xfrm>
+          <a:prstGeom prst="rect">
+            <a:avLst/>
+          </a:prstGeom>
+          <a:noFill/>
+        </p:spPr>
+        <p:txBody>
+          <a:bodyPr wrap="square" rtlCol="0">
+            <a:spAutoFit/>
+          </a:bodyPr>
+          <a:lstStyle/>
+          <a:p>
+            <a:pPr algn="ctr"/>
+            <a:r>
+              <a:rPr lang="en-US" sz="2400" dirty="0">
+                <a:latin typeface="Arial" panose="020B0604020202020204" pitchFamily="34" charset="0"/>
+                <a:cs typeface="Arial" panose="020B0604020202020204" pitchFamily="34" charset="0"/>
+              </a:rPr>
+              <a:t>Commit 5</a:t>
+            </a:r>
+          </a:p>
+        </p:txBody>
+      </p:sp>
+    </p:spTree>
+    <p:extLst>
+      <p:ext uri="{BB962C8B-B14F-4D97-AF65-F5344CB8AC3E}">
+        <p14:creationId xmlns:p14="http://schemas.microsoft.com/office/powerpoint/2010/main" val="1373274529"/>
+      </p:ext>
+    </p:extLst>
+  </p:cSld>
+  <p:clrMapOvr>
+    <a:masterClrMapping/>
+  </p:clrMapOvr>
+  <mc:AlternateContent xmlns:mc="http://schemas.openxmlformats.org/markup-compatibility/2006">
+    <mc:Choice xmlns:p14="http://schemas.microsoft.com/office/powerpoint/2010/main" Requires="p14">
+      <p:transition spd="med" p14:dur="700">
+        <p:fade/>
+      </p:transition>
+    </mc:Choice>
+    <mc:Fallback>
+      <p:transition spd="med">
+        <p:fade/>
+      </p:transition>
+    </mc:Fallback>
+  </mc:AlternateContent>
+  <p:timing>
+    <p:tnLst>
+      <p:par>
+        <p:cTn id="1" dur="indefinite" restart="never" nodeType="tmRoot">
+          <p:childTnLst>
+            <p:seq concurrent="1" nextAc="seek">
+              <p:cTn id="2" dur="indefinite" nodeType="mainSeq">
+                <p:childTnLst>
+                  <p:par>
+                    <p:cTn id="3" fill="hold">
+                      <p:stCondLst>
+                        <p:cond delay="indefinite"/>
+                      </p:stCondLst>
+                      <p:childTnLst>
+                        <p:par>
+                          <p:cTn id="4" fill="hold">
+                            <p:stCondLst>
+                              <p:cond delay="0"/>
+                            </p:stCondLst>
+                            <p:childTnLst>
+                              <p:par>
+                                <p:cTn id="5" presetID="10" presetClass="entr" presetSubtype="0" fill="hold" grpId="0" nodeType="clickEffect">
+                                  <p:stCondLst>
+                                    <p:cond delay="0"/>
+                                  </p:stCondLst>
+                                  <p:childTnLst>
+                                    <p:set>
+                                      <p:cBhvr>
+                                        <p:cTn id="6" dur="1" fill="hold">
+                                          <p:stCondLst>
+                                            <p:cond delay="0"/>
+                                          </p:stCondLst>
+                                        </p:cTn>
+                                        <p:tgtEl>
+                                          <p:spTgt spid="6"/>
+                                        </p:tgtEl>
+                                        <p:attrNameLst>
+                                          <p:attrName>style.visibility</p:attrName>
+                                        </p:attrNameLst>
+                                      </p:cBhvr>
+                                      <p:to>
+                                        <p:strVal val="visible"/>
+                                      </p:to>
+                                    </p:set>
+                                    <p:animEffect transition="in" filter="fade">
+                                      <p:cBhvr>
+                                        <p:cTn id="7" dur="500"/>
+                                        <p:tgtEl>
+                                          <p:spTgt spid="6"/>
+                                        </p:tgtEl>
+                                      </p:cBhvr>
+                                    </p:animEffect>
+                                  </p:childTnLst>
+                                </p:cTn>
+                              </p:par>
+                            </p:childTnLst>
+                          </p:cTn>
+                        </p:par>
+                      </p:childTnLst>
+                    </p:cTn>
+                  </p:par>
+                  <p:par>
+                    <p:cTn id="8" fill="hold">
+                      <p:stCondLst>
+                        <p:cond delay="indefinite"/>
+                      </p:stCondLst>
+                      <p:childTnLst>
+                        <p:par>
+                          <p:cTn id="9" fill="hold">
+                            <p:stCondLst>
+                              <p:cond delay="0"/>
+                            </p:stCondLst>
+                            <p:childTnLst>
+                              <p:par>
+                                <p:cTn id="10" presetID="22" presetClass="entr" presetSubtype="1" fill="hold" nodeType="clickEffect">
+                                  <p:stCondLst>
+                                    <p:cond delay="0"/>
+                                  </p:stCondLst>
+                                  <p:childTnLst>
+                                    <p:set>
+                                      <p:cBhvr>
+                                        <p:cTn id="11" dur="1" fill="hold">
+                                          <p:stCondLst>
+                                            <p:cond delay="0"/>
+                                          </p:stCondLst>
+                                        </p:cTn>
+                                        <p:tgtEl>
+                                          <p:spTgt spid="23"/>
+                                        </p:tgtEl>
+                                        <p:attrNameLst>
+                                          <p:attrName>style.visibility</p:attrName>
+                                        </p:attrNameLst>
+                                      </p:cBhvr>
+                                      <p:to>
+                                        <p:strVal val="visible"/>
+                                      </p:to>
+                                    </p:set>
+                                    <p:animEffect transition="in" filter="wipe(up)">
+                                      <p:cBhvr>
+                                        <p:cTn id="12" dur="500"/>
+                                        <p:tgtEl>
+                                          <p:spTgt spid="23"/>
+                                        </p:tgtEl>
+                                      </p:cBhvr>
+                                    </p:animEffect>
+                                  </p:childTnLst>
+                                </p:cTn>
+                              </p:par>
+                            </p:childTnLst>
+                          </p:cTn>
+                        </p:par>
+                        <p:par>
+                          <p:cTn id="13" fill="hold">
+                            <p:stCondLst>
+                              <p:cond delay="500"/>
+                            </p:stCondLst>
+                            <p:childTnLst>
+                              <p:par>
+                                <p:cTn id="14" presetID="22" presetClass="entr" presetSubtype="8" fill="hold" nodeType="afterEffect">
+                                  <p:stCondLst>
+                                    <p:cond delay="0"/>
+                                  </p:stCondLst>
+                                  <p:childTnLst>
+                                    <p:set>
+                                      <p:cBhvr>
+                                        <p:cTn id="15" dur="1" fill="hold">
+                                          <p:stCondLst>
+                                            <p:cond delay="0"/>
+                                          </p:stCondLst>
+                                        </p:cTn>
+                                        <p:tgtEl>
+                                          <p:spTgt spid="20"/>
+                                        </p:tgtEl>
+                                        <p:attrNameLst>
+                                          <p:attrName>style.visibility</p:attrName>
+                                        </p:attrNameLst>
+                                      </p:cBhvr>
+                                      <p:to>
+                                        <p:strVal val="visible"/>
+                                      </p:to>
+                                    </p:set>
+                                    <p:animEffect transition="in" filter="wipe(left)">
+                                      <p:cBhvr>
+                                        <p:cTn id="16" dur="500"/>
+                                        <p:tgtEl>
+                                          <p:spTgt spid="20"/>
+                                        </p:tgtEl>
+                                      </p:cBhvr>
+                                    </p:animEffect>
+                                  </p:childTnLst>
+                                </p:cTn>
+                              </p:par>
+                            </p:childTnLst>
+                          </p:cTn>
+                        </p:par>
+                      </p:childTnLst>
+                    </p:cTn>
+                  </p:par>
+                  <p:par>
+                    <p:cTn id="17" fill="hold">
+                      <p:stCondLst>
+                        <p:cond delay="indefinite"/>
+                      </p:stCondLst>
+                      <p:childTnLst>
+                        <p:par>
+                          <p:cTn id="18" fill="hold">
+                            <p:stCondLst>
+                              <p:cond delay="0"/>
+                            </p:stCondLst>
+                            <p:childTnLst>
+                              <p:par>
+                                <p:cTn id="19" presetID="10" presetClass="entr" presetSubtype="0" fill="hold" grpId="0" nodeType="clickEffect">
+                                  <p:stCondLst>
+                                    <p:cond delay="0"/>
+                                  </p:stCondLst>
+                                  <p:childTnLst>
+                                    <p:set>
+                                      <p:cBhvr>
+                                        <p:cTn id="20" dur="1" fill="hold">
+                                          <p:stCondLst>
+                                            <p:cond delay="0"/>
+                                          </p:stCondLst>
+                                        </p:cTn>
+                                        <p:tgtEl>
+                                          <p:spTgt spid="27"/>
+                                        </p:tgtEl>
+                                        <p:attrNameLst>
+                                          <p:attrName>style.visibility</p:attrName>
+                                        </p:attrNameLst>
+                                      </p:cBhvr>
+                                      <p:to>
+                                        <p:strVal val="visible"/>
+                                      </p:to>
+                                    </p:set>
+                                    <p:animEffect transition="in" filter="fade">
+                                      <p:cBhvr>
+                                        <p:cTn id="21" dur="500"/>
+                                        <p:tgtEl>
+                                          <p:spTgt spid="27"/>
+                                        </p:tgtEl>
+                                      </p:cBhvr>
+                                    </p:animEffect>
+                                  </p:childTnLst>
+                                </p:cTn>
+                              </p:par>
+                              <p:par>
+                                <p:cTn id="22" presetID="10" presetClass="entr" presetSubtype="0" fill="hold" grpId="0" nodeType="withEffect">
+                                  <p:stCondLst>
+                                    <p:cond delay="0"/>
+                                  </p:stCondLst>
+                                  <p:childTnLst>
+                                    <p:set>
+                                      <p:cBhvr>
+                                        <p:cTn id="23" dur="1" fill="hold">
+                                          <p:stCondLst>
+                                            <p:cond delay="0"/>
+                                          </p:stCondLst>
+                                        </p:cTn>
+                                        <p:tgtEl>
+                                          <p:spTgt spid="28"/>
+                                        </p:tgtEl>
+                                        <p:attrNameLst>
+                                          <p:attrName>style.visibility</p:attrName>
+                                        </p:attrNameLst>
+                                      </p:cBhvr>
+                                      <p:to>
+                                        <p:strVal val="visible"/>
+                                      </p:to>
+                                    </p:set>
+                                    <p:animEffect transition="in" filter="fade">
+                                      <p:cBhvr>
+                                        <p:cTn id="24" dur="500"/>
+                                        <p:tgtEl>
+                                          <p:spTgt spid="28"/>
+                                        </p:tgtEl>
+                                      </p:cBhvr>
+                                    </p:animEffect>
+                                  </p:childTnLst>
+                                </p:cTn>
+                              </p:par>
+                            </p:childTnLst>
+                          </p:cTn>
+                        </p:par>
+                        <p:par>
+                          <p:cTn id="25" fill="hold">
+                            <p:stCondLst>
+                              <p:cond delay="500"/>
+                            </p:stCondLst>
+                            <p:childTnLst>
+                              <p:par>
+                                <p:cTn id="26" presetID="10" presetClass="entr" presetSubtype="0" fill="hold" grpId="0" nodeType="afterEffect">
+                                  <p:stCondLst>
+                                    <p:cond delay="0"/>
+                                  </p:stCondLst>
+                                  <p:childTnLst>
+                                    <p:set>
+                                      <p:cBhvr>
+                                        <p:cTn id="27" dur="1" fill="hold">
+                                          <p:stCondLst>
+                                            <p:cond delay="0"/>
+                                          </p:stCondLst>
+                                        </p:cTn>
+                                        <p:tgtEl>
+                                          <p:spTgt spid="29"/>
+                                        </p:tgtEl>
+                                        <p:attrNameLst>
+                                          <p:attrName>style.visibility</p:attrName>
+                                        </p:attrNameLst>
+                                      </p:cBhvr>
+                                      <p:to>
+                                        <p:strVal val="visible"/>
+                                      </p:to>
+                                    </p:set>
+                                    <p:animEffect transition="in" filter="fade">
+                                      <p:cBhvr>
+                                        <p:cTn id="28" dur="500"/>
+                                        <p:tgtEl>
+                                          <p:spTgt spid="29"/>
+                                        </p:tgtEl>
+                                      </p:cBhvr>
+                                    </p:animEffect>
+                                  </p:childTnLst>
+                                </p:cTn>
+                              </p:par>
+                              <p:par>
+                                <p:cTn id="29" presetID="10" presetClass="entr" presetSubtype="0" fill="hold" grpId="0" nodeType="withEffect">
+                                  <p:stCondLst>
+                                    <p:cond delay="0"/>
+                                  </p:stCondLst>
+                                  <p:childTnLst>
+                                    <p:set>
+                                      <p:cBhvr>
+                                        <p:cTn id="30" dur="1" fill="hold">
+                                          <p:stCondLst>
+                                            <p:cond delay="0"/>
+                                          </p:stCondLst>
+                                        </p:cTn>
+                                        <p:tgtEl>
+                                          <p:spTgt spid="30"/>
+                                        </p:tgtEl>
+                                        <p:attrNameLst>
+                                          <p:attrName>style.visibility</p:attrName>
+                                        </p:attrNameLst>
+                                      </p:cBhvr>
+                                      <p:to>
+                                        <p:strVal val="visible"/>
+                                      </p:to>
+                                    </p:set>
+                                    <p:animEffect transition="in" filter="fade">
+                                      <p:cBhvr>
+                                        <p:cTn id="31" dur="500"/>
+                                        <p:tgtEl>
+                                          <p:spTgt spid="30"/>
+                                        </p:tgtEl>
+                                      </p:cBhvr>
+                                    </p:animEffect>
+                                  </p:childTnLst>
+                                </p:cTn>
+                              </p:par>
+                            </p:childTnLst>
+                          </p:cTn>
+                        </p:par>
+                      </p:childTnLst>
+                    </p:cTn>
+                  </p:par>
+                </p:childTnLst>
+              </p:cTn>
+              <p:prevCondLst>
+                <p:cond evt="onPrev" delay="0">
+                  <p:tgtEl>
+                    <p:sldTgt/>
+                  </p:tgtEl>
+                </p:cond>
+              </p:prevCondLst>
+              <p:nextCondLst>
+                <p:cond evt="onNext" delay="0">
+                  <p:tgtEl>
+                    <p:sldTgt/>
+                  </p:tgtEl>
+                </p:cond>
+              </p:nextCondLst>
+            </p:seq>
+          </p:childTnLst>
+        </p:cTn>
+      </p:par>
+    </p:tnLst>
+    <p:bldLst>
+      <p:bldP spid="6" grpId="0"/>
+      <p:bldP spid="27" grpId="0" animBg="1"/>
+      <p:bldP spid="28" grpId="0"/>
+      <p:bldP spid="29" grpId="0" animBg="1"/>
+      <p:bldP spid="30" grpId="0"/>
+    </p:bldLst>
+  </p:timing>
+</p:sld>
+</file>
+
+<file path=ppt/slides/slide14.xml><?xml version="1.0" encoding="utf-8"?>
+<p:sld xmlns:a="http://schemas.openxmlformats.org/drawingml/2006/main" xmlns:r="http://schemas.openxmlformats.org/officeDocument/2006/relationships" xmlns:p="http://schemas.openxmlformats.org/presentationml/2006/main">
+  <p:cSld>
+    <p:spTree>
+      <p:nvGrpSpPr>
+        <p:cNvPr id="1" name="">
+          <a:extLst>
+            <a:ext uri="{FF2B5EF4-FFF2-40B4-BE49-F238E27FC236}">
+              <a16:creationId xmlns:a16="http://schemas.microsoft.com/office/drawing/2014/main" id="{C0B7AF16-48F5-5E56-D1A1-05D21EEE4DC3}"/>
+            </a:ext>
+          </a:extLst>
+        </p:cNvPr>
+        <p:cNvGrpSpPr/>
+        <p:nvPr/>
+      </p:nvGrpSpPr>
+      <p:grpSpPr>
+        <a:xfrm>
+          <a:off x="0" y="0"/>
+          <a:ext cx="0" cy="0"/>
+          <a:chOff x="0" y="0"/>
+          <a:chExt cx="0" cy="0"/>
+        </a:xfrm>
+      </p:grpSpPr>
+      <p:sp>
+        <p:nvSpPr>
+          <p:cNvPr id="2" name="Title 1">
+            <a:extLst>
+              <a:ext uri="{FF2B5EF4-FFF2-40B4-BE49-F238E27FC236}">
+                <a16:creationId xmlns:a16="http://schemas.microsoft.com/office/drawing/2014/main" id="{95293AF3-7EFF-27E1-C163-408BF19E887D}"/>
+              </a:ext>
+            </a:extLst>
+          </p:cNvPr>
+          <p:cNvSpPr>
+            <a:spLocks noGrp="1"/>
+          </p:cNvSpPr>
+          <p:nvPr>
+            <p:ph type="title"/>
+          </p:nvPr>
+        </p:nvSpPr>
+        <p:spPr/>
+        <p:txBody>
+          <a:bodyPr/>
+          <a:lstStyle/>
+          <a:p>
+            <a:r>
+              <a:rPr lang="en-US" dirty="0"/>
+              <a:t>Merge</a:t>
+            </a:r>
+            <a:endParaRPr lang="en-US" dirty="0">
+              <a:latin typeface="Arial" panose="020B0604020202020204" pitchFamily="34" charset="0"/>
+              <a:cs typeface="Arial" panose="020B0604020202020204" pitchFamily="34" charset="0"/>
+            </a:endParaRPr>
+          </a:p>
+        </p:txBody>
+      </p:sp>
+      <p:cxnSp>
+        <p:nvCxnSpPr>
+          <p:cNvPr id="5" name="Straight Arrow Connector 4">
+            <a:extLst>
+              <a:ext uri="{FF2B5EF4-FFF2-40B4-BE49-F238E27FC236}">
+                <a16:creationId xmlns:a16="http://schemas.microsoft.com/office/drawing/2014/main" id="{77487AC4-FE17-866C-9465-C0EE2EB6A708}"/>
+              </a:ext>
+            </a:extLst>
+          </p:cNvPr>
+          <p:cNvCxnSpPr>
+            <a:cxnSpLocks/>
+          </p:cNvCxnSpPr>
+          <p:nvPr/>
+        </p:nvCxnSpPr>
+        <p:spPr>
+          <a:xfrm flipH="1">
+            <a:off x="3320502" y="3799159"/>
+            <a:ext cx="5550995" cy="0"/>
+          </a:xfrm>
+          <a:prstGeom prst="straightConnector1">
+            <a:avLst/>
+          </a:prstGeom>
+          <a:ln w="50800" cap="rnd">
+            <a:solidFill>
+              <a:schemeClr val="tx1"/>
+            </a:solidFill>
+            <a:tailEnd type="none"/>
+          </a:ln>
+        </p:spPr>
+        <p:style>
+          <a:lnRef idx="1">
+            <a:schemeClr val="accent1"/>
+          </a:lnRef>
+          <a:fillRef idx="0">
+            <a:schemeClr val="accent1"/>
+          </a:fillRef>
+          <a:effectRef idx="0">
+            <a:schemeClr val="accent1"/>
+          </a:effectRef>
+          <a:fontRef idx="minor">
+            <a:schemeClr val="tx1"/>
+          </a:fontRef>
+        </p:style>
+      </p:cxnSp>
+      <p:sp>
+        <p:nvSpPr>
+          <p:cNvPr id="7" name="Oval 6">
+            <a:extLst>
+              <a:ext uri="{FF2B5EF4-FFF2-40B4-BE49-F238E27FC236}">
+                <a16:creationId xmlns:a16="http://schemas.microsoft.com/office/drawing/2014/main" id="{2724E2F9-50A0-C22A-53BD-DDC2B4451519}"/>
+              </a:ext>
+            </a:extLst>
+          </p:cNvPr>
+          <p:cNvSpPr/>
+          <p:nvPr/>
+        </p:nvSpPr>
+        <p:spPr>
+          <a:xfrm>
+            <a:off x="3144495" y="3670067"/>
+            <a:ext cx="258183" cy="258183"/>
+          </a:xfrm>
+          <a:prstGeom prst="ellipse">
+            <a:avLst/>
+          </a:prstGeom>
+          <a:solidFill>
+            <a:schemeClr val="tx1"/>
+          </a:solidFill>
+          <a:ln>
+            <a:noFill/>
+          </a:ln>
+        </p:spPr>
+        <p:style>
+          <a:lnRef idx="2">
+            <a:schemeClr val="accent1">
+              <a:shade val="15000"/>
+            </a:schemeClr>
+          </a:lnRef>
+          <a:fillRef idx="1">
+            <a:schemeClr val="accent1"/>
+          </a:fillRef>
+          <a:effectRef idx="0">
+            <a:schemeClr val="accent1"/>
+          </a:effectRef>
+          <a:fontRef idx="minor">
+            <a:schemeClr val="lt1"/>
+          </a:fontRef>
+        </p:style>
+        <p:txBody>
+          <a:bodyPr rtlCol="0" anchor="ctr"/>
+          <a:lstStyle/>
+          <a:p>
+            <a:pPr algn="ctr"/>
+            <a:endParaRPr lang="en-US"/>
+          </a:p>
+        </p:txBody>
+      </p:sp>
+      <p:sp>
+        <p:nvSpPr>
+          <p:cNvPr id="13" name="TextBox 12">
+            <a:extLst>
+              <a:ext uri="{FF2B5EF4-FFF2-40B4-BE49-F238E27FC236}">
+                <a16:creationId xmlns:a16="http://schemas.microsoft.com/office/drawing/2014/main" id="{2043B2B5-6758-82CC-A815-32055F8A6CC0}"/>
+              </a:ext>
+            </a:extLst>
+          </p:cNvPr>
+          <p:cNvSpPr txBox="1"/>
+          <p:nvPr/>
+        </p:nvSpPr>
+        <p:spPr>
+          <a:xfrm>
+            <a:off x="2446999" y="4057342"/>
+            <a:ext cx="1653174" cy="461665"/>
+          </a:xfrm>
+          <a:prstGeom prst="rect">
+            <a:avLst/>
+          </a:prstGeom>
+          <a:noFill/>
+        </p:spPr>
+        <p:txBody>
+          <a:bodyPr wrap="square" rtlCol="0">
+            <a:spAutoFit/>
+          </a:bodyPr>
+          <a:lstStyle/>
+          <a:p>
+            <a:pPr algn="ctr"/>
+            <a:r>
+              <a:rPr lang="en-US" sz="2400" dirty="0">
+                <a:latin typeface="Arial" panose="020B0604020202020204" pitchFamily="34" charset="0"/>
+                <a:cs typeface="Arial" panose="020B0604020202020204" pitchFamily="34" charset="0"/>
+              </a:rPr>
+              <a:t>Commit 3</a:t>
+            </a:r>
+          </a:p>
+        </p:txBody>
+      </p:sp>
+      <p:sp>
+        <p:nvSpPr>
+          <p:cNvPr id="3" name="TextBox 2">
+            <a:extLst>
+              <a:ext uri="{FF2B5EF4-FFF2-40B4-BE49-F238E27FC236}">
+                <a16:creationId xmlns:a16="http://schemas.microsoft.com/office/drawing/2014/main" id="{373678BE-8049-C4AF-E7CD-83461F468BBF}"/>
+              </a:ext>
+            </a:extLst>
+          </p:cNvPr>
+          <p:cNvSpPr txBox="1"/>
+          <p:nvPr/>
+        </p:nvSpPr>
+        <p:spPr>
+          <a:xfrm>
+            <a:off x="953748" y="3568325"/>
+            <a:ext cx="1653174" cy="461665"/>
+          </a:xfrm>
+          <a:prstGeom prst="rect">
+            <a:avLst/>
+          </a:prstGeom>
+          <a:noFill/>
+        </p:spPr>
+        <p:txBody>
+          <a:bodyPr wrap="square" rtlCol="0">
+            <a:spAutoFit/>
+          </a:bodyPr>
+          <a:lstStyle/>
+          <a:p>
+            <a:pPr algn="r"/>
+            <a:r>
+              <a:rPr lang="en-US" sz="2400" dirty="0">
+                <a:latin typeface="Arial" panose="020B0604020202020204" pitchFamily="34" charset="0"/>
+                <a:cs typeface="Arial" panose="020B0604020202020204" pitchFamily="34" charset="0"/>
+              </a:rPr>
+              <a:t>main</a:t>
+            </a:r>
+          </a:p>
+        </p:txBody>
+      </p:sp>
+      <p:sp>
+        <p:nvSpPr>
+          <p:cNvPr id="4" name="TextBox 3">
+            <a:extLst>
+              <a:ext uri="{FF2B5EF4-FFF2-40B4-BE49-F238E27FC236}">
+                <a16:creationId xmlns:a16="http://schemas.microsoft.com/office/drawing/2014/main" id="{8C97D8D3-2A21-E6B7-8793-61723F52B4FE}"/>
+              </a:ext>
+            </a:extLst>
+          </p:cNvPr>
+          <p:cNvSpPr txBox="1"/>
+          <p:nvPr/>
+        </p:nvSpPr>
+        <p:spPr>
+          <a:xfrm>
+            <a:off x="354681" y="3040106"/>
+            <a:ext cx="2252241" cy="461665"/>
+          </a:xfrm>
+          <a:prstGeom prst="rect">
+            <a:avLst/>
+          </a:prstGeom>
+          <a:noFill/>
+        </p:spPr>
+        <p:txBody>
+          <a:bodyPr wrap="square" rtlCol="0">
+            <a:spAutoFit/>
+          </a:bodyPr>
+          <a:lstStyle/>
+          <a:p>
+            <a:pPr algn="r"/>
+            <a:r>
+              <a:rPr lang="en-US" sz="2400" dirty="0">
+                <a:solidFill>
+                  <a:schemeClr val="tx2"/>
+                </a:solidFill>
+                <a:latin typeface="Arial" panose="020B0604020202020204" pitchFamily="34" charset="0"/>
+                <a:cs typeface="Arial" panose="020B0604020202020204" pitchFamily="34" charset="0"/>
+              </a:rPr>
+              <a:t>Branch name:</a:t>
+            </a:r>
+          </a:p>
+        </p:txBody>
+      </p:sp>
+      <p:sp>
+        <p:nvSpPr>
+          <p:cNvPr id="6" name="TextBox 5">
+            <a:extLst>
+              <a:ext uri="{FF2B5EF4-FFF2-40B4-BE49-F238E27FC236}">
+                <a16:creationId xmlns:a16="http://schemas.microsoft.com/office/drawing/2014/main" id="{439345E0-95A1-C92D-D9DB-B729A59349B8}"/>
+              </a:ext>
+            </a:extLst>
+          </p:cNvPr>
+          <p:cNvSpPr txBox="1"/>
+          <p:nvPr/>
+        </p:nvSpPr>
+        <p:spPr>
+          <a:xfrm>
+            <a:off x="440930" y="4954999"/>
+            <a:ext cx="2165992" cy="461665"/>
+          </a:xfrm>
+          <a:prstGeom prst="rect">
+            <a:avLst/>
+          </a:prstGeom>
+          <a:noFill/>
+        </p:spPr>
+        <p:txBody>
+          <a:bodyPr wrap="square" rtlCol="0">
+            <a:spAutoFit/>
+          </a:bodyPr>
+          <a:lstStyle/>
+          <a:p>
+            <a:pPr algn="r"/>
+            <a:r>
+              <a:rPr lang="en-US" sz="2400" dirty="0">
+                <a:latin typeface="Arial" panose="020B0604020202020204" pitchFamily="34" charset="0"/>
+                <a:cs typeface="Arial" panose="020B0604020202020204" pitchFamily="34" charset="0"/>
+              </a:rPr>
+              <a:t> new-feature</a:t>
+            </a:r>
+          </a:p>
+        </p:txBody>
+      </p:sp>
+      <p:cxnSp>
+        <p:nvCxnSpPr>
+          <p:cNvPr id="20" name="Straight Arrow Connector 19">
+            <a:extLst>
+              <a:ext uri="{FF2B5EF4-FFF2-40B4-BE49-F238E27FC236}">
+                <a16:creationId xmlns:a16="http://schemas.microsoft.com/office/drawing/2014/main" id="{D63AA3E4-45F6-97B3-696C-57F9741D4623}"/>
+              </a:ext>
+            </a:extLst>
+          </p:cNvPr>
+          <p:cNvCxnSpPr>
+            <a:cxnSpLocks/>
+          </p:cNvCxnSpPr>
+          <p:nvPr/>
+        </p:nvCxnSpPr>
+        <p:spPr>
+          <a:xfrm flipH="1">
+            <a:off x="4732135" y="5185832"/>
+            <a:ext cx="3091817" cy="0"/>
+          </a:xfrm>
+          <a:prstGeom prst="straightConnector1">
+            <a:avLst/>
+          </a:prstGeom>
+          <a:ln w="50800" cap="rnd">
+            <a:solidFill>
+              <a:schemeClr val="tx1"/>
+            </a:solidFill>
+            <a:tailEnd type="none"/>
+          </a:ln>
+        </p:spPr>
+        <p:style>
+          <a:lnRef idx="1">
+            <a:schemeClr val="accent1"/>
+          </a:lnRef>
+          <a:fillRef idx="0">
+            <a:schemeClr val="accent1"/>
+          </a:fillRef>
+          <a:effectRef idx="0">
+            <a:schemeClr val="accent1"/>
+          </a:effectRef>
+          <a:fontRef idx="minor">
+            <a:schemeClr val="tx1"/>
+          </a:fontRef>
+        </p:style>
+      </p:cxnSp>
+      <p:cxnSp>
+        <p:nvCxnSpPr>
+          <p:cNvPr id="23" name="Straight Arrow Connector 22">
+            <a:extLst>
+              <a:ext uri="{FF2B5EF4-FFF2-40B4-BE49-F238E27FC236}">
+                <a16:creationId xmlns:a16="http://schemas.microsoft.com/office/drawing/2014/main" id="{58B3D790-8A49-8B1B-51F2-BFF7E2A82DE5}"/>
+              </a:ext>
+            </a:extLst>
+          </p:cNvPr>
+          <p:cNvCxnSpPr>
+            <a:cxnSpLocks/>
+          </p:cNvCxnSpPr>
+          <p:nvPr/>
+        </p:nvCxnSpPr>
+        <p:spPr>
+          <a:xfrm flipH="1" flipV="1">
+            <a:off x="4109138" y="3799157"/>
+            <a:ext cx="622997" cy="1386674"/>
+          </a:xfrm>
+          <a:prstGeom prst="straightConnector1">
+            <a:avLst/>
+          </a:prstGeom>
+          <a:ln w="50800" cap="rnd">
+            <a:solidFill>
+              <a:schemeClr val="tx1"/>
+            </a:solidFill>
+            <a:tailEnd type="none"/>
+          </a:ln>
+        </p:spPr>
+        <p:style>
+          <a:lnRef idx="1">
+            <a:schemeClr val="accent1"/>
+          </a:lnRef>
+          <a:fillRef idx="0">
+            <a:schemeClr val="accent1"/>
+          </a:fillRef>
+          <a:effectRef idx="0">
+            <a:schemeClr val="accent1"/>
+          </a:effectRef>
+          <a:fontRef idx="minor">
+            <a:schemeClr val="tx1"/>
+          </a:fontRef>
+        </p:style>
+      </p:cxnSp>
+      <p:sp>
+        <p:nvSpPr>
+          <p:cNvPr id="27" name="Oval 26">
+            <a:extLst>
+              <a:ext uri="{FF2B5EF4-FFF2-40B4-BE49-F238E27FC236}">
+                <a16:creationId xmlns:a16="http://schemas.microsoft.com/office/drawing/2014/main" id="{EBC98760-38FF-EFB7-08A8-0436F9B54587}"/>
+              </a:ext>
+            </a:extLst>
+          </p:cNvPr>
+          <p:cNvSpPr/>
+          <p:nvPr/>
+        </p:nvSpPr>
+        <p:spPr>
+          <a:xfrm>
+            <a:off x="5355132" y="5056739"/>
+            <a:ext cx="258183" cy="258183"/>
+          </a:xfrm>
+          <a:prstGeom prst="ellipse">
+            <a:avLst/>
+          </a:prstGeom>
+          <a:solidFill>
+            <a:schemeClr val="tx1"/>
+          </a:solidFill>
+          <a:ln>
+            <a:noFill/>
+          </a:ln>
+        </p:spPr>
+        <p:style>
+          <a:lnRef idx="2">
+            <a:schemeClr val="accent1">
+              <a:shade val="15000"/>
+            </a:schemeClr>
+          </a:lnRef>
+          <a:fillRef idx="1">
+            <a:schemeClr val="accent1"/>
+          </a:fillRef>
+          <a:effectRef idx="0">
+            <a:schemeClr val="accent1"/>
+          </a:effectRef>
+          <a:fontRef idx="minor">
+            <a:schemeClr val="lt1"/>
+          </a:fontRef>
+        </p:style>
+        <p:txBody>
+          <a:bodyPr rtlCol="0" anchor="ctr"/>
+          <a:lstStyle/>
+          <a:p>
+            <a:pPr algn="ctr"/>
+            <a:endParaRPr lang="en-US"/>
+          </a:p>
+        </p:txBody>
+      </p:sp>
+      <p:sp>
+        <p:nvSpPr>
+          <p:cNvPr id="28" name="TextBox 27">
+            <a:extLst>
+              <a:ext uri="{FF2B5EF4-FFF2-40B4-BE49-F238E27FC236}">
+                <a16:creationId xmlns:a16="http://schemas.microsoft.com/office/drawing/2014/main" id="{C805F64F-CF62-4E54-6089-68D4C2503234}"/>
+              </a:ext>
+            </a:extLst>
+          </p:cNvPr>
+          <p:cNvSpPr txBox="1"/>
+          <p:nvPr/>
+        </p:nvSpPr>
+        <p:spPr>
+          <a:xfrm>
+            <a:off x="4657636" y="5445966"/>
+            <a:ext cx="1653174" cy="461665"/>
+          </a:xfrm>
+          <a:prstGeom prst="rect">
+            <a:avLst/>
+          </a:prstGeom>
+          <a:noFill/>
+        </p:spPr>
+        <p:txBody>
+          <a:bodyPr wrap="square" rtlCol="0">
+            <a:spAutoFit/>
+          </a:bodyPr>
+          <a:lstStyle/>
+          <a:p>
+            <a:pPr algn="ctr"/>
+            <a:r>
+              <a:rPr lang="en-US" sz="2400" dirty="0">
+                <a:latin typeface="Arial" panose="020B0604020202020204" pitchFamily="34" charset="0"/>
+                <a:cs typeface="Arial" panose="020B0604020202020204" pitchFamily="34" charset="0"/>
+              </a:rPr>
+              <a:t>Commit 4</a:t>
+            </a:r>
+          </a:p>
+        </p:txBody>
+      </p:sp>
+      <p:sp>
+        <p:nvSpPr>
+          <p:cNvPr id="29" name="Oval 28">
+            <a:extLst>
+              <a:ext uri="{FF2B5EF4-FFF2-40B4-BE49-F238E27FC236}">
+                <a16:creationId xmlns:a16="http://schemas.microsoft.com/office/drawing/2014/main" id="{DE85D3CB-DC0A-504C-79EE-3249FA71F13E}"/>
+              </a:ext>
+            </a:extLst>
+          </p:cNvPr>
+          <p:cNvSpPr/>
+          <p:nvPr/>
+        </p:nvSpPr>
+        <p:spPr>
+          <a:xfrm>
+            <a:off x="6942772" y="5056738"/>
+            <a:ext cx="258183" cy="258183"/>
+          </a:xfrm>
+          <a:prstGeom prst="ellipse">
+            <a:avLst/>
+          </a:prstGeom>
+          <a:solidFill>
+            <a:schemeClr val="tx1"/>
+          </a:solidFill>
+          <a:ln>
+            <a:noFill/>
+          </a:ln>
+        </p:spPr>
+        <p:style>
+          <a:lnRef idx="2">
+            <a:schemeClr val="accent1">
+              <a:shade val="15000"/>
+            </a:schemeClr>
+          </a:lnRef>
+          <a:fillRef idx="1">
+            <a:schemeClr val="accent1"/>
+          </a:fillRef>
+          <a:effectRef idx="0">
+            <a:schemeClr val="accent1"/>
+          </a:effectRef>
+          <a:fontRef idx="minor">
+            <a:schemeClr val="lt1"/>
+          </a:fontRef>
+        </p:style>
+        <p:txBody>
+          <a:bodyPr rtlCol="0" anchor="ctr"/>
+          <a:lstStyle/>
+          <a:p>
+            <a:pPr algn="ctr"/>
+            <a:endParaRPr lang="en-US"/>
+          </a:p>
+        </p:txBody>
+      </p:sp>
+      <p:sp>
+        <p:nvSpPr>
+          <p:cNvPr id="30" name="TextBox 29">
+            <a:extLst>
+              <a:ext uri="{FF2B5EF4-FFF2-40B4-BE49-F238E27FC236}">
+                <a16:creationId xmlns:a16="http://schemas.microsoft.com/office/drawing/2014/main" id="{5559284E-E11C-CF6A-524B-9D95D566C4D3}"/>
+              </a:ext>
+            </a:extLst>
+          </p:cNvPr>
+          <p:cNvSpPr txBox="1"/>
+          <p:nvPr/>
+        </p:nvSpPr>
+        <p:spPr>
+          <a:xfrm>
+            <a:off x="6310810" y="5445966"/>
+            <a:ext cx="1653174" cy="461665"/>
+          </a:xfrm>
+          <a:prstGeom prst="rect">
+            <a:avLst/>
+          </a:prstGeom>
+          <a:noFill/>
+        </p:spPr>
+        <p:txBody>
+          <a:bodyPr wrap="square" rtlCol="0">
+            <a:spAutoFit/>
+          </a:bodyPr>
+          <a:lstStyle/>
+          <a:p>
+            <a:pPr algn="ctr"/>
+            <a:r>
+              <a:rPr lang="en-US" sz="2400" dirty="0">
+                <a:latin typeface="Arial" panose="020B0604020202020204" pitchFamily="34" charset="0"/>
+                <a:cs typeface="Arial" panose="020B0604020202020204" pitchFamily="34" charset="0"/>
+              </a:rPr>
+              <a:t>Commit 5</a:t>
+            </a:r>
+          </a:p>
+        </p:txBody>
+      </p:sp>
+      <p:cxnSp>
+        <p:nvCxnSpPr>
+          <p:cNvPr id="31" name="Straight Arrow Connector 30">
+            <a:extLst>
+              <a:ext uri="{FF2B5EF4-FFF2-40B4-BE49-F238E27FC236}">
+                <a16:creationId xmlns:a16="http://schemas.microsoft.com/office/drawing/2014/main" id="{C779F368-7F89-3ABB-91F3-D12B5CC309F5}"/>
+              </a:ext>
+            </a:extLst>
+          </p:cNvPr>
+          <p:cNvCxnSpPr>
+            <a:cxnSpLocks/>
+          </p:cNvCxnSpPr>
+          <p:nvPr/>
+        </p:nvCxnSpPr>
+        <p:spPr>
+          <a:xfrm flipV="1">
+            <a:off x="7857683" y="3799157"/>
+            <a:ext cx="622997" cy="1386674"/>
+          </a:xfrm>
+          <a:prstGeom prst="straightConnector1">
+            <a:avLst/>
+          </a:prstGeom>
+          <a:ln w="50800" cap="rnd">
+            <a:solidFill>
+              <a:schemeClr val="tx1"/>
+            </a:solidFill>
+            <a:tailEnd type="none"/>
+          </a:ln>
+        </p:spPr>
+        <p:style>
+          <a:lnRef idx="1">
+            <a:schemeClr val="accent1"/>
+          </a:lnRef>
+          <a:fillRef idx="0">
+            <a:schemeClr val="accent1"/>
+          </a:fillRef>
+          <a:effectRef idx="0">
+            <a:schemeClr val="accent1"/>
+          </a:effectRef>
+          <a:fontRef idx="minor">
+            <a:schemeClr val="tx1"/>
+          </a:fontRef>
+        </p:style>
+      </p:cxnSp>
+      <p:sp>
+        <p:nvSpPr>
+          <p:cNvPr id="33" name="Oval 32">
+            <a:extLst>
+              <a:ext uri="{FF2B5EF4-FFF2-40B4-BE49-F238E27FC236}">
+                <a16:creationId xmlns:a16="http://schemas.microsoft.com/office/drawing/2014/main" id="{2C18CCBA-7803-A7A0-78FC-9764959E1F54}"/>
+              </a:ext>
+            </a:extLst>
+          </p:cNvPr>
+          <p:cNvSpPr/>
+          <p:nvPr/>
+        </p:nvSpPr>
+        <p:spPr>
+          <a:xfrm>
+            <a:off x="8351588" y="3670064"/>
+            <a:ext cx="258183" cy="258183"/>
+          </a:xfrm>
+          <a:prstGeom prst="ellipse">
+            <a:avLst/>
+          </a:prstGeom>
+          <a:solidFill>
+            <a:schemeClr val="tx1"/>
+          </a:solidFill>
+          <a:ln>
+            <a:noFill/>
+          </a:ln>
+        </p:spPr>
+        <p:style>
+          <a:lnRef idx="2">
+            <a:schemeClr val="accent1">
+              <a:shade val="15000"/>
+            </a:schemeClr>
+          </a:lnRef>
+          <a:fillRef idx="1">
+            <a:schemeClr val="accent1"/>
+          </a:fillRef>
+          <a:effectRef idx="0">
+            <a:schemeClr val="accent1"/>
+          </a:effectRef>
+          <a:fontRef idx="minor">
+            <a:schemeClr val="lt1"/>
+          </a:fontRef>
+        </p:style>
+        <p:txBody>
+          <a:bodyPr rtlCol="0" anchor="ctr"/>
+          <a:lstStyle/>
+          <a:p>
+            <a:pPr algn="ctr"/>
+            <a:endParaRPr lang="en-US"/>
+          </a:p>
+        </p:txBody>
+      </p:sp>
+      <p:sp>
+        <p:nvSpPr>
+          <p:cNvPr id="34" name="TextBox 33">
+            <a:extLst>
+              <a:ext uri="{FF2B5EF4-FFF2-40B4-BE49-F238E27FC236}">
+                <a16:creationId xmlns:a16="http://schemas.microsoft.com/office/drawing/2014/main" id="{DE1169D1-CF6C-9388-8669-B93C4C21F410}"/>
+              </a:ext>
+            </a:extLst>
+          </p:cNvPr>
+          <p:cNvSpPr txBox="1"/>
+          <p:nvPr/>
+        </p:nvSpPr>
+        <p:spPr>
+          <a:xfrm>
+            <a:off x="7654092" y="3075164"/>
+            <a:ext cx="1653174" cy="461665"/>
+          </a:xfrm>
+          <a:prstGeom prst="rect">
+            <a:avLst/>
+          </a:prstGeom>
+          <a:noFill/>
+        </p:spPr>
+        <p:txBody>
+          <a:bodyPr wrap="square" rtlCol="0">
+            <a:spAutoFit/>
+          </a:bodyPr>
+          <a:lstStyle/>
+          <a:p>
+            <a:pPr algn="ctr"/>
+            <a:r>
+              <a:rPr lang="en-US" sz="2400" dirty="0">
+                <a:latin typeface="Arial" panose="020B0604020202020204" pitchFamily="34" charset="0"/>
+                <a:cs typeface="Arial" panose="020B0604020202020204" pitchFamily="34" charset="0"/>
+              </a:rPr>
+              <a:t>Commit 6</a:t>
+            </a:r>
+          </a:p>
+        </p:txBody>
+      </p:sp>
+    </p:spTree>
+    <p:extLst>
+      <p:ext uri="{BB962C8B-B14F-4D97-AF65-F5344CB8AC3E}">
+        <p14:creationId xmlns:p14="http://schemas.microsoft.com/office/powerpoint/2010/main" val="628448231"/>
+      </p:ext>
+    </p:extLst>
+  </p:cSld>
+  <p:clrMapOvr>
+    <a:masterClrMapping/>
+  </p:clrMapOvr>
+  <mc:AlternateContent xmlns:mc="http://schemas.openxmlformats.org/markup-compatibility/2006">
+    <mc:Choice xmlns:p14="http://schemas.microsoft.com/office/powerpoint/2010/main" Requires="p14">
+      <p:transition spd="med" p14:dur="700">
+        <p:fade/>
+      </p:transition>
+    </mc:Choice>
+    <mc:Fallback>
+      <p:transition spd="med">
+        <p:fade/>
+      </p:transition>
+    </mc:Fallback>
+  </mc:AlternateContent>
+  <p:timing>
+    <p:tnLst>
+      <p:par>
+        <p:cTn id="1" dur="indefinite" restart="never" nodeType="tmRoot">
+          <p:childTnLst>
+            <p:seq concurrent="1" nextAc="seek">
+              <p:cTn id="2" dur="indefinite" nodeType="mainSeq">
+                <p:childTnLst>
+                  <p:par>
+                    <p:cTn id="3" fill="hold">
+                      <p:stCondLst>
+                        <p:cond delay="indefinite"/>
+                      </p:stCondLst>
+                      <p:childTnLst>
+                        <p:par>
+                          <p:cTn id="4" fill="hold">
+                            <p:stCondLst>
+                              <p:cond delay="0"/>
+                            </p:stCondLst>
+                            <p:childTnLst>
+                              <p:par>
+                                <p:cTn id="5" presetID="22" presetClass="entr" presetSubtype="4" fill="hold" nodeType="clickEffect">
+                                  <p:stCondLst>
+                                    <p:cond delay="0"/>
+                                  </p:stCondLst>
+                                  <p:childTnLst>
+                                    <p:set>
+                                      <p:cBhvr>
+                                        <p:cTn id="6" dur="1" fill="hold">
+                                          <p:stCondLst>
+                                            <p:cond delay="0"/>
+                                          </p:stCondLst>
+                                        </p:cTn>
+                                        <p:tgtEl>
+                                          <p:spTgt spid="31"/>
+                                        </p:tgtEl>
+                                        <p:attrNameLst>
+                                          <p:attrName>style.visibility</p:attrName>
+                                        </p:attrNameLst>
+                                      </p:cBhvr>
+                                      <p:to>
+                                        <p:strVal val="visible"/>
+                                      </p:to>
+                                    </p:set>
+                                    <p:animEffect transition="in" filter="wipe(down)">
+                                      <p:cBhvr>
+                                        <p:cTn id="7" dur="500"/>
+                                        <p:tgtEl>
+                                          <p:spTgt spid="31"/>
+                                        </p:tgtEl>
+                                      </p:cBhvr>
+                                    </p:animEffect>
+                                  </p:childTnLst>
+                                </p:cTn>
+                              </p:par>
+                            </p:childTnLst>
+                          </p:cTn>
+                        </p:par>
+                        <p:par>
+                          <p:cTn id="8" fill="hold">
+                            <p:stCondLst>
+                              <p:cond delay="500"/>
+                            </p:stCondLst>
+                            <p:childTnLst>
+                              <p:par>
+                                <p:cTn id="9" presetID="10" presetClass="entr" presetSubtype="0" fill="hold" grpId="0" nodeType="afterEffect">
+                                  <p:stCondLst>
+                                    <p:cond delay="0"/>
+                                  </p:stCondLst>
+                                  <p:childTnLst>
+                                    <p:set>
+                                      <p:cBhvr>
+                                        <p:cTn id="10" dur="1" fill="hold">
+                                          <p:stCondLst>
+                                            <p:cond delay="0"/>
+                                          </p:stCondLst>
+                                        </p:cTn>
+                                        <p:tgtEl>
+                                          <p:spTgt spid="33"/>
+                                        </p:tgtEl>
+                                        <p:attrNameLst>
+                                          <p:attrName>style.visibility</p:attrName>
+                                        </p:attrNameLst>
+                                      </p:cBhvr>
+                                      <p:to>
+                                        <p:strVal val="visible"/>
+                                      </p:to>
+                                    </p:set>
+                                    <p:animEffect transition="in" filter="fade">
+                                      <p:cBhvr>
+                                        <p:cTn id="11" dur="500"/>
+                                        <p:tgtEl>
+                                          <p:spTgt spid="33"/>
+                                        </p:tgtEl>
+                                      </p:cBhvr>
+                                    </p:animEffect>
+                                  </p:childTnLst>
+                                </p:cTn>
+                              </p:par>
+                              <p:par>
+                                <p:cTn id="12" presetID="10" presetClass="entr" presetSubtype="0" fill="hold" grpId="0" nodeType="withEffect">
+                                  <p:stCondLst>
+                                    <p:cond delay="0"/>
+                                  </p:stCondLst>
+                                  <p:childTnLst>
+                                    <p:set>
+                                      <p:cBhvr>
+                                        <p:cTn id="13" dur="1" fill="hold">
+                                          <p:stCondLst>
+                                            <p:cond delay="0"/>
+                                          </p:stCondLst>
+                                        </p:cTn>
+                                        <p:tgtEl>
+                                          <p:spTgt spid="34"/>
+                                        </p:tgtEl>
+                                        <p:attrNameLst>
+                                          <p:attrName>style.visibility</p:attrName>
+                                        </p:attrNameLst>
+                                      </p:cBhvr>
+                                      <p:to>
+                                        <p:strVal val="visible"/>
+                                      </p:to>
+                                    </p:set>
+                                    <p:animEffect transition="in" filter="fade">
+                                      <p:cBhvr>
+                                        <p:cTn id="14" dur="500"/>
+                                        <p:tgtEl>
+                                          <p:spTgt spid="34"/>
+                                        </p:tgtEl>
+                                      </p:cBhvr>
+                                    </p:animEffect>
+                                  </p:childTnLst>
+                                </p:cTn>
+                              </p:par>
+                            </p:childTnLst>
+                          </p:cTn>
+                        </p:par>
+                      </p:childTnLst>
+                    </p:cTn>
+                  </p:par>
+                </p:childTnLst>
+              </p:cTn>
+              <p:prevCondLst>
+                <p:cond evt="onPrev" delay="0">
+                  <p:tgtEl>
+                    <p:sldTgt/>
+                  </p:tgtEl>
+                </p:cond>
+              </p:prevCondLst>
+              <p:nextCondLst>
+                <p:cond evt="onNext" delay="0">
+                  <p:tgtEl>
+                    <p:sldTgt/>
+                  </p:tgtEl>
+                </p:cond>
+              </p:nextCondLst>
+            </p:seq>
+          </p:childTnLst>
+        </p:cTn>
+      </p:par>
+    </p:tnLst>
+    <p:bldLst>
+      <p:bldP spid="33" grpId="0" animBg="1"/>
+      <p:bldP spid="34" grpId="0"/>
+    </p:bldLst>
+  </p:timing>
+</p:sld>
+</file>
+
+<file path=ppt/slides/slide15.xml><?xml version="1.0" encoding="utf-8"?>
+<p:sld xmlns:a="http://schemas.openxmlformats.org/drawingml/2006/main" xmlns:r="http://schemas.openxmlformats.org/officeDocument/2006/relationships" xmlns:p="http://schemas.openxmlformats.org/presentationml/2006/main">
+  <p:cSld>
+    <p:spTree>
+      <p:nvGrpSpPr>
+        <p:cNvPr id="1" name="">
+          <a:extLst>
+            <a:ext uri="{FF2B5EF4-FFF2-40B4-BE49-F238E27FC236}">
+              <a16:creationId xmlns:a16="http://schemas.microsoft.com/office/drawing/2014/main" id="{B04B7D19-F6A1-FACC-3309-7399D0A10CA3}"/>
+            </a:ext>
+          </a:extLst>
+        </p:cNvPr>
+        <p:cNvGrpSpPr/>
+        <p:nvPr/>
+      </p:nvGrpSpPr>
+      <p:grpSpPr>
+        <a:xfrm>
+          <a:off x="0" y="0"/>
+          <a:ext cx="0" cy="0"/>
+          <a:chOff x="0" y="0"/>
+          <a:chExt cx="0" cy="0"/>
+        </a:xfrm>
+      </p:grpSpPr>
+      <p:sp>
+        <p:nvSpPr>
+          <p:cNvPr id="2" name="Title 1">
+            <a:extLst>
+              <a:ext uri="{FF2B5EF4-FFF2-40B4-BE49-F238E27FC236}">
+                <a16:creationId xmlns:a16="http://schemas.microsoft.com/office/drawing/2014/main" id="{2EBABCDC-F057-56D6-3679-3E14FBC474B8}"/>
+              </a:ext>
+            </a:extLst>
+          </p:cNvPr>
+          <p:cNvSpPr>
+            <a:spLocks noGrp="1"/>
+          </p:cNvSpPr>
+          <p:nvPr>
+            <p:ph type="title"/>
+          </p:nvPr>
+        </p:nvSpPr>
+        <p:spPr/>
+        <p:txBody>
+          <a:bodyPr/>
+          <a:lstStyle/>
+          <a:p>
+            <a:r>
+              <a:rPr lang="en-US" dirty="0"/>
+              <a:t>Merge</a:t>
+            </a:r>
+            <a:endParaRPr lang="en-US" dirty="0">
+              <a:latin typeface="Arial" panose="020B0604020202020204" pitchFamily="34" charset="0"/>
+              <a:cs typeface="Arial" panose="020B0604020202020204" pitchFamily="34" charset="0"/>
+            </a:endParaRPr>
+          </a:p>
+        </p:txBody>
+      </p:sp>
+      <p:cxnSp>
+        <p:nvCxnSpPr>
+          <p:cNvPr id="5" name="Straight Arrow Connector 4">
+            <a:extLst>
+              <a:ext uri="{FF2B5EF4-FFF2-40B4-BE49-F238E27FC236}">
+                <a16:creationId xmlns:a16="http://schemas.microsoft.com/office/drawing/2014/main" id="{08DC844C-1814-CF89-0C96-2327151A484E}"/>
+              </a:ext>
+            </a:extLst>
+          </p:cNvPr>
+          <p:cNvCxnSpPr>
+            <a:cxnSpLocks/>
+          </p:cNvCxnSpPr>
+          <p:nvPr/>
+        </p:nvCxnSpPr>
+        <p:spPr>
+          <a:xfrm flipH="1">
+            <a:off x="3320502" y="3799159"/>
+            <a:ext cx="5550995" cy="0"/>
+          </a:xfrm>
+          <a:prstGeom prst="straightConnector1">
+            <a:avLst/>
+          </a:prstGeom>
+          <a:ln w="50800" cap="rnd">
+            <a:solidFill>
+              <a:schemeClr val="tx1"/>
+            </a:solidFill>
+            <a:tailEnd type="none"/>
+          </a:ln>
+        </p:spPr>
+        <p:style>
+          <a:lnRef idx="1">
+            <a:schemeClr val="accent1"/>
+          </a:lnRef>
+          <a:fillRef idx="0">
+            <a:schemeClr val="accent1"/>
+          </a:fillRef>
+          <a:effectRef idx="0">
+            <a:schemeClr val="accent1"/>
+          </a:effectRef>
+          <a:fontRef idx="minor">
+            <a:schemeClr val="tx1"/>
+          </a:fontRef>
+        </p:style>
+      </p:cxnSp>
+      <p:sp>
+        <p:nvSpPr>
+          <p:cNvPr id="7" name="Oval 6">
+            <a:extLst>
+              <a:ext uri="{FF2B5EF4-FFF2-40B4-BE49-F238E27FC236}">
+                <a16:creationId xmlns:a16="http://schemas.microsoft.com/office/drawing/2014/main" id="{FE363FC4-F1C5-AE55-9351-F81B2B237A4B}"/>
+              </a:ext>
+            </a:extLst>
+          </p:cNvPr>
+          <p:cNvSpPr/>
+          <p:nvPr/>
+        </p:nvSpPr>
+        <p:spPr>
+          <a:xfrm>
+            <a:off x="3144495" y="3670067"/>
+            <a:ext cx="258183" cy="258183"/>
+          </a:xfrm>
+          <a:prstGeom prst="ellipse">
+            <a:avLst/>
+          </a:prstGeom>
+          <a:solidFill>
+            <a:schemeClr val="tx1"/>
+          </a:solidFill>
+          <a:ln>
+            <a:noFill/>
+          </a:ln>
+        </p:spPr>
+        <p:style>
+          <a:lnRef idx="2">
+            <a:schemeClr val="accent1">
+              <a:shade val="15000"/>
+            </a:schemeClr>
+          </a:lnRef>
+          <a:fillRef idx="1">
+            <a:schemeClr val="accent1"/>
+          </a:fillRef>
+          <a:effectRef idx="0">
+            <a:schemeClr val="accent1"/>
+          </a:effectRef>
+          <a:fontRef idx="minor">
+            <a:schemeClr val="lt1"/>
+          </a:fontRef>
+        </p:style>
+        <p:txBody>
+          <a:bodyPr rtlCol="0" anchor="ctr"/>
+          <a:lstStyle/>
+          <a:p>
+            <a:pPr algn="ctr"/>
+            <a:endParaRPr lang="en-US"/>
+          </a:p>
+        </p:txBody>
+      </p:sp>
+      <p:sp>
+        <p:nvSpPr>
+          <p:cNvPr id="13" name="TextBox 12">
+            <a:extLst>
+              <a:ext uri="{FF2B5EF4-FFF2-40B4-BE49-F238E27FC236}">
+                <a16:creationId xmlns:a16="http://schemas.microsoft.com/office/drawing/2014/main" id="{5BFFE7EF-9063-6406-BB9F-ED30F4A3D584}"/>
+              </a:ext>
+            </a:extLst>
+          </p:cNvPr>
+          <p:cNvSpPr txBox="1"/>
+          <p:nvPr/>
+        </p:nvSpPr>
+        <p:spPr>
+          <a:xfrm>
+            <a:off x="2446999" y="4057342"/>
+            <a:ext cx="1653174" cy="461665"/>
+          </a:xfrm>
+          <a:prstGeom prst="rect">
+            <a:avLst/>
+          </a:prstGeom>
+          <a:noFill/>
+        </p:spPr>
+        <p:txBody>
+          <a:bodyPr wrap="square" rtlCol="0">
+            <a:spAutoFit/>
+          </a:bodyPr>
+          <a:lstStyle/>
+          <a:p>
+            <a:pPr algn="ctr"/>
+            <a:r>
+              <a:rPr lang="en-US" sz="2400" dirty="0">
+                <a:latin typeface="Arial" panose="020B0604020202020204" pitchFamily="34" charset="0"/>
+                <a:cs typeface="Arial" panose="020B0604020202020204" pitchFamily="34" charset="0"/>
+              </a:rPr>
+              <a:t>Commit 3</a:t>
+            </a:r>
+          </a:p>
+        </p:txBody>
+      </p:sp>
+      <p:sp>
+        <p:nvSpPr>
+          <p:cNvPr id="3" name="TextBox 2">
+            <a:extLst>
+              <a:ext uri="{FF2B5EF4-FFF2-40B4-BE49-F238E27FC236}">
+                <a16:creationId xmlns:a16="http://schemas.microsoft.com/office/drawing/2014/main" id="{B6921E78-1DAE-B65A-915D-6443F1BA82B6}"/>
+              </a:ext>
+            </a:extLst>
+          </p:cNvPr>
+          <p:cNvSpPr txBox="1"/>
+          <p:nvPr/>
+        </p:nvSpPr>
+        <p:spPr>
+          <a:xfrm>
+            <a:off x="953748" y="3568325"/>
+            <a:ext cx="1653174" cy="461665"/>
+          </a:xfrm>
+          <a:prstGeom prst="rect">
+            <a:avLst/>
+          </a:prstGeom>
+          <a:noFill/>
+        </p:spPr>
+        <p:txBody>
+          <a:bodyPr wrap="square" rtlCol="0">
+            <a:spAutoFit/>
+          </a:bodyPr>
+          <a:lstStyle/>
+          <a:p>
+            <a:pPr algn="r"/>
+            <a:r>
+              <a:rPr lang="en-US" sz="2400" dirty="0">
+                <a:latin typeface="Arial" panose="020B0604020202020204" pitchFamily="34" charset="0"/>
+                <a:cs typeface="Arial" panose="020B0604020202020204" pitchFamily="34" charset="0"/>
+              </a:rPr>
+              <a:t>main</a:t>
+            </a:r>
+          </a:p>
+        </p:txBody>
+      </p:sp>
+      <p:sp>
+        <p:nvSpPr>
+          <p:cNvPr id="4" name="TextBox 3">
+            <a:extLst>
+              <a:ext uri="{FF2B5EF4-FFF2-40B4-BE49-F238E27FC236}">
+                <a16:creationId xmlns:a16="http://schemas.microsoft.com/office/drawing/2014/main" id="{D7891060-7204-88A9-F663-F7FCEC80D9D9}"/>
+              </a:ext>
+            </a:extLst>
+          </p:cNvPr>
+          <p:cNvSpPr txBox="1"/>
+          <p:nvPr/>
+        </p:nvSpPr>
+        <p:spPr>
+          <a:xfrm>
+            <a:off x="354681" y="3040106"/>
+            <a:ext cx="2252241" cy="461665"/>
+          </a:xfrm>
+          <a:prstGeom prst="rect">
+            <a:avLst/>
+          </a:prstGeom>
+          <a:noFill/>
+        </p:spPr>
+        <p:txBody>
+          <a:bodyPr wrap="square" rtlCol="0">
+            <a:spAutoFit/>
+          </a:bodyPr>
+          <a:lstStyle/>
+          <a:p>
+            <a:pPr algn="r"/>
+            <a:r>
+              <a:rPr lang="en-US" sz="2400" dirty="0">
+                <a:solidFill>
+                  <a:schemeClr val="tx2"/>
+                </a:solidFill>
+                <a:latin typeface="Arial" panose="020B0604020202020204" pitchFamily="34" charset="0"/>
+                <a:cs typeface="Arial" panose="020B0604020202020204" pitchFamily="34" charset="0"/>
+              </a:rPr>
+              <a:t>Branch name:</a:t>
+            </a:r>
+          </a:p>
+        </p:txBody>
+      </p:sp>
+      <p:sp>
+        <p:nvSpPr>
+          <p:cNvPr id="27" name="Oval 26">
+            <a:extLst>
+              <a:ext uri="{FF2B5EF4-FFF2-40B4-BE49-F238E27FC236}">
+                <a16:creationId xmlns:a16="http://schemas.microsoft.com/office/drawing/2014/main" id="{A5390A3F-306E-71E1-70B2-9B4344787A88}"/>
+              </a:ext>
+            </a:extLst>
+          </p:cNvPr>
+          <p:cNvSpPr/>
+          <p:nvPr/>
+        </p:nvSpPr>
+        <p:spPr>
+          <a:xfrm>
+            <a:off x="5355132" y="3670065"/>
+            <a:ext cx="258183" cy="258183"/>
+          </a:xfrm>
+          <a:prstGeom prst="ellipse">
+            <a:avLst/>
+          </a:prstGeom>
+          <a:solidFill>
+            <a:schemeClr val="tx1"/>
+          </a:solidFill>
+          <a:ln>
+            <a:noFill/>
+          </a:ln>
+        </p:spPr>
+        <p:style>
+          <a:lnRef idx="2">
+            <a:schemeClr val="accent1">
+              <a:shade val="15000"/>
+            </a:schemeClr>
+          </a:lnRef>
+          <a:fillRef idx="1">
+            <a:schemeClr val="accent1"/>
+          </a:fillRef>
+          <a:effectRef idx="0">
+            <a:schemeClr val="accent1"/>
+          </a:effectRef>
+          <a:fontRef idx="minor">
+            <a:schemeClr val="lt1"/>
+          </a:fontRef>
+        </p:style>
+        <p:txBody>
+          <a:bodyPr rtlCol="0" anchor="ctr"/>
+          <a:lstStyle/>
+          <a:p>
+            <a:pPr algn="ctr"/>
+            <a:endParaRPr lang="en-US"/>
+          </a:p>
+        </p:txBody>
+      </p:sp>
+      <p:sp>
+        <p:nvSpPr>
+          <p:cNvPr id="28" name="TextBox 27">
+            <a:extLst>
+              <a:ext uri="{FF2B5EF4-FFF2-40B4-BE49-F238E27FC236}">
+                <a16:creationId xmlns:a16="http://schemas.microsoft.com/office/drawing/2014/main" id="{DF48857F-C35B-C9C3-A97D-ECB047BC2630}"/>
+              </a:ext>
+            </a:extLst>
+          </p:cNvPr>
+          <p:cNvSpPr txBox="1"/>
+          <p:nvPr/>
+        </p:nvSpPr>
+        <p:spPr>
+          <a:xfrm>
+            <a:off x="4657636" y="4059292"/>
+            <a:ext cx="1653174" cy="461665"/>
+          </a:xfrm>
+          <a:prstGeom prst="rect">
+            <a:avLst/>
+          </a:prstGeom>
+          <a:noFill/>
+        </p:spPr>
+        <p:txBody>
+          <a:bodyPr wrap="square" rtlCol="0">
+            <a:spAutoFit/>
+          </a:bodyPr>
+          <a:lstStyle/>
+          <a:p>
+            <a:pPr algn="ctr"/>
+            <a:r>
+              <a:rPr lang="en-US" sz="2400" dirty="0">
+                <a:latin typeface="Arial" panose="020B0604020202020204" pitchFamily="34" charset="0"/>
+                <a:cs typeface="Arial" panose="020B0604020202020204" pitchFamily="34" charset="0"/>
+              </a:rPr>
+              <a:t>Commit 4</a:t>
+            </a:r>
+          </a:p>
+        </p:txBody>
+      </p:sp>
+      <p:sp>
+        <p:nvSpPr>
+          <p:cNvPr id="29" name="Oval 28">
+            <a:extLst>
+              <a:ext uri="{FF2B5EF4-FFF2-40B4-BE49-F238E27FC236}">
+                <a16:creationId xmlns:a16="http://schemas.microsoft.com/office/drawing/2014/main" id="{BF6D0DB1-4934-EFB0-6388-3FCBDF9923EA}"/>
+              </a:ext>
+            </a:extLst>
+          </p:cNvPr>
+          <p:cNvSpPr/>
+          <p:nvPr/>
+        </p:nvSpPr>
+        <p:spPr>
+          <a:xfrm>
+            <a:off x="6942772" y="3670064"/>
+            <a:ext cx="258183" cy="258183"/>
+          </a:xfrm>
+          <a:prstGeom prst="ellipse">
+            <a:avLst/>
+          </a:prstGeom>
+          <a:solidFill>
+            <a:schemeClr val="tx1"/>
+          </a:solidFill>
+          <a:ln>
+            <a:noFill/>
+          </a:ln>
+        </p:spPr>
+        <p:style>
+          <a:lnRef idx="2">
+            <a:schemeClr val="accent1">
+              <a:shade val="15000"/>
+            </a:schemeClr>
+          </a:lnRef>
+          <a:fillRef idx="1">
+            <a:schemeClr val="accent1"/>
+          </a:fillRef>
+          <a:effectRef idx="0">
+            <a:schemeClr val="accent1"/>
+          </a:effectRef>
+          <a:fontRef idx="minor">
+            <a:schemeClr val="lt1"/>
+          </a:fontRef>
+        </p:style>
+        <p:txBody>
+          <a:bodyPr rtlCol="0" anchor="ctr"/>
+          <a:lstStyle/>
+          <a:p>
+            <a:pPr algn="ctr"/>
+            <a:endParaRPr lang="en-US"/>
+          </a:p>
+        </p:txBody>
+      </p:sp>
+      <p:sp>
+        <p:nvSpPr>
+          <p:cNvPr id="30" name="TextBox 29">
+            <a:extLst>
+              <a:ext uri="{FF2B5EF4-FFF2-40B4-BE49-F238E27FC236}">
+                <a16:creationId xmlns:a16="http://schemas.microsoft.com/office/drawing/2014/main" id="{90C1781E-DE02-0E55-5ACE-4243ED625C50}"/>
+              </a:ext>
+            </a:extLst>
+          </p:cNvPr>
+          <p:cNvSpPr txBox="1"/>
+          <p:nvPr/>
+        </p:nvSpPr>
+        <p:spPr>
+          <a:xfrm>
+            <a:off x="6310810" y="4059292"/>
+            <a:ext cx="1653174" cy="461665"/>
+          </a:xfrm>
+          <a:prstGeom prst="rect">
+            <a:avLst/>
+          </a:prstGeom>
+          <a:noFill/>
+        </p:spPr>
+        <p:txBody>
+          <a:bodyPr wrap="square" rtlCol="0">
+            <a:spAutoFit/>
+          </a:bodyPr>
+          <a:lstStyle/>
+          <a:p>
+            <a:pPr algn="ctr"/>
+            <a:r>
+              <a:rPr lang="en-US" sz="2400" dirty="0">
+                <a:latin typeface="Arial" panose="020B0604020202020204" pitchFamily="34" charset="0"/>
+                <a:cs typeface="Arial" panose="020B0604020202020204" pitchFamily="34" charset="0"/>
+              </a:rPr>
+              <a:t>Commit 5</a:t>
+            </a:r>
+          </a:p>
+        </p:txBody>
+      </p:sp>
+      <p:sp>
+        <p:nvSpPr>
+          <p:cNvPr id="33" name="Oval 32">
+            <a:extLst>
+              <a:ext uri="{FF2B5EF4-FFF2-40B4-BE49-F238E27FC236}">
+                <a16:creationId xmlns:a16="http://schemas.microsoft.com/office/drawing/2014/main" id="{B60A3377-A521-4031-A4A0-E610205E914E}"/>
+              </a:ext>
+            </a:extLst>
+          </p:cNvPr>
+          <p:cNvSpPr/>
+          <p:nvPr/>
+        </p:nvSpPr>
+        <p:spPr>
+          <a:xfrm>
+            <a:off x="8351588" y="3670064"/>
+            <a:ext cx="258183" cy="258183"/>
+          </a:xfrm>
+          <a:prstGeom prst="ellipse">
+            <a:avLst/>
+          </a:prstGeom>
+          <a:solidFill>
+            <a:schemeClr val="tx1"/>
+          </a:solidFill>
+          <a:ln>
+            <a:noFill/>
+          </a:ln>
+        </p:spPr>
+        <p:style>
+          <a:lnRef idx="2">
+            <a:schemeClr val="accent1">
+              <a:shade val="15000"/>
+            </a:schemeClr>
+          </a:lnRef>
+          <a:fillRef idx="1">
+            <a:schemeClr val="accent1"/>
+          </a:fillRef>
+          <a:effectRef idx="0">
+            <a:schemeClr val="accent1"/>
+          </a:effectRef>
+          <a:fontRef idx="minor">
+            <a:schemeClr val="lt1"/>
+          </a:fontRef>
+        </p:style>
+        <p:txBody>
+          <a:bodyPr rtlCol="0" anchor="ctr"/>
+          <a:lstStyle/>
+          <a:p>
+            <a:pPr algn="ctr"/>
+            <a:endParaRPr lang="en-US"/>
+          </a:p>
+        </p:txBody>
+      </p:sp>
+      <p:sp>
+        <p:nvSpPr>
+          <p:cNvPr id="34" name="TextBox 33">
+            <a:extLst>
+              <a:ext uri="{FF2B5EF4-FFF2-40B4-BE49-F238E27FC236}">
+                <a16:creationId xmlns:a16="http://schemas.microsoft.com/office/drawing/2014/main" id="{64014353-5A09-3C77-C710-6D6E103D550F}"/>
+              </a:ext>
+            </a:extLst>
+          </p:cNvPr>
+          <p:cNvSpPr txBox="1"/>
+          <p:nvPr/>
+        </p:nvSpPr>
+        <p:spPr>
+          <a:xfrm>
+            <a:off x="7654092" y="3075164"/>
+            <a:ext cx="1653174" cy="461665"/>
+          </a:xfrm>
+          <a:prstGeom prst="rect">
+            <a:avLst/>
+          </a:prstGeom>
+          <a:noFill/>
+        </p:spPr>
+        <p:txBody>
+          <a:bodyPr wrap="square" rtlCol="0">
+            <a:spAutoFit/>
+          </a:bodyPr>
+          <a:lstStyle/>
+          <a:p>
+            <a:pPr algn="ctr"/>
+            <a:r>
+              <a:rPr lang="en-US" sz="2400" dirty="0">
+                <a:latin typeface="Arial" panose="020B0604020202020204" pitchFamily="34" charset="0"/>
+                <a:cs typeface="Arial" panose="020B0604020202020204" pitchFamily="34" charset="0"/>
+              </a:rPr>
+              <a:t>Commit 6</a:t>
+            </a:r>
+          </a:p>
+        </p:txBody>
+      </p:sp>
+    </p:spTree>
+    <p:extLst>
+      <p:ext uri="{BB962C8B-B14F-4D97-AF65-F5344CB8AC3E}">
+        <p14:creationId xmlns:p14="http://schemas.microsoft.com/office/powerpoint/2010/main" val="1832304165"/>
+      </p:ext>
+    </p:extLst>
+  </p:cSld>
+  <p:clrMapOvr>
+    <a:masterClrMapping/>
+  </p:clrMapOvr>
+  <mc:AlternateContent xmlns:mc="http://schemas.openxmlformats.org/markup-compatibility/2006">
+    <mc:Choice xmlns:p14="http://schemas.microsoft.com/office/powerpoint/2010/main" Requires="p14">
+      <p:transition spd="med" p14:dur="700">
+        <p:fade/>
+      </p:transition>
+    </mc:Choice>
+    <mc:Fallback>
+      <p:transition spd="med">
+        <p:fade/>
+      </p:transition>
+    </mc:Fallback>
+  </mc:AlternateContent>
+</p:sld>
+</file>
+
+<file path=ppt/slides/slide16.xml><?xml version="1.0" encoding="utf-8"?>
+<p:sld xmlns:a="http://schemas.openxmlformats.org/drawingml/2006/main" xmlns:r="http://schemas.openxmlformats.org/officeDocument/2006/relationships" xmlns:p="http://schemas.openxmlformats.org/presentationml/2006/main">
+  <p:cSld>
+    <p:spTree>
+      <p:nvGrpSpPr>
+        <p:cNvPr id="1" name="">
+          <a:extLst>
+            <a:ext uri="{FF2B5EF4-FFF2-40B4-BE49-F238E27FC236}">
+              <a16:creationId xmlns:a16="http://schemas.microsoft.com/office/drawing/2014/main" id="{FC9B96C6-1E78-90BC-D66C-D44E46F64AAE}"/>
+            </a:ext>
+          </a:extLst>
+        </p:cNvPr>
+        <p:cNvGrpSpPr/>
+        <p:nvPr/>
+      </p:nvGrpSpPr>
+      <p:grpSpPr>
+        <a:xfrm>
+          <a:off x="0" y="0"/>
+          <a:ext cx="0" cy="0"/>
+          <a:chOff x="0" y="0"/>
+          <a:chExt cx="0" cy="0"/>
+        </a:xfrm>
+      </p:grpSpPr>
+      <p:sp>
+        <p:nvSpPr>
+          <p:cNvPr id="2" name="Title 1">
+            <a:extLst>
+              <a:ext uri="{FF2B5EF4-FFF2-40B4-BE49-F238E27FC236}">
+                <a16:creationId xmlns:a16="http://schemas.microsoft.com/office/drawing/2014/main" id="{18189816-1054-F384-F3B5-3B050656CE44}"/>
+              </a:ext>
+            </a:extLst>
+          </p:cNvPr>
+          <p:cNvSpPr>
+            <a:spLocks noGrp="1"/>
+          </p:cNvSpPr>
+          <p:nvPr>
+            <p:ph type="title"/>
+          </p:nvPr>
+        </p:nvSpPr>
+        <p:spPr/>
+        <p:txBody>
+          <a:bodyPr/>
+          <a:lstStyle/>
+          <a:p>
+            <a:r>
+              <a:rPr lang="en-US" dirty="0"/>
+              <a:t>Hands-on Exercises</a:t>
+            </a:r>
+            <a:endParaRPr lang="en-US" dirty="0">
+              <a:latin typeface="Arial" panose="020B0604020202020204" pitchFamily="34" charset="0"/>
+              <a:cs typeface="Arial" panose="020B0604020202020204" pitchFamily="34" charset="0"/>
+            </a:endParaRPr>
+          </a:p>
+        </p:txBody>
+      </p:sp>
+      <p:sp>
+        <p:nvSpPr>
+          <p:cNvPr id="4" name="TextBox 3">
+            <a:extLst>
+              <a:ext uri="{FF2B5EF4-FFF2-40B4-BE49-F238E27FC236}">
+                <a16:creationId xmlns:a16="http://schemas.microsoft.com/office/drawing/2014/main" id="{3D1B5287-5022-71D5-79F5-0916EA262460}"/>
+              </a:ext>
+            </a:extLst>
+          </p:cNvPr>
+          <p:cNvSpPr txBox="1"/>
+          <p:nvPr/>
+        </p:nvSpPr>
+        <p:spPr>
+          <a:xfrm>
+            <a:off x="424132" y="2890391"/>
+            <a:ext cx="11343735" cy="1077218"/>
+          </a:xfrm>
+          <a:prstGeom prst="rect">
+            <a:avLst/>
+          </a:prstGeom>
+          <a:noFill/>
+        </p:spPr>
+        <p:txBody>
+          <a:bodyPr wrap="square">
+            <a:spAutoFit/>
+          </a:bodyPr>
+          <a:lstStyle/>
+          <a:p>
+            <a:r>
+              <a:rPr lang="en-US" sz="3200" dirty="0">
+                <a:latin typeface="Arial" panose="020B0604020202020204" pitchFamily="34" charset="0"/>
+                <a:cs typeface="Arial" panose="020B0604020202020204" pitchFamily="34" charset="0"/>
+              </a:rPr>
+              <a:t>Follow the README instructions here: </a:t>
+            </a:r>
+            <a:r>
+              <a:rPr lang="en-US" sz="3200" dirty="0">
+                <a:solidFill>
+                  <a:schemeClr val="tx2"/>
+                </a:solidFill>
+                <a:latin typeface="Arial" panose="020B0604020202020204" pitchFamily="34" charset="0"/>
+                <a:cs typeface="Arial" panose="020B0604020202020204" pitchFamily="34" charset="0"/>
+              </a:rPr>
+              <a:t>github.com/ShawnHymel/workshop-intro-to-git-and-github</a:t>
+            </a:r>
+          </a:p>
+        </p:txBody>
+      </p:sp>
+      <p:sp>
+        <p:nvSpPr>
+          <p:cNvPr id="3" name="TextBox 2">
+            <a:extLst>
+              <a:ext uri="{FF2B5EF4-FFF2-40B4-BE49-F238E27FC236}">
+                <a16:creationId xmlns:a16="http://schemas.microsoft.com/office/drawing/2014/main" id="{7FD73620-787C-6FE2-785A-803D9D55C517}"/>
+              </a:ext>
+            </a:extLst>
+          </p:cNvPr>
+          <p:cNvSpPr txBox="1"/>
+          <p:nvPr/>
+        </p:nvSpPr>
+        <p:spPr>
+          <a:xfrm>
+            <a:off x="424132" y="4628703"/>
+            <a:ext cx="11343735" cy="1569660"/>
+          </a:xfrm>
+          <a:prstGeom prst="rect">
+            <a:avLst/>
+          </a:prstGeom>
+          <a:noFill/>
+        </p:spPr>
+        <p:txBody>
+          <a:bodyPr wrap="square">
+            <a:spAutoFit/>
+          </a:bodyPr>
+          <a:lstStyle/>
+          <a:p>
+            <a:r>
+              <a:rPr lang="en-US" sz="3200" dirty="0">
+                <a:latin typeface="Arial" panose="020B0604020202020204" pitchFamily="34" charset="0"/>
+                <a:cs typeface="Arial" panose="020B0604020202020204" pitchFamily="34" charset="0"/>
+              </a:rPr>
+              <a:t>Do:</a:t>
+            </a:r>
+            <a:endParaRPr lang="en-US" sz="3200" dirty="0">
+              <a:solidFill>
+                <a:schemeClr val="tx2"/>
+              </a:solidFill>
+              <a:latin typeface="Arial" panose="020B0604020202020204" pitchFamily="34" charset="0"/>
+              <a:cs typeface="Arial" panose="020B0604020202020204" pitchFamily="34" charset="0"/>
+            </a:endParaRPr>
+          </a:p>
+          <a:p>
+            <a:pPr marL="457200" indent="-457200">
+              <a:buFont typeface="Arial" panose="020B0604020202020204" pitchFamily="34" charset="0"/>
+              <a:buChar char="•"/>
+            </a:pPr>
+            <a:r>
+              <a:rPr lang="en-US" sz="3200" dirty="0">
+                <a:solidFill>
+                  <a:schemeClr val="tx2"/>
+                </a:solidFill>
+                <a:latin typeface="Arial" panose="020B0604020202020204" pitchFamily="34" charset="0"/>
+                <a:cs typeface="Arial" panose="020B0604020202020204" pitchFamily="34" charset="0"/>
+              </a:rPr>
+              <a:t>Hands-on exercise 3</a:t>
+            </a:r>
+          </a:p>
+          <a:p>
+            <a:pPr marL="457200" indent="-457200">
+              <a:buFont typeface="Arial" panose="020B0604020202020204" pitchFamily="34" charset="0"/>
+              <a:buChar char="•"/>
+            </a:pPr>
+            <a:r>
+              <a:rPr lang="en-US" sz="3200" dirty="0">
+                <a:solidFill>
+                  <a:schemeClr val="tx2"/>
+                </a:solidFill>
+                <a:latin typeface="Arial" panose="020B0604020202020204" pitchFamily="34" charset="0"/>
+                <a:cs typeface="Arial" panose="020B0604020202020204" pitchFamily="34" charset="0"/>
+              </a:rPr>
+              <a:t>Challenge 4</a:t>
+            </a:r>
+          </a:p>
+        </p:txBody>
+      </p:sp>
+    </p:spTree>
+    <p:extLst>
+      <p:ext uri="{BB962C8B-B14F-4D97-AF65-F5344CB8AC3E}">
+        <p14:creationId xmlns:p14="http://schemas.microsoft.com/office/powerpoint/2010/main" val="3676452451"/>
+      </p:ext>
+    </p:extLst>
+  </p:cSld>
+  <p:clrMapOvr>
+    <a:masterClrMapping/>
+  </p:clrMapOvr>
+  <mc:AlternateContent xmlns:mc="http://schemas.openxmlformats.org/markup-compatibility/2006">
+    <mc:Choice xmlns:p14="http://schemas.microsoft.com/office/powerpoint/2010/main" Requires="p14">
+      <p:transition spd="med" p14:dur="700">
+        <p:fade/>
+      </p:transition>
+    </mc:Choice>
+    <mc:Fallback>
+      <p:transition spd="med">
+        <p:fade/>
+      </p:transition>
+    </mc:Fallback>
+  </mc:AlternateContent>
 </p:sld>
 </file>
 
@@ -3192,6 +7241,18 @@
   <p:clrMapOvr>
     <a:masterClrMapping/>
   </p:clrMapOvr>
+  <mc:AlternateContent xmlns:mc="http://schemas.openxmlformats.org/markup-compatibility/2006">
+    <mc:Choice xmlns:p14="http://schemas.microsoft.com/office/powerpoint/2010/main" Requires="p14">
+      <p:transition spd="med" p14:dur="700">
+        <p:fade/>
+      </p:transition>
+    </mc:Choice>
+    <mc:Fallback>
+      <p:transition spd="med">
+        <p:fade/>
+      </p:transition>
+    </mc:Fallback>
+  </mc:AlternateContent>
 </p:sld>
 </file>
 
@@ -3385,6 +7446,18 @@
   <p:clrMapOvr>
     <a:masterClrMapping/>
   </p:clrMapOvr>
+  <mc:AlternateContent xmlns:mc="http://schemas.openxmlformats.org/markup-compatibility/2006">
+    <mc:Choice xmlns:p14="http://schemas.microsoft.com/office/powerpoint/2010/main" Requires="p14">
+      <p:transition spd="med" p14:dur="700">
+        <p:fade/>
+      </p:transition>
+    </mc:Choice>
+    <mc:Fallback>
+      <p:transition spd="med">
+        <p:fade/>
+      </p:transition>
+    </mc:Fallback>
+  </mc:AlternateContent>
 </p:sld>
 </file>
 
@@ -3475,6 +7548,18 @@
   <p:clrMapOvr>
     <a:masterClrMapping/>
   </p:clrMapOvr>
+  <mc:AlternateContent xmlns:mc="http://schemas.openxmlformats.org/markup-compatibility/2006">
+    <mc:Choice xmlns:p14="http://schemas.microsoft.com/office/powerpoint/2010/main" Requires="p14">
+      <p:transition spd="med" p14:dur="700">
+        <p:fade/>
+      </p:transition>
+    </mc:Choice>
+    <mc:Fallback>
+      <p:transition spd="med">
+        <p:fade/>
+      </p:transition>
+    </mc:Fallback>
+  </mc:AlternateContent>
 </p:sld>
 </file>
 
@@ -3976,6 +8061,18 @@
   <p:clrMapOvr>
     <a:masterClrMapping/>
   </p:clrMapOvr>
+  <mc:AlternateContent xmlns:mc="http://schemas.openxmlformats.org/markup-compatibility/2006">
+    <mc:Choice xmlns:p14="http://schemas.microsoft.com/office/powerpoint/2010/main" Requires="p14">
+      <p:transition spd="med" p14:dur="700">
+        <p:fade/>
+      </p:transition>
+    </mc:Choice>
+    <mc:Fallback>
+      <p:transition spd="med">
+        <p:fade/>
+      </p:transition>
+    </mc:Fallback>
+  </mc:AlternateContent>
   <p:timing>
     <p:tnLst>
       <p:par>
@@ -4813,6 +8910,18 @@
   <p:clrMapOvr>
     <a:masterClrMapping/>
   </p:clrMapOvr>
+  <mc:AlternateContent xmlns:mc="http://schemas.openxmlformats.org/markup-compatibility/2006">
+    <mc:Choice xmlns:p14="http://schemas.microsoft.com/office/powerpoint/2010/main" Requires="p14">
+      <p:transition spd="med" p14:dur="700">
+        <p:fade/>
+      </p:transition>
+    </mc:Choice>
+    <mc:Fallback>
+      <p:transition spd="med">
+        <p:fade/>
+      </p:transition>
+    </mc:Fallback>
+  </mc:AlternateContent>
   <p:timing>
     <p:tnLst>
       <p:par>
@@ -5624,6 +9733,18 @@
   <p:clrMapOvr>
     <a:masterClrMapping/>
   </p:clrMapOvr>
+  <mc:AlternateContent xmlns:mc="http://schemas.openxmlformats.org/markup-compatibility/2006">
+    <mc:Choice xmlns:p14="http://schemas.microsoft.com/office/powerpoint/2010/main" Requires="p14">
+      <p:transition spd="med" p14:dur="700">
+        <p:fade/>
+      </p:transition>
+    </mc:Choice>
+    <mc:Fallback>
+      <p:transition spd="med">
+        <p:fade/>
+      </p:transition>
+    </mc:Fallback>
+  </mc:AlternateContent>
   <p:timing>
     <p:tnLst>
       <p:par>
@@ -5949,6 +10070,87 @@
           </a:p>
         </p:txBody>
       </p:sp>
+      <p:sp>
+        <p:nvSpPr>
+          <p:cNvPr id="3" name="TextBox 2">
+            <a:extLst>
+              <a:ext uri="{FF2B5EF4-FFF2-40B4-BE49-F238E27FC236}">
+                <a16:creationId xmlns:a16="http://schemas.microsoft.com/office/drawing/2014/main" id="{07091716-3D95-8EDE-D749-EEA6FFFF51FD}"/>
+              </a:ext>
+            </a:extLst>
+          </p:cNvPr>
+          <p:cNvSpPr txBox="1"/>
+          <p:nvPr/>
+        </p:nvSpPr>
+        <p:spPr>
+          <a:xfrm>
+            <a:off x="424132" y="4628703"/>
+            <a:ext cx="11343735" cy="1569660"/>
+          </a:xfrm>
+          <a:prstGeom prst="rect">
+            <a:avLst/>
+          </a:prstGeom>
+          <a:noFill/>
+        </p:spPr>
+        <p:txBody>
+          <a:bodyPr wrap="square">
+            <a:spAutoFit/>
+          </a:bodyPr>
+          <a:lstStyle/>
+          <a:p>
+            <a:r>
+              <a:rPr lang="en-US" sz="3200" dirty="0">
+                <a:latin typeface="Arial" panose="020B0604020202020204" pitchFamily="34" charset="0"/>
+                <a:cs typeface="Arial" panose="020B0604020202020204" pitchFamily="34" charset="0"/>
+              </a:rPr>
+              <a:t>Do:</a:t>
+            </a:r>
+            <a:endParaRPr lang="en-US" sz="3200" dirty="0">
+              <a:solidFill>
+                <a:schemeClr val="tx2"/>
+              </a:solidFill>
+              <a:latin typeface="Arial" panose="020B0604020202020204" pitchFamily="34" charset="0"/>
+              <a:cs typeface="Arial" panose="020B0604020202020204" pitchFamily="34" charset="0"/>
+            </a:endParaRPr>
+          </a:p>
+          <a:p>
+            <a:pPr marL="457200" indent="-457200">
+              <a:buFont typeface="Arial" panose="020B0604020202020204" pitchFamily="34" charset="0"/>
+              <a:buChar char="•"/>
+            </a:pPr>
+            <a:r>
+              <a:rPr lang="en-US" sz="3200" dirty="0">
+                <a:solidFill>
+                  <a:schemeClr val="tx2"/>
+                </a:solidFill>
+                <a:latin typeface="Arial" panose="020B0604020202020204" pitchFamily="34" charset="0"/>
+                <a:cs typeface="Arial" panose="020B0604020202020204" pitchFamily="34" charset="0"/>
+              </a:rPr>
+              <a:t>Hands-on exercise 1</a:t>
+            </a:r>
+          </a:p>
+          <a:p>
+            <a:pPr marL="457200" indent="-457200">
+              <a:buFont typeface="Arial" panose="020B0604020202020204" pitchFamily="34" charset="0"/>
+              <a:buChar char="•"/>
+            </a:pPr>
+            <a:r>
+              <a:rPr lang="en-US" sz="3200" dirty="0">
+                <a:solidFill>
+                  <a:schemeClr val="tx2"/>
+                </a:solidFill>
+                <a:latin typeface="Arial" panose="020B0604020202020204" pitchFamily="34" charset="0"/>
+                <a:cs typeface="Arial" panose="020B0604020202020204" pitchFamily="34" charset="0"/>
+              </a:rPr>
+              <a:t>Challenges 1-3</a:t>
+            </a:r>
+            <a:endParaRPr lang="en-US" sz="3200" dirty="0">
+              <a:latin typeface="Arial" panose="020B0604020202020204" pitchFamily="34" charset="0"/>
+              <a:cs typeface="Arial" panose="020B0604020202020204" pitchFamily="34" charset="0"/>
+            </a:endParaRPr>
+          </a:p>
+        </p:txBody>
+      </p:sp>
     </p:spTree>
     <p:extLst>
       <p:ext uri="{BB962C8B-B14F-4D97-AF65-F5344CB8AC3E}">
@@ -5959,6 +10161,126 @@
   <p:clrMapOvr>
     <a:masterClrMapping/>
   </p:clrMapOvr>
+  <mc:AlternateContent xmlns:mc="http://schemas.openxmlformats.org/markup-compatibility/2006">
+    <mc:Choice xmlns:p14="http://schemas.microsoft.com/office/powerpoint/2010/main" Requires="p14">
+      <p:transition spd="med" p14:dur="700">
+        <p:fade/>
+      </p:transition>
+    </mc:Choice>
+    <mc:Fallback>
+      <p:transition spd="med">
+        <p:fade/>
+      </p:transition>
+    </mc:Fallback>
+  </mc:AlternateContent>
+</p:sld>
+</file>
+
+<file path=ppt/slides/slide9.xml><?xml version="1.0" encoding="utf-8"?>
+<p:sld xmlns:a="http://schemas.openxmlformats.org/drawingml/2006/main" xmlns:r="http://schemas.openxmlformats.org/officeDocument/2006/relationships" xmlns:p="http://schemas.openxmlformats.org/presentationml/2006/main">
+  <p:cSld>
+    <p:spTree>
+      <p:nvGrpSpPr>
+        <p:cNvPr id="1" name="">
+          <a:extLst>
+            <a:ext uri="{FF2B5EF4-FFF2-40B4-BE49-F238E27FC236}">
+              <a16:creationId xmlns:a16="http://schemas.microsoft.com/office/drawing/2014/main" id="{56CDADC1-CDCB-A3B1-6254-DA6485ECA3DB}"/>
+            </a:ext>
+          </a:extLst>
+        </p:cNvPr>
+        <p:cNvGrpSpPr/>
+        <p:nvPr/>
+      </p:nvGrpSpPr>
+      <p:grpSpPr>
+        <a:xfrm>
+          <a:off x="0" y="0"/>
+          <a:ext cx="0" cy="0"/>
+          <a:chOff x="0" y="0"/>
+          <a:chExt cx="0" cy="0"/>
+        </a:xfrm>
+      </p:grpSpPr>
+      <p:sp>
+        <p:nvSpPr>
+          <p:cNvPr id="5" name="Title 4">
+            <a:extLst>
+              <a:ext uri="{FF2B5EF4-FFF2-40B4-BE49-F238E27FC236}">
+                <a16:creationId xmlns:a16="http://schemas.microsoft.com/office/drawing/2014/main" id="{A2208333-37E3-3361-56C6-F4F10FC37B3D}"/>
+              </a:ext>
+            </a:extLst>
+          </p:cNvPr>
+          <p:cNvSpPr>
+            <a:spLocks noGrp="1"/>
+          </p:cNvSpPr>
+          <p:nvPr>
+            <p:ph type="title"/>
+          </p:nvPr>
+        </p:nvSpPr>
+        <p:spPr/>
+        <p:txBody>
+          <a:bodyPr/>
+          <a:lstStyle/>
+          <a:p>
+            <a:r>
+              <a:rPr lang="en-US" dirty="0"/>
+              <a:t>Part 2</a:t>
+            </a:r>
+          </a:p>
+        </p:txBody>
+      </p:sp>
+      <p:sp>
+        <p:nvSpPr>
+          <p:cNvPr id="6" name="Text Placeholder 5">
+            <a:extLst>
+              <a:ext uri="{FF2B5EF4-FFF2-40B4-BE49-F238E27FC236}">
+                <a16:creationId xmlns:a16="http://schemas.microsoft.com/office/drawing/2014/main" id="{287C32FA-195F-874F-6C02-3DFB553E79FD}"/>
+              </a:ext>
+            </a:extLst>
+          </p:cNvPr>
+          <p:cNvSpPr>
+            <a:spLocks noGrp="1"/>
+          </p:cNvSpPr>
+          <p:nvPr>
+            <p:ph type="body" idx="1"/>
+          </p:nvPr>
+        </p:nvSpPr>
+        <p:spPr/>
+        <p:txBody>
+          <a:bodyPr/>
+          <a:lstStyle/>
+          <a:p>
+            <a:r>
+              <a:rPr lang="en-US" dirty="0">
+                <a:solidFill>
+                  <a:schemeClr val="tx2"/>
+                </a:solidFill>
+              </a:rPr>
+              <a:t>Revert a Change</a:t>
+            </a:r>
+          </a:p>
+        </p:txBody>
+      </p:sp>
+    </p:spTree>
+    <p:extLst>
+      <p:ext uri="{BB962C8B-B14F-4D97-AF65-F5344CB8AC3E}">
+        <p14:creationId xmlns:p14="http://schemas.microsoft.com/office/powerpoint/2010/main" val="754422178"/>
+      </p:ext>
+    </p:extLst>
+  </p:cSld>
+  <p:clrMapOvr>
+    <a:masterClrMapping/>
+  </p:clrMapOvr>
+  <mc:AlternateContent xmlns:mc="http://schemas.openxmlformats.org/markup-compatibility/2006">
+    <mc:Choice xmlns:p14="http://schemas.microsoft.com/office/powerpoint/2010/main" Requires="p14">
+      <p:transition spd="med" p14:dur="700">
+        <p:fade/>
+      </p:transition>
+    </mc:Choice>
+    <mc:Fallback>
+      <p:transition spd="med">
+        <p:fade/>
+      </p:transition>
+    </mc:Fallback>
+  </mc:AlternateContent>
 </p:sld>
 </file>
 
